--- a/slides/Slide_trinh_bay_DeTai35.pptx
+++ b/slides/Slide_trinh_bay_DeTai35.pptx
@@ -4,6 +4,9 @@
   <p:sldMasterIdLst>
     <p:sldMasterId id="2147483648" r:id="rId1"/>
   </p:sldMasterIdLst>
+  <p:notesMasterIdLst>
+    <p:notesMasterId r:id="rId13"/>
+  </p:notesMasterIdLst>
   <p:sldIdLst>
     <p:sldId id="256" r:id="rId2"/>
     <p:sldId id="257" r:id="rId3"/>
@@ -17,9 +20,6 @@
     <p:sldId id="265" r:id="rId11"/>
     <p:sldId id="266" r:id="rId12"/>
   </p:sldIdLst>
-  <p:notesMasterIdLst>
-    <p:notesMasterId r:id="rId13"/>
-  </p:notesMasterIdLst>
   <p:sldSz cx="12192000" cy="6858000"/>
   <p:notesSz cx="6858000" cy="12192000"/>
   <p:defaultTextStyle>
@@ -114,6 +114,11 @@
       </a:defRPr>
     </a:lvl9pPr>
   </p:defaultTextStyle>
+  <p:extLst>
+    <p:ext uri="{EFAFB233-063F-42B5-8137-9DF3F51BA10A}">
+      <p15:sldGuideLst xmlns:p15="http://schemas.microsoft.com/office/powerpoint/2012/main"/>
+    </p:ext>
+  </p:extLst>
 </p:presentation>
 </file>
 
@@ -139,234 +144,10 @@
           <a:chExt cx="0" cy="0"/>
         </a:xfrm>
       </p:grpSpPr>
-      <p:sp>
-        <p:nvSpPr>
-          <p:cNvPr id="2" name="Header Placeholder 1"/>
-          <p:cNvSpPr>
-            <a:spLocks noGrp="1"/>
-          </p:cNvSpPr>
-          <p:nvPr>
-            <p:ph type="hdr" sz="quarter"/>
-          </p:nvPr>
-        </p:nvSpPr>
-        <p:spPr>
-          <a:xfrm>
-            <a:off x="0" y="0"/>
-            <a:ext cx="2971800" cy="458788"/>
-          </a:xfrm>
-          <a:prstGeom prst="rect">
-            <a:avLst/>
-          </a:prstGeom>
-        </p:spPr>
-        <p:txBody>
-          <a:bodyPr vert="horz" lIns="91440" tIns="45720" rIns="91440" bIns="45720" rtlCol="0"/>
-          <a:lstStyle>
-            <a:lvl1pPr algn="l">
-              <a:defRPr sz="1200"/>
-            </a:lvl1pPr>
-          </a:lstStyle>
-          <a:p>
-            <a:endParaRPr lang="en-US"/>
-          </a:p>
-        </p:txBody>
-      </p:sp>
-      <p:sp>
-        <p:nvSpPr>
-          <p:cNvPr id="3" name="Date Placeholder 2"/>
-          <p:cNvSpPr>
-            <a:spLocks noGrp="1"/>
-          </p:cNvSpPr>
-          <p:nvPr>
-            <p:ph type="dt" idx="1"/>
-          </p:nvPr>
-        </p:nvSpPr>
-        <p:spPr>
-          <a:xfrm>
-            <a:off x="3884613" y="0"/>
-            <a:ext cx="2971800" cy="458788"/>
-          </a:xfrm>
-          <a:prstGeom prst="rect">
-            <a:avLst/>
-          </a:prstGeom>
-        </p:spPr>
-        <p:txBody>
-          <a:bodyPr vert="horz" lIns="91440" tIns="45720" rIns="91440" bIns="45720" rtlCol="0"/>
-          <a:lstStyle>
-            <a:lvl1pPr algn="r">
-              <a:defRPr sz="1200"/>
-            </a:lvl1pPr>
-          </a:lstStyle>
-          <a:p>
-            <a:fld id="{5282F153-3F37-0F45-9E97-73ACFA13230C}" type="datetimeFigureOut">
-              <a:rPr lang="en-US"/>
-              <a:t>7/23/19</a:t>
-            </a:fld>
-            <a:endParaRPr lang="en-US"/>
-          </a:p>
-        </p:txBody>
-      </p:sp>
-      <p:sp>
-        <p:nvSpPr>
-          <p:cNvPr id="4" name="Slide Image Placeholder 3"/>
-          <p:cNvSpPr>
-            <a:spLocks noGrp="1" noRot="1" noChangeAspect="1"/>
-          </p:cNvSpPr>
-          <p:nvPr>
-            <p:ph type="sldImg" idx="2"/>
-          </p:nvPr>
-        </p:nvSpPr>
-        <p:spPr>
-          <a:xfrm>
-            <a:off x="685800" y="1143000"/>
-            <a:ext cx="5486400" cy="3086100"/>
-          </a:xfrm>
-          <a:prstGeom prst="rect">
-            <a:avLst/>
-          </a:prstGeom>
-          <a:noFill/>
-          <a:ln w="12700">
-            <a:solidFill>
-              <a:prstClr val="black"/>
-            </a:solidFill>
-          </a:ln>
-        </p:spPr>
-        <p:txBody>
-          <a:bodyPr vert="horz" lIns="91440" tIns="45720" rIns="91440" bIns="45720" rtlCol="0" anchor="ctr"/>
-          <a:lstStyle/>
-          <a:p>
-            <a:endParaRPr lang="en-US"/>
-          </a:p>
-        </p:txBody>
-      </p:sp>
-      <p:sp>
-        <p:nvSpPr>
-          <p:cNvPr id="5" name="Notes Placeholder 4"/>
-          <p:cNvSpPr>
-            <a:spLocks noGrp="1"/>
-          </p:cNvSpPr>
-          <p:nvPr>
-            <p:ph type="body" sz="quarter" idx="3"/>
-          </p:nvPr>
-        </p:nvSpPr>
-        <p:spPr>
-          <a:xfrm>
-            <a:off x="685800" y="4400550"/>
-            <a:ext cx="5486400" cy="3600450"/>
-          </a:xfrm>
-          <a:prstGeom prst="rect">
-            <a:avLst/>
-          </a:prstGeom>
-        </p:spPr>
-        <p:txBody>
-          <a:bodyPr vert="horz" lIns="91440" tIns="45720" rIns="91440" bIns="45720" rtlCol="0"/>
-          <a:lstStyle/>
-          <a:p>
-            <a:pPr lvl="0"/>
-            <a:r>
-              <a:rPr lang="en-US"/>
-              <a:t>Click to edit Master text styles</a:t>
-            </a:r>
-          </a:p>
-          <a:p>
-            <a:pPr lvl="1"/>
-            <a:r>
-              <a:rPr lang="en-US"/>
-              <a:t>Second level</a:t>
-            </a:r>
-          </a:p>
-          <a:p>
-            <a:pPr lvl="2"/>
-            <a:r>
-              <a:rPr lang="en-US"/>
-              <a:t>Third level</a:t>
-            </a:r>
-          </a:p>
-          <a:p>
-            <a:pPr lvl="3"/>
-            <a:r>
-              <a:rPr lang="en-US"/>
-              <a:t>Fourth level</a:t>
-            </a:r>
-          </a:p>
-          <a:p>
-            <a:pPr lvl="4"/>
-            <a:r>
-              <a:rPr lang="en-US"/>
-              <a:t>Fifth level</a:t>
-            </a:r>
-          </a:p>
-        </p:txBody>
-      </p:sp>
-      <p:sp>
-        <p:nvSpPr>
-          <p:cNvPr id="6" name="Footer Placeholder 5"/>
-          <p:cNvSpPr>
-            <a:spLocks noGrp="1"/>
-          </p:cNvSpPr>
-          <p:nvPr>
-            <p:ph type="ftr" sz="quarter" idx="4"/>
-          </p:nvPr>
-        </p:nvSpPr>
-        <p:spPr>
-          <a:xfrm>
-            <a:off x="0" y="8685213"/>
-            <a:ext cx="2971800" cy="458787"/>
-          </a:xfrm>
-          <a:prstGeom prst="rect">
-            <a:avLst/>
-          </a:prstGeom>
-        </p:spPr>
-        <p:txBody>
-          <a:bodyPr vert="horz" lIns="91440" tIns="45720" rIns="91440" bIns="45720" rtlCol="0" anchor="b"/>
-          <a:lstStyle>
-            <a:lvl1pPr algn="l">
-              <a:defRPr sz="1200"/>
-            </a:lvl1pPr>
-          </a:lstStyle>
-          <a:p>
-            <a:endParaRPr lang="en-US"/>
-          </a:p>
-        </p:txBody>
-      </p:sp>
-      <p:sp>
-        <p:nvSpPr>
-          <p:cNvPr id="7" name="Slide Number Placeholder 6"/>
-          <p:cNvSpPr>
-            <a:spLocks noGrp="1"/>
-          </p:cNvSpPr>
-          <p:nvPr>
-            <p:ph type="sldNum" sz="quarter" idx="5"/>
-          </p:nvPr>
-        </p:nvSpPr>
-        <p:spPr>
-          <a:xfrm>
-            <a:off x="3884613" y="8685213"/>
-            <a:ext cx="2971800" cy="458787"/>
-          </a:xfrm>
-          <a:prstGeom prst="rect">
-            <a:avLst/>
-          </a:prstGeom>
-        </p:spPr>
-        <p:txBody>
-          <a:bodyPr vert="horz" lIns="91440" tIns="45720" rIns="91440" bIns="45720" rtlCol="0" anchor="b"/>
-          <a:lstStyle>
-            <a:lvl1pPr algn="r">
-              <a:defRPr sz="1200"/>
-            </a:lvl1pPr>
-          </a:lstStyle>
-          <a:p>
-            <a:fld id="{CE5E9CC1-C706-0F49-92D6-E571CC5EEA8F}" type="slidenum">
-              <a:rPr lang="en-US"/>
-              <a:t>‹#›</a:t>
-            </a:fld>
-            <a:endParaRPr lang="en-US"/>
-          </a:p>
-        </p:txBody>
-      </p:sp>
     </p:spTree>
     <p:extLst>
       <p:ext uri="{BB962C8B-B14F-4D97-AF65-F5344CB8AC3E}">
-        <p14:creationId xmlns:p14="http://schemas.microsoft.com/office/powerpoint/2010/main" val="1024086991"/>
+        <p14:creationId xmlns:p14="http://schemas.microsoft.com/office/powerpoint/2010/main" val="998621022"/>
       </p:ext>
     </p:extLst>
   </p:cSld>
@@ -510,10 +291,6 @@
           <a:bodyPr/>
           <a:lstStyle/>
           <a:p>
-            <a:r>
-              <a:rPr lang="en-US" dirty="0"/>
-              <a:t/>
-            </a:r>
             <a:endParaRPr lang="en-US" dirty="0"/>
           </a:p>
         </p:txBody>
@@ -598,10 +375,6 @@
           <a:bodyPr/>
           <a:lstStyle/>
           <a:p>
-            <a:r>
-              <a:rPr lang="en-US" dirty="0"/>
-              <a:t/>
-            </a:r>
             <a:endParaRPr lang="en-US" dirty="0"/>
           </a:p>
         </p:txBody>
@@ -686,10 +459,6 @@
           <a:bodyPr/>
           <a:lstStyle/>
           <a:p>
-            <a:r>
-              <a:rPr lang="en-US" dirty="0"/>
-              <a:t/>
-            </a:r>
             <a:endParaRPr lang="en-US" dirty="0"/>
           </a:p>
         </p:txBody>
@@ -774,10 +543,6 @@
           <a:bodyPr/>
           <a:lstStyle/>
           <a:p>
-            <a:r>
-              <a:rPr lang="en-US" dirty="0"/>
-              <a:t/>
-            </a:r>
             <a:endParaRPr lang="en-US" dirty="0"/>
           </a:p>
         </p:txBody>
@@ -862,10 +627,6 @@
           <a:bodyPr/>
           <a:lstStyle/>
           <a:p>
-            <a:r>
-              <a:rPr lang="en-US" dirty="0"/>
-              <a:t/>
-            </a:r>
             <a:endParaRPr lang="en-US" dirty="0"/>
           </a:p>
         </p:txBody>
@@ -950,10 +711,6 @@
           <a:bodyPr/>
           <a:lstStyle/>
           <a:p>
-            <a:r>
-              <a:rPr lang="en-US" dirty="0"/>
-              <a:t/>
-            </a:r>
             <a:endParaRPr lang="en-US" dirty="0"/>
           </a:p>
         </p:txBody>
@@ -1038,10 +795,6 @@
           <a:bodyPr/>
           <a:lstStyle/>
           <a:p>
-            <a:r>
-              <a:rPr lang="en-US" dirty="0"/>
-              <a:t/>
-            </a:r>
             <a:endParaRPr lang="en-US" dirty="0"/>
           </a:p>
         </p:txBody>
@@ -1126,10 +879,6 @@
           <a:bodyPr/>
           <a:lstStyle/>
           <a:p>
-            <a:r>
-              <a:rPr lang="en-US" dirty="0"/>
-              <a:t/>
-            </a:r>
             <a:endParaRPr lang="en-US" dirty="0"/>
           </a:p>
         </p:txBody>
@@ -1214,10 +963,6 @@
           <a:bodyPr/>
           <a:lstStyle/>
           <a:p>
-            <a:r>
-              <a:rPr lang="en-US" dirty="0"/>
-              <a:t/>
-            </a:r>
             <a:endParaRPr lang="en-US" dirty="0"/>
           </a:p>
         </p:txBody>
@@ -1302,10 +1047,6 @@
           <a:bodyPr/>
           <a:lstStyle/>
           <a:p>
-            <a:r>
-              <a:rPr lang="en-US" dirty="0"/>
-              <a:t/>
-            </a:r>
             <a:endParaRPr lang="en-US" dirty="0"/>
           </a:p>
         </p:txBody>
@@ -1390,10 +1131,6 @@
           <a:bodyPr/>
           <a:lstStyle/>
           <a:p>
-            <a:r>
-              <a:rPr lang="en-US" dirty="0"/>
-              <a:t/>
-            </a:r>
             <a:endParaRPr lang="en-US" dirty="0"/>
           </a:p>
         </p:txBody>
@@ -1467,6 +1204,11 @@
 <file path=ppt/slideMasters/slideMaster1.xml><?xml version="1.0" encoding="utf-8"?>
 <p:sldMaster xmlns:a="http://schemas.openxmlformats.org/drawingml/2006/main" xmlns:r="http://schemas.openxmlformats.org/officeDocument/2006/relationships" xmlns:p="http://schemas.openxmlformats.org/presentationml/2006/main">
   <p:cSld>
+    <p:bg>
+      <p:bgRef idx="1001">
+        <a:schemeClr val="bg1"/>
+      </p:bgRef>
+    </p:bg>
     <p:spTree>
       <p:nvGrpSpPr>
         <p:cNvPr id="1" name=""/>
@@ -1749,6 +1491,7 @@
         <a:solidFill>
           <a:srgbClr val="1E2761"/>
         </a:solidFill>
+        <a:effectLst/>
       </p:bgPr>
     </p:bg>
     <p:spTree>
@@ -1784,6 +1527,13 @@
           </a:solidFill>
           <a:ln/>
         </p:spPr>
+        <p:txBody>
+          <a:bodyPr/>
+          <a:lstStyle/>
+          <a:p>
+            <a:endParaRPr lang="en-US"/>
+          </a:p>
+        </p:txBody>
       </p:sp>
       <p:sp>
         <p:nvSpPr>
@@ -1804,6 +1554,13 @@
           </a:solidFill>
           <a:ln/>
         </p:spPr>
+        <p:txBody>
+          <a:bodyPr/>
+          <a:lstStyle/>
+          <a:p>
+            <a:endParaRPr lang="en-US"/>
+          </a:p>
+        </p:txBody>
       </p:sp>
       <p:sp>
         <p:nvSpPr>
@@ -1826,11 +1583,11 @@
           <a:bodyPr wrap="square" rtlCol="0" anchor="ctr"/>
           <a:lstStyle/>
           <a:p>
-            <a:pPr indent="0" marL="0">
-              <a:buNone/>
-            </a:pPr>
-            <a:r>
-              <a:rPr lang="en-US" sz="1300" spc="150" kern="0" dirty="0">
+            <a:pPr marL="0" indent="0">
+              <a:buNone/>
+            </a:pPr>
+            <a:r>
+              <a:rPr lang="en-US" sz="1300" kern="0" spc="150" dirty="0">
                 <a:solidFill>
                   <a:srgbClr val="CADCFC"/>
                 </a:solidFill>
@@ -1865,11 +1622,11 @@
           <a:bodyPr wrap="square" rtlCol="0" anchor="ctr"/>
           <a:lstStyle/>
           <a:p>
-            <a:pPr indent="0" marL="0">
-              <a:buNone/>
-            </a:pPr>
-            <a:r>
-              <a:rPr lang="en-US" sz="1300" b="1" spc="100" kern="0" dirty="0">
+            <a:pPr marL="0" indent="0">
+              <a:buNone/>
+            </a:pPr>
+            <a:r>
+              <a:rPr lang="en-US" sz="1300" b="1" kern="0" spc="100" dirty="0">
                 <a:solidFill>
                   <a:srgbClr val="CADCFC"/>
                 </a:solidFill>
@@ -1904,7 +1661,7 @@
           <a:bodyPr wrap="square" rtlCol="0" anchor="ctr"/>
           <a:lstStyle/>
           <a:p>
-            <a:pPr indent="0" marL="0">
+            <a:pPr marL="0" indent="0">
               <a:lnSpc>
                 <a:spcPct val="108000"/>
               </a:lnSpc>
@@ -1917,14 +1674,14 @@
                 </a:solidFill>
                 <a:latin typeface="Cambria" pitchFamily="34" charset="0"/>
                 <a:ea typeface="Cambria" pitchFamily="34" charset="-122"/>
-                <a:cs typeface="Cambria" pitchFamily="34" charset="-120"/>
+                <a:cs typeface="Times New Roman" panose="02020603050405020304" pitchFamily="18" charset="0"/>
               </a:rPr>
               <a:t>QUẢN LÝ RỦI RO BẢO MẬT</a:t>
             </a:r>
             <a:endParaRPr lang="en-US" sz="4000" dirty="0"/>
           </a:p>
           <a:p>
-            <a:pPr indent="0" marL="0">
+            <a:pPr marL="0" indent="0">
               <a:lnSpc>
                 <a:spcPct val="108000"/>
               </a:lnSpc>
@@ -1937,7 +1694,7 @@
                 </a:solidFill>
                 <a:latin typeface="Cambria" pitchFamily="34" charset="0"/>
                 <a:ea typeface="Cambria" pitchFamily="34" charset="-122"/>
-                <a:cs typeface="Cambria" pitchFamily="34" charset="-120"/>
+                <a:cs typeface="Times New Roman" panose="02020603050405020304" pitchFamily="18" charset="0"/>
               </a:rPr>
               <a:t>CHO HỆ THỐNG IoT QUY MÔ NHỎ</a:t>
             </a:r>
@@ -1966,6 +1723,13 @@
           </a:solidFill>
           <a:ln/>
         </p:spPr>
+        <p:txBody>
+          <a:bodyPr/>
+          <a:lstStyle/>
+          <a:p>
+            <a:endParaRPr lang="en-US"/>
+          </a:p>
+        </p:txBody>
       </p:sp>
       <p:sp>
         <p:nvSpPr>
@@ -1988,7 +1752,7 @@
           <a:bodyPr wrap="square" rtlCol="0" anchor="ctr"/>
           <a:lstStyle/>
           <a:p>
-            <a:pPr algn="ctr" indent="0" marL="0">
+            <a:pPr marL="0" indent="0" algn="ctr">
               <a:buNone/>
             </a:pPr>
             <a:r>
@@ -2028,6 +1792,13 @@
             <a:prstDash val="solid"/>
           </a:ln>
         </p:spPr>
+        <p:txBody>
+          <a:bodyPr/>
+          <a:lstStyle/>
+          <a:p>
+            <a:endParaRPr lang="en-US"/>
+          </a:p>
+        </p:txBody>
       </p:sp>
       <p:sp>
         <p:nvSpPr>
@@ -2050,7 +1821,7 @@
           <a:bodyPr wrap="square" rtlCol="0" anchor="ctr"/>
           <a:lstStyle/>
           <a:p>
-            <a:pPr indent="0" marL="0">
+            <a:pPr marL="0" indent="0">
               <a:lnSpc>
                 <a:spcPct val="135000"/>
               </a:lnSpc>
@@ -2067,12 +1838,6 @@
               </a:rPr>
               <a:t>Sinh viên thực hiện:  </a:t>
             </a:r>
-            <a:pPr indent="0" marL="0">
-              <a:lnSpc>
-                <a:spcPct val="135000"/>
-              </a:lnSpc>
-              <a:buNone/>
-            </a:pPr>
             <a:r>
               <a:rPr lang="en-US" sz="1400" dirty="0">
                 <a:solidFill>
@@ -2085,12 +1850,6 @@
               <a:t>Võ Nguyễn Duyên — MSSV 231A010722
 </a:t>
             </a:r>
-            <a:pPr indent="0" marL="0">
-              <a:lnSpc>
-                <a:spcPct val="135000"/>
-              </a:lnSpc>
-              <a:buNone/>
-            </a:pPr>
             <a:r>
               <a:rPr lang="en-US" sz="1400" b="1" dirty="0">
                 <a:solidFill>
@@ -2102,12 +1861,6 @@
               </a:rPr>
               <a:t>Giảng viên hướng dẫn:  </a:t>
             </a:r>
-            <a:pPr indent="0" marL="0">
-              <a:lnSpc>
-                <a:spcPct val="135000"/>
-              </a:lnSpc>
-              <a:buNone/>
-            </a:pPr>
             <a:r>
               <a:rPr lang="en-US" sz="1400" dirty="0">
                 <a:solidFill>
@@ -2117,15 +1870,9 @@
                 <a:ea typeface="Calibri" pitchFamily="34" charset="-122"/>
                 <a:cs typeface="Calibri" pitchFamily="34" charset="-120"/>
               </a:rPr>
-              <a:t>Hồ Nhựt Minh Sĩ
+              <a:t>Hồ Nhựt Minh 
 </a:t>
             </a:r>
-            <a:pPr indent="0" marL="0">
-              <a:lnSpc>
-                <a:spcPct val="135000"/>
-              </a:lnSpc>
-              <a:buNone/>
-            </a:pPr>
             <a:r>
               <a:rPr lang="en-US" sz="1400" b="1" dirty="0">
                 <a:solidFill>
@@ -2137,12 +1884,6 @@
               </a:rPr>
               <a:t>Lớp học phần:  </a:t>
             </a:r>
-            <a:pPr indent="0" marL="0">
-              <a:lnSpc>
-                <a:spcPct val="135000"/>
-              </a:lnSpc>
-              <a:buNone/>
-            </a:pPr>
             <a:r>
               <a:rPr lang="en-US" sz="1400" dirty="0">
                 <a:solidFill>
@@ -2174,6 +1915,7 @@
         <a:solidFill>
           <a:srgbClr val="1E2761"/>
         </a:solidFill>
+        <a:effectLst/>
       </p:bgPr>
     </p:bg>
     <p:spTree>
@@ -2209,6 +1951,13 @@
           </a:solidFill>
           <a:ln/>
         </p:spPr>
+        <p:txBody>
+          <a:bodyPr/>
+          <a:lstStyle/>
+          <a:p>
+            <a:endParaRPr lang="en-US"/>
+          </a:p>
+        </p:txBody>
       </p:sp>
       <p:sp>
         <p:nvSpPr>
@@ -2231,11 +1980,11 @@
           <a:bodyPr wrap="square" rtlCol="0" anchor="ctr"/>
           <a:lstStyle/>
           <a:p>
-            <a:pPr indent="0" marL="0">
-              <a:buNone/>
-            </a:pPr>
-            <a:r>
-              <a:rPr lang="en-US" sz="1250" b="1" spc="200" kern="0" dirty="0">
+            <a:pPr marL="0" indent="0">
+              <a:buNone/>
+            </a:pPr>
+            <a:r>
+              <a:rPr lang="en-US" sz="1250" b="1" kern="0" spc="200" dirty="0">
                 <a:solidFill>
                   <a:srgbClr val="CADCFC"/>
                 </a:solidFill>
@@ -2270,7 +2019,7 @@
           <a:bodyPr wrap="square" rtlCol="0" anchor="ctr"/>
           <a:lstStyle/>
           <a:p>
-            <a:pPr indent="0" marL="0">
+            <a:pPr marL="0" indent="0">
               <a:lnSpc>
                 <a:spcPct val="108000"/>
               </a:lnSpc>
@@ -2290,7 +2039,7 @@
             <a:endParaRPr lang="en-US" sz="3000" dirty="0"/>
           </a:p>
           <a:p>
-            <a:pPr indent="0" marL="0">
+            <a:pPr marL="0" indent="0">
               <a:lnSpc>
                 <a:spcPct val="108000"/>
               </a:lnSpc>
@@ -2337,6 +2086,13 @@
             <a:prstDash val="solid"/>
           </a:ln>
         </p:spPr>
+        <p:txBody>
+          <a:bodyPr/>
+          <a:lstStyle/>
+          <a:p>
+            <a:endParaRPr lang="en-US"/>
+          </a:p>
+        </p:txBody>
       </p:sp>
       <p:sp>
         <p:nvSpPr>
@@ -2359,7 +2115,7 @@
           <a:bodyPr wrap="square" rtlCol="0" anchor="ctr"/>
           <a:lstStyle/>
           <a:p>
-            <a:pPr algn="ctr" indent="0" marL="0">
+            <a:pPr marL="0" indent="0" algn="ctr">
               <a:lnSpc>
                 <a:spcPct val="100000"/>
               </a:lnSpc>
@@ -2406,6 +2162,13 @@
             <a:prstDash val="solid"/>
           </a:ln>
         </p:spPr>
+        <p:txBody>
+          <a:bodyPr/>
+          <a:lstStyle/>
+          <a:p>
+            <a:endParaRPr lang="en-US"/>
+          </a:p>
+        </p:txBody>
       </p:sp>
       <p:sp>
         <p:nvSpPr>
@@ -2428,7 +2191,7 @@
           <a:bodyPr wrap="square" rtlCol="0" anchor="ctr"/>
           <a:lstStyle/>
           <a:p>
-            <a:pPr algn="ctr" indent="0" marL="0">
+            <a:pPr marL="0" indent="0" algn="ctr">
               <a:lnSpc>
                 <a:spcPct val="100000"/>
               </a:lnSpc>
@@ -2475,6 +2238,13 @@
             <a:prstDash val="solid"/>
           </a:ln>
         </p:spPr>
+        <p:txBody>
+          <a:bodyPr/>
+          <a:lstStyle/>
+          <a:p>
+            <a:endParaRPr lang="en-US"/>
+          </a:p>
+        </p:txBody>
       </p:sp>
       <p:sp>
         <p:nvSpPr>
@@ -2497,7 +2267,7 @@
           <a:bodyPr wrap="square" rtlCol="0" anchor="ctr"/>
           <a:lstStyle/>
           <a:p>
-            <a:pPr algn="ctr" indent="0" marL="0">
+            <a:pPr marL="0" indent="0" algn="ctr">
               <a:lnSpc>
                 <a:spcPct val="100000"/>
               </a:lnSpc>
@@ -2544,6 +2314,13 @@
             <a:prstDash val="solid"/>
           </a:ln>
         </p:spPr>
+        <p:txBody>
+          <a:bodyPr/>
+          <a:lstStyle/>
+          <a:p>
+            <a:endParaRPr lang="en-US"/>
+          </a:p>
+        </p:txBody>
       </p:sp>
       <p:sp>
         <p:nvSpPr>
@@ -2566,7 +2343,7 @@
           <a:bodyPr wrap="square" rtlCol="0" anchor="ctr"/>
           <a:lstStyle/>
           <a:p>
-            <a:pPr algn="ctr" indent="0" marL="0">
+            <a:pPr marL="0" indent="0" algn="ctr">
               <a:lnSpc>
                 <a:spcPct val="100000"/>
               </a:lnSpc>
@@ -2613,6 +2390,13 @@
             <a:prstDash val="solid"/>
           </a:ln>
         </p:spPr>
+        <p:txBody>
+          <a:bodyPr/>
+          <a:lstStyle/>
+          <a:p>
+            <a:endParaRPr lang="en-US"/>
+          </a:p>
+        </p:txBody>
       </p:sp>
       <p:sp>
         <p:nvSpPr>
@@ -2635,7 +2419,7 @@
           <a:bodyPr wrap="square" rtlCol="0" anchor="ctr"/>
           <a:lstStyle/>
           <a:p>
-            <a:pPr algn="ctr" indent="0" marL="0">
+            <a:pPr marL="0" indent="0" algn="ctr">
               <a:lnSpc>
                 <a:spcPct val="100000"/>
               </a:lnSpc>
@@ -2677,6 +2461,13 @@
           </a:solidFill>
           <a:ln/>
         </p:spPr>
+        <p:txBody>
+          <a:bodyPr/>
+          <a:lstStyle/>
+          <a:p>
+            <a:endParaRPr lang="en-US"/>
+          </a:p>
+        </p:txBody>
       </p:sp>
       <p:sp>
         <p:nvSpPr>
@@ -2699,7 +2490,7 @@
           <a:bodyPr wrap="square" rtlCol="0" anchor="t"/>
           <a:lstStyle/>
           <a:p>
-            <a:pPr indent="0" marL="0">
+            <a:pPr marL="0" indent="0">
               <a:lnSpc>
                 <a:spcPct val="125000"/>
               </a:lnSpc>
@@ -2716,12 +2507,6 @@
               </a:rPr>
               <a:t>Điểm mấu chốt:  </a:t>
             </a:r>
-            <a:pPr indent="0" marL="0">
-              <a:lnSpc>
-                <a:spcPct val="125000"/>
-              </a:lnSpc>
-              <a:buNone/>
-            </a:pPr>
             <a:r>
               <a:rPr lang="en-US" sz="1500" dirty="0">
                 <a:solidFill>
@@ -2733,12 +2518,6 @@
               </a:rPr>
               <a:t>2 rủi ro nghiêm trọng nhất — truy cập trái phép camera (R-01) và chiếm quyền tài khoản admin (R-04) — đều có thể giảm thiểu đáng kể chỉ bằng biện pháp cấu hình cơ bản, </a:t>
             </a:r>
-            <a:pPr indent="0" marL="0">
-              <a:lnSpc>
-                <a:spcPct val="125000"/>
-              </a:lnSpc>
-              <a:buNone/>
-            </a:pPr>
             <a:r>
               <a:rPr lang="en-US" sz="1500" b="1" dirty="0">
                 <a:solidFill>
@@ -2775,7 +2554,7 @@
           <a:bodyPr wrap="square" rtlCol="0" anchor="ctr"/>
           <a:lstStyle/>
           <a:p>
-            <a:pPr indent="0" marL="0">
+            <a:pPr marL="0" indent="0">
               <a:buNone/>
             </a:pPr>
             <a:r>
@@ -2809,6 +2588,7 @@
         <a:solidFill>
           <a:srgbClr val="FFFFFF"/>
         </a:solidFill>
+        <a:effectLst/>
       </p:bgPr>
     </p:bg>
     <p:spTree>
@@ -2846,11 +2626,11 @@
           <a:bodyPr wrap="square" rtlCol="0" anchor="ctr"/>
           <a:lstStyle/>
           <a:p>
-            <a:pPr indent="0" marL="0">
-              <a:buNone/>
-            </a:pPr>
-            <a:r>
-              <a:rPr lang="en-US" sz="1250" b="1" spc="200" kern="0" dirty="0">
+            <a:pPr marL="0" indent="0">
+              <a:buNone/>
+            </a:pPr>
+            <a:r>
+              <a:rPr lang="en-US" sz="1250" b="1" kern="0" spc="200" dirty="0">
                 <a:solidFill>
                   <a:srgbClr val="1E2761"/>
                 </a:solidFill>
@@ -2885,7 +2665,7 @@
           <a:bodyPr wrap="square" rtlCol="0" anchor="ctr"/>
           <a:lstStyle/>
           <a:p>
-            <a:pPr indent="0" marL="0">
+            <a:pPr marL="0" indent="0">
               <a:buNone/>
             </a:pPr>
             <a:r>
@@ -2924,7 +2704,7 @@
           <a:bodyPr wrap="square" rtlCol="0" anchor="ctr"/>
           <a:lstStyle/>
           <a:p>
-            <a:pPr indent="0" marL="0">
+            <a:pPr marL="0" indent="0">
               <a:buNone/>
             </a:pPr>
             <a:r>
@@ -2963,7 +2743,7 @@
           <a:bodyPr wrap="square" rtlCol="0" anchor="ctr"/>
           <a:lstStyle/>
           <a:p>
-            <a:pPr algn="r" indent="0" marL="0">
+            <a:pPr marL="0" indent="0" algn="r">
               <a:buNone/>
             </a:pPr>
             <a:r>
@@ -3002,6 +2782,13 @@
           </a:solidFill>
           <a:ln/>
         </p:spPr>
+        <p:txBody>
+          <a:bodyPr/>
+          <a:lstStyle/>
+          <a:p>
+            <a:endParaRPr lang="en-US"/>
+          </a:p>
+        </p:txBody>
       </p:sp>
       <p:sp>
         <p:nvSpPr>
@@ -3024,7 +2811,7 @@
           <a:bodyPr wrap="square" rtlCol="0" anchor="ctr"/>
           <a:lstStyle/>
           <a:p>
-            <a:pPr indent="0" marL="0">
+            <a:pPr marL="0" indent="0">
               <a:buNone/>
             </a:pPr>
             <a:r>
@@ -3063,7 +2850,7 @@
           <a:bodyPr wrap="square" rtlCol="0" anchor="ctr"/>
           <a:lstStyle/>
           <a:p>
-            <a:pPr indent="0" marL="0">
+            <a:pPr marL="0" indent="0">
               <a:buNone/>
             </a:pPr>
             <a:r>
@@ -3102,7 +2889,7 @@
           <a:bodyPr wrap="square" rtlCol="0" anchor="ctr"/>
           <a:lstStyle/>
           <a:p>
-            <a:pPr indent="0" marL="0">
+            <a:pPr marL="0" indent="0">
               <a:buNone/>
             </a:pPr>
             <a:r>
@@ -3141,7 +2928,7 @@
           <a:bodyPr wrap="square" rtlCol="0" anchor="ctr"/>
           <a:lstStyle/>
           <a:p>
-            <a:pPr indent="0" marL="0">
+            <a:pPr marL="0" indent="0">
               <a:buNone/>
             </a:pPr>
             <a:r>
@@ -3180,7 +2967,7 @@
           <a:bodyPr wrap="square" rtlCol="0" anchor="ctr"/>
           <a:lstStyle/>
           <a:p>
-            <a:pPr indent="0" marL="0">
+            <a:pPr marL="0" indent="0">
               <a:buNone/>
             </a:pPr>
             <a:r>
@@ -3219,7 +3006,7 @@
           <a:bodyPr wrap="square" rtlCol="0" anchor="ctr"/>
           <a:lstStyle/>
           <a:p>
-            <a:pPr indent="0" marL="0">
+            <a:pPr marL="0" indent="0">
               <a:buNone/>
             </a:pPr>
             <a:r>
@@ -3258,6 +3045,13 @@
           </a:solidFill>
           <a:ln/>
         </p:spPr>
+        <p:txBody>
+          <a:bodyPr/>
+          <a:lstStyle/>
+          <a:p>
+            <a:endParaRPr lang="en-US"/>
+          </a:p>
+        </p:txBody>
       </p:sp>
       <p:sp>
         <p:nvSpPr>
@@ -3280,7 +3074,7 @@
           <a:bodyPr wrap="square" rtlCol="0" anchor="ctr"/>
           <a:lstStyle/>
           <a:p>
-            <a:pPr indent="0" marL="0">
+            <a:pPr marL="0" indent="0">
               <a:buNone/>
             </a:pPr>
             <a:r>
@@ -3319,7 +3113,7 @@
           <a:bodyPr wrap="square" rtlCol="0" anchor="t"/>
           <a:lstStyle/>
           <a:p>
-            <a:pPr indent="0" marL="0">
+            <a:pPr marL="0" indent="0">
               <a:lnSpc>
                 <a:spcPct val="125000"/>
               </a:lnSpc>
@@ -3339,7 +3133,7 @@
             <a:endParaRPr lang="en-US" sz="1300" dirty="0"/>
           </a:p>
           <a:p>
-            <a:pPr indent="0" marL="0">
+            <a:pPr marL="0" indent="0">
               <a:lnSpc>
                 <a:spcPct val="125000"/>
               </a:lnSpc>
@@ -3376,6 +3170,7 @@
         <a:solidFill>
           <a:srgbClr val="FFFFFF"/>
         </a:solidFill>
+        <a:effectLst/>
       </p:bgPr>
     </p:bg>
     <p:spTree>
@@ -3413,11 +3208,11 @@
           <a:bodyPr wrap="square" rtlCol="0" anchor="ctr"/>
           <a:lstStyle/>
           <a:p>
-            <a:pPr indent="0" marL="0">
-              <a:buNone/>
-            </a:pPr>
-            <a:r>
-              <a:rPr lang="en-US" sz="1250" b="1" spc="200" kern="0" dirty="0">
+            <a:pPr marL="0" indent="0">
+              <a:buNone/>
+            </a:pPr>
+            <a:r>
+              <a:rPr lang="en-US" sz="1250" b="1" kern="0" spc="200" dirty="0">
                 <a:solidFill>
                   <a:srgbClr val="1E2761"/>
                 </a:solidFill>
@@ -3452,7 +3247,7 @@
           <a:bodyPr wrap="square" rtlCol="0" anchor="ctr"/>
           <a:lstStyle/>
           <a:p>
-            <a:pPr indent="0" marL="0">
+            <a:pPr marL="0" indent="0">
               <a:buNone/>
             </a:pPr>
             <a:r>
@@ -3462,7 +3257,7 @@
                 </a:solidFill>
                 <a:latin typeface="Cambria" pitchFamily="34" charset="0"/>
                 <a:ea typeface="Cambria" pitchFamily="34" charset="-122"/>
-                <a:cs typeface="Cambria" pitchFamily="34" charset="-120"/>
+                <a:cs typeface="Times New Roman" panose="02020603050405020304" pitchFamily="18" charset="0"/>
               </a:rPr>
               <a:t>Vấn đề bảo mật và mục tiêu đề tài</a:t>
             </a:r>
@@ -3491,7 +3286,7 @@
           <a:bodyPr wrap="square" rtlCol="0" anchor="ctr"/>
           <a:lstStyle/>
           <a:p>
-            <a:pPr indent="0" marL="0">
+            <a:pPr marL="0" indent="0">
               <a:buNone/>
             </a:pPr>
             <a:r>
@@ -3530,7 +3325,7 @@
           <a:bodyPr wrap="square" rtlCol="0" anchor="ctr"/>
           <a:lstStyle/>
           <a:p>
-            <a:pPr algn="r" indent="0" marL="0">
+            <a:pPr marL="0" indent="0" algn="r">
               <a:buNone/>
             </a:pPr>
             <a:r>
@@ -3569,6 +3364,13 @@
           </a:solidFill>
           <a:ln/>
         </p:spPr>
+        <p:txBody>
+          <a:bodyPr/>
+          <a:lstStyle/>
+          <a:p>
+            <a:endParaRPr lang="en-US"/>
+          </a:p>
+        </p:txBody>
       </p:sp>
       <p:sp>
         <p:nvSpPr>
@@ -3591,7 +3393,7 @@
           <a:bodyPr wrap="square" rtlCol="0" anchor="ctr"/>
           <a:lstStyle/>
           <a:p>
-            <a:pPr indent="0" marL="0">
+            <a:pPr marL="0" indent="0">
               <a:buNone/>
             </a:pPr>
             <a:r>
@@ -3601,7 +3403,7 @@
                 </a:solidFill>
                 <a:latin typeface="Cambria" pitchFamily="34" charset="0"/>
                 <a:ea typeface="Cambria" pitchFamily="34" charset="-122"/>
-                <a:cs typeface="Cambria" pitchFamily="34" charset="-120"/>
+                <a:cs typeface="Times New Roman" panose="02020603050405020304" pitchFamily="18" charset="0"/>
               </a:rPr>
               <a:t>VẤN ĐỀ</a:t>
             </a:r>
@@ -3628,6 +3430,13 @@
           </a:solidFill>
           <a:ln/>
         </p:spPr>
+        <p:txBody>
+          <a:bodyPr/>
+          <a:lstStyle/>
+          <a:p>
+            <a:endParaRPr lang="en-US"/>
+          </a:p>
+        </p:txBody>
       </p:sp>
       <p:sp>
         <p:nvSpPr>
@@ -3650,7 +3459,7 @@
           <a:bodyPr wrap="square" rtlCol="0" anchor="ctr"/>
           <a:lstStyle/>
           <a:p>
-            <a:pPr algn="ctr" indent="0" marL="0">
+            <a:pPr marL="0" indent="0" algn="ctr">
               <a:buNone/>
             </a:pPr>
             <a:r>
@@ -3689,7 +3498,7 @@
           <a:bodyPr wrap="square" rtlCol="0" anchor="t"/>
           <a:lstStyle/>
           <a:p>
-            <a:pPr indent="0" marL="0">
+            <a:pPr marL="0" indent="0">
               <a:lnSpc>
                 <a:spcPct val="105000"/>
               </a:lnSpc>
@@ -3729,6 +3538,13 @@
           </a:solidFill>
           <a:ln/>
         </p:spPr>
+        <p:txBody>
+          <a:bodyPr/>
+          <a:lstStyle/>
+          <a:p>
+            <a:endParaRPr lang="en-US"/>
+          </a:p>
+        </p:txBody>
       </p:sp>
       <p:sp>
         <p:nvSpPr>
@@ -3751,7 +3567,7 @@
           <a:bodyPr wrap="square" rtlCol="0" anchor="ctr"/>
           <a:lstStyle/>
           <a:p>
-            <a:pPr algn="ctr" indent="0" marL="0">
+            <a:pPr marL="0" indent="0" algn="ctr">
               <a:buNone/>
             </a:pPr>
             <a:r>
@@ -3790,7 +3606,7 @@
           <a:bodyPr wrap="square" rtlCol="0" anchor="t"/>
           <a:lstStyle/>
           <a:p>
-            <a:pPr indent="0" marL="0">
+            <a:pPr marL="0" indent="0">
               <a:lnSpc>
                 <a:spcPct val="105000"/>
               </a:lnSpc>
@@ -3830,6 +3646,13 @@
           </a:solidFill>
           <a:ln/>
         </p:spPr>
+        <p:txBody>
+          <a:bodyPr/>
+          <a:lstStyle/>
+          <a:p>
+            <a:endParaRPr lang="en-US"/>
+          </a:p>
+        </p:txBody>
       </p:sp>
       <p:sp>
         <p:nvSpPr>
@@ -3852,7 +3675,7 @@
           <a:bodyPr wrap="square" rtlCol="0" anchor="ctr"/>
           <a:lstStyle/>
           <a:p>
-            <a:pPr algn="ctr" indent="0" marL="0">
+            <a:pPr marL="0" indent="0" algn="ctr">
               <a:buNone/>
             </a:pPr>
             <a:r>
@@ -3891,7 +3714,7 @@
           <a:bodyPr wrap="square" rtlCol="0" anchor="t"/>
           <a:lstStyle/>
           <a:p>
-            <a:pPr indent="0" marL="0">
+            <a:pPr marL="0" indent="0">
               <a:lnSpc>
                 <a:spcPct val="105000"/>
               </a:lnSpc>
@@ -3931,6 +3754,13 @@
           </a:solidFill>
           <a:ln/>
         </p:spPr>
+        <p:txBody>
+          <a:bodyPr/>
+          <a:lstStyle/>
+          <a:p>
+            <a:endParaRPr lang="en-US"/>
+          </a:p>
+        </p:txBody>
       </p:sp>
       <p:sp>
         <p:nvSpPr>
@@ -3953,7 +3783,7 @@
           <a:bodyPr wrap="square" rtlCol="0" anchor="ctr"/>
           <a:lstStyle/>
           <a:p>
-            <a:pPr algn="ctr" indent="0" marL="0">
+            <a:pPr marL="0" indent="0" algn="ctr">
               <a:buNone/>
             </a:pPr>
             <a:r>
@@ -3992,7 +3822,7 @@
           <a:bodyPr wrap="square" rtlCol="0" anchor="t"/>
           <a:lstStyle/>
           <a:p>
-            <a:pPr indent="0" marL="0">
+            <a:pPr marL="0" indent="0">
               <a:lnSpc>
                 <a:spcPct val="105000"/>
               </a:lnSpc>
@@ -4032,6 +3862,13 @@
           </a:solidFill>
           <a:ln/>
         </p:spPr>
+        <p:txBody>
+          <a:bodyPr/>
+          <a:lstStyle/>
+          <a:p>
+            <a:endParaRPr lang="en-US"/>
+          </a:p>
+        </p:txBody>
       </p:sp>
       <p:sp>
         <p:nvSpPr>
@@ -4054,7 +3891,7 @@
           <a:bodyPr wrap="square" rtlCol="0" anchor="ctr"/>
           <a:lstStyle/>
           <a:p>
-            <a:pPr algn="ctr" indent="0" marL="0">
+            <a:pPr marL="0" indent="0" algn="ctr">
               <a:buNone/>
             </a:pPr>
             <a:r>
@@ -4093,7 +3930,7 @@
           <a:bodyPr wrap="square" rtlCol="0" anchor="t"/>
           <a:lstStyle/>
           <a:p>
-            <a:pPr indent="0" marL="0">
+            <a:pPr marL="0" indent="0">
               <a:lnSpc>
                 <a:spcPct val="105000"/>
               </a:lnSpc>
@@ -4135,6 +3972,13 @@
           </a:solidFill>
           <a:ln/>
         </p:spPr>
+        <p:txBody>
+          <a:bodyPr/>
+          <a:lstStyle/>
+          <a:p>
+            <a:endParaRPr lang="en-US"/>
+          </a:p>
+        </p:txBody>
       </p:sp>
       <p:sp>
         <p:nvSpPr>
@@ -4157,7 +4001,7 @@
           <a:bodyPr wrap="square" rtlCol="0" anchor="ctr"/>
           <a:lstStyle/>
           <a:p>
-            <a:pPr indent="0" marL="0">
+            <a:pPr marL="0" indent="0">
               <a:buNone/>
             </a:pPr>
             <a:r>
@@ -4167,7 +4011,7 @@
                 </a:solidFill>
                 <a:latin typeface="Cambria" pitchFamily="34" charset="0"/>
                 <a:ea typeface="Cambria" pitchFamily="34" charset="-122"/>
-                <a:cs typeface="Cambria" pitchFamily="34" charset="-120"/>
+                <a:cs typeface="Times New Roman" panose="02020603050405020304" pitchFamily="18" charset="0"/>
               </a:rPr>
               <a:t>MỤC TIÊU (MT-01 → MT-05)</a:t>
             </a:r>
@@ -4194,6 +4038,13 @@
           </a:solidFill>
           <a:ln/>
         </p:spPr>
+        <p:txBody>
+          <a:bodyPr/>
+          <a:lstStyle/>
+          <a:p>
+            <a:endParaRPr lang="en-US"/>
+          </a:p>
+        </p:txBody>
       </p:sp>
       <p:sp>
         <p:nvSpPr>
@@ -4216,7 +4067,7 @@
           <a:bodyPr wrap="square" rtlCol="0" anchor="ctr"/>
           <a:lstStyle/>
           <a:p>
-            <a:pPr algn="ctr" indent="0" marL="0">
+            <a:pPr marL="0" indent="0" algn="ctr">
               <a:buNone/>
             </a:pPr>
             <a:r>
@@ -4255,7 +4106,7 @@
           <a:bodyPr wrap="square" rtlCol="0" anchor="t"/>
           <a:lstStyle/>
           <a:p>
-            <a:pPr indent="0" marL="0">
+            <a:pPr marL="0" indent="0">
               <a:lnSpc>
                 <a:spcPct val="105000"/>
               </a:lnSpc>
@@ -4295,6 +4146,13 @@
           </a:solidFill>
           <a:ln/>
         </p:spPr>
+        <p:txBody>
+          <a:bodyPr/>
+          <a:lstStyle/>
+          <a:p>
+            <a:endParaRPr lang="en-US"/>
+          </a:p>
+        </p:txBody>
       </p:sp>
       <p:sp>
         <p:nvSpPr>
@@ -4317,7 +4175,7 @@
           <a:bodyPr wrap="square" rtlCol="0" anchor="ctr"/>
           <a:lstStyle/>
           <a:p>
-            <a:pPr algn="ctr" indent="0" marL="0">
+            <a:pPr marL="0" indent="0" algn="ctr">
               <a:buNone/>
             </a:pPr>
             <a:r>
@@ -4356,7 +4214,7 @@
           <a:bodyPr wrap="square" rtlCol="0" anchor="t"/>
           <a:lstStyle/>
           <a:p>
-            <a:pPr indent="0" marL="0">
+            <a:pPr marL="0" indent="0">
               <a:lnSpc>
                 <a:spcPct val="105000"/>
               </a:lnSpc>
@@ -4396,6 +4254,13 @@
           </a:solidFill>
           <a:ln/>
         </p:spPr>
+        <p:txBody>
+          <a:bodyPr/>
+          <a:lstStyle/>
+          <a:p>
+            <a:endParaRPr lang="en-US"/>
+          </a:p>
+        </p:txBody>
       </p:sp>
       <p:sp>
         <p:nvSpPr>
@@ -4418,7 +4283,7 @@
           <a:bodyPr wrap="square" rtlCol="0" anchor="ctr"/>
           <a:lstStyle/>
           <a:p>
-            <a:pPr algn="ctr" indent="0" marL="0">
+            <a:pPr marL="0" indent="0" algn="ctr">
               <a:buNone/>
             </a:pPr>
             <a:r>
@@ -4457,7 +4322,7 @@
           <a:bodyPr wrap="square" rtlCol="0" anchor="t"/>
           <a:lstStyle/>
           <a:p>
-            <a:pPr indent="0" marL="0">
+            <a:pPr marL="0" indent="0">
               <a:lnSpc>
                 <a:spcPct val="105000"/>
               </a:lnSpc>
@@ -4497,6 +4362,13 @@
           </a:solidFill>
           <a:ln/>
         </p:spPr>
+        <p:txBody>
+          <a:bodyPr/>
+          <a:lstStyle/>
+          <a:p>
+            <a:endParaRPr lang="en-US"/>
+          </a:p>
+        </p:txBody>
       </p:sp>
       <p:sp>
         <p:nvSpPr>
@@ -4519,7 +4391,7 @@
           <a:bodyPr wrap="square" rtlCol="0" anchor="ctr"/>
           <a:lstStyle/>
           <a:p>
-            <a:pPr algn="ctr" indent="0" marL="0">
+            <a:pPr marL="0" indent="0" algn="ctr">
               <a:buNone/>
             </a:pPr>
             <a:r>
@@ -4558,7 +4430,7 @@
           <a:bodyPr wrap="square" rtlCol="0" anchor="t"/>
           <a:lstStyle/>
           <a:p>
-            <a:pPr indent="0" marL="0">
+            <a:pPr marL="0" indent="0">
               <a:lnSpc>
                 <a:spcPct val="105000"/>
               </a:lnSpc>
@@ -4598,6 +4470,13 @@
           </a:solidFill>
           <a:ln/>
         </p:spPr>
+        <p:txBody>
+          <a:bodyPr/>
+          <a:lstStyle/>
+          <a:p>
+            <a:endParaRPr lang="en-US"/>
+          </a:p>
+        </p:txBody>
       </p:sp>
       <p:sp>
         <p:nvSpPr>
@@ -4620,7 +4499,7 @@
           <a:bodyPr wrap="square" rtlCol="0" anchor="ctr"/>
           <a:lstStyle/>
           <a:p>
-            <a:pPr algn="ctr" indent="0" marL="0">
+            <a:pPr marL="0" indent="0" algn="ctr">
               <a:buNone/>
             </a:pPr>
             <a:r>
@@ -4659,7 +4538,7 @@
           <a:bodyPr wrap="square" rtlCol="0" anchor="t"/>
           <a:lstStyle/>
           <a:p>
-            <a:pPr indent="0" marL="0">
+            <a:pPr marL="0" indent="0">
               <a:lnSpc>
                 <a:spcPct val="105000"/>
               </a:lnSpc>
@@ -4696,6 +4575,7 @@
         <a:solidFill>
           <a:srgbClr val="FFFFFF"/>
         </a:solidFill>
+        <a:effectLst/>
       </p:bgPr>
     </p:bg>
     <p:spTree>
@@ -4733,11 +4613,11 @@
           <a:bodyPr wrap="square" rtlCol="0" anchor="ctr"/>
           <a:lstStyle/>
           <a:p>
-            <a:pPr indent="0" marL="0">
-              <a:buNone/>
-            </a:pPr>
-            <a:r>
-              <a:rPr lang="en-US" sz="1250" b="1" spc="200" kern="0" dirty="0">
+            <a:pPr marL="0" indent="0">
+              <a:buNone/>
+            </a:pPr>
+            <a:r>
+              <a:rPr lang="en-US" sz="1250" b="1" kern="0" spc="200" dirty="0">
                 <a:solidFill>
                   <a:srgbClr val="1E2761"/>
                 </a:solidFill>
@@ -4772,7 +4652,7 @@
           <a:bodyPr wrap="square" rtlCol="0" anchor="ctr"/>
           <a:lstStyle/>
           <a:p>
-            <a:pPr indent="0" marL="0">
+            <a:pPr marL="0" indent="0">
               <a:buNone/>
             </a:pPr>
             <a:r>
@@ -4811,7 +4691,7 @@
           <a:bodyPr wrap="square" rtlCol="0" anchor="ctr"/>
           <a:lstStyle/>
           <a:p>
-            <a:pPr indent="0" marL="0">
+            <a:pPr marL="0" indent="0">
               <a:buNone/>
             </a:pPr>
             <a:r>
@@ -4850,7 +4730,7 @@
           <a:bodyPr wrap="square" rtlCol="0" anchor="ctr"/>
           <a:lstStyle/>
           <a:p>
-            <a:pPr algn="r" indent="0" marL="0">
+            <a:pPr marL="0" indent="0" algn="r">
               <a:buNone/>
             </a:pPr>
             <a:r>
@@ -4889,6 +4769,13 @@
           </a:solidFill>
           <a:ln/>
         </p:spPr>
+        <p:txBody>
+          <a:bodyPr/>
+          <a:lstStyle/>
+          <a:p>
+            <a:endParaRPr lang="en-US"/>
+          </a:p>
+        </p:txBody>
       </p:sp>
       <p:sp>
         <p:nvSpPr>
@@ -4909,6 +4796,13 @@
           </a:solidFill>
           <a:ln/>
         </p:spPr>
+        <p:txBody>
+          <a:bodyPr/>
+          <a:lstStyle/>
+          <a:p>
+            <a:endParaRPr lang="en-US"/>
+          </a:p>
+        </p:txBody>
       </p:sp>
       <p:sp>
         <p:nvSpPr>
@@ -4931,7 +4825,7 @@
           <a:bodyPr wrap="square" rtlCol="0" anchor="ctr"/>
           <a:lstStyle/>
           <a:p>
-            <a:pPr algn="ctr" indent="0" marL="0">
+            <a:pPr marL="0" indent="0" algn="ctr">
               <a:buNone/>
             </a:pPr>
             <a:r>
@@ -4970,7 +4864,7 @@
           <a:bodyPr wrap="square" rtlCol="0" anchor="ctr"/>
           <a:lstStyle/>
           <a:p>
-            <a:pPr indent="0" marL="0">
+            <a:pPr marL="0" indent="0">
               <a:buNone/>
             </a:pPr>
             <a:r>
@@ -5009,7 +4903,7 @@
           <a:bodyPr wrap="square" rtlCol="0" anchor="t"/>
           <a:lstStyle/>
           <a:p>
-            <a:pPr indent="0" marL="0">
+            <a:pPr marL="0" indent="0">
               <a:lnSpc>
                 <a:spcPct val="110000"/>
               </a:lnSpc>
@@ -5051,6 +4945,13 @@
           </a:solidFill>
           <a:ln/>
         </p:spPr>
+        <p:txBody>
+          <a:bodyPr/>
+          <a:lstStyle/>
+          <a:p>
+            <a:endParaRPr lang="en-US"/>
+          </a:p>
+        </p:txBody>
       </p:sp>
       <p:sp>
         <p:nvSpPr>
@@ -5071,6 +4972,13 @@
           </a:solidFill>
           <a:ln/>
         </p:spPr>
+        <p:txBody>
+          <a:bodyPr/>
+          <a:lstStyle/>
+          <a:p>
+            <a:endParaRPr lang="en-US"/>
+          </a:p>
+        </p:txBody>
       </p:sp>
       <p:sp>
         <p:nvSpPr>
@@ -5093,7 +5001,7 @@
           <a:bodyPr wrap="square" rtlCol="0" anchor="ctr"/>
           <a:lstStyle/>
           <a:p>
-            <a:pPr algn="ctr" indent="0" marL="0">
+            <a:pPr marL="0" indent="0" algn="ctr">
               <a:buNone/>
             </a:pPr>
             <a:r>
@@ -5132,7 +5040,7 @@
           <a:bodyPr wrap="square" rtlCol="0" anchor="ctr"/>
           <a:lstStyle/>
           <a:p>
-            <a:pPr indent="0" marL="0">
+            <a:pPr marL="0" indent="0">
               <a:buNone/>
             </a:pPr>
             <a:r>
@@ -5171,7 +5079,7 @@
           <a:bodyPr wrap="square" rtlCol="0" anchor="t"/>
           <a:lstStyle/>
           <a:p>
-            <a:pPr indent="0" marL="0">
+            <a:pPr marL="0" indent="0">
               <a:lnSpc>
                 <a:spcPct val="110000"/>
               </a:lnSpc>
@@ -5213,6 +5121,13 @@
           </a:solidFill>
           <a:ln/>
         </p:spPr>
+        <p:txBody>
+          <a:bodyPr/>
+          <a:lstStyle/>
+          <a:p>
+            <a:endParaRPr lang="en-US"/>
+          </a:p>
+        </p:txBody>
       </p:sp>
       <p:sp>
         <p:nvSpPr>
@@ -5233,6 +5148,13 @@
           </a:solidFill>
           <a:ln/>
         </p:spPr>
+        <p:txBody>
+          <a:bodyPr/>
+          <a:lstStyle/>
+          <a:p>
+            <a:endParaRPr lang="en-US"/>
+          </a:p>
+        </p:txBody>
       </p:sp>
       <p:sp>
         <p:nvSpPr>
@@ -5255,7 +5177,7 @@
           <a:bodyPr wrap="square" rtlCol="0" anchor="ctr"/>
           <a:lstStyle/>
           <a:p>
-            <a:pPr algn="ctr" indent="0" marL="0">
+            <a:pPr marL="0" indent="0" algn="ctr">
               <a:buNone/>
             </a:pPr>
             <a:r>
@@ -5294,7 +5216,7 @@
           <a:bodyPr wrap="square" rtlCol="0" anchor="ctr"/>
           <a:lstStyle/>
           <a:p>
-            <a:pPr indent="0" marL="0">
+            <a:pPr marL="0" indent="0">
               <a:buNone/>
             </a:pPr>
             <a:r>
@@ -5333,7 +5255,7 @@
           <a:bodyPr wrap="square" rtlCol="0" anchor="t"/>
           <a:lstStyle/>
           <a:p>
-            <a:pPr indent="0" marL="0">
+            <a:pPr marL="0" indent="0">
               <a:lnSpc>
                 <a:spcPct val="110000"/>
               </a:lnSpc>
@@ -5375,7 +5297,7 @@
           <a:bodyPr wrap="square" rtlCol="0" anchor="ctr"/>
           <a:lstStyle/>
           <a:p>
-            <a:pPr indent="0" marL="0">
+            <a:pPr marL="0" indent="0">
               <a:buNone/>
             </a:pPr>
             <a:r>
@@ -5414,6 +5336,13 @@
           </a:solidFill>
           <a:ln/>
         </p:spPr>
+        <p:txBody>
+          <a:bodyPr/>
+          <a:lstStyle/>
+          <a:p>
+            <a:endParaRPr lang="en-US"/>
+          </a:p>
+        </p:txBody>
       </p:sp>
       <p:sp>
         <p:nvSpPr>
@@ -5436,7 +5365,7 @@
           <a:bodyPr wrap="square" rtlCol="0" anchor="ctr"/>
           <a:lstStyle/>
           <a:p>
-            <a:pPr indent="0" marL="0">
+            <a:pPr marL="0" indent="0">
               <a:buNone/>
             </a:pPr>
             <a:r>
@@ -5475,7 +5404,7 @@
           <a:bodyPr wrap="square" rtlCol="0" anchor="t"/>
           <a:lstStyle/>
           <a:p>
-            <a:pPr indent="0" marL="0">
+            <a:pPr marL="0" indent="0">
               <a:lnSpc>
                 <a:spcPct val="105000"/>
               </a:lnSpc>
@@ -5495,7 +5424,7 @@
             <a:endParaRPr lang="en-US" sz="1150" dirty="0"/>
           </a:p>
           <a:p>
-            <a:pPr indent="0" marL="0">
+            <a:pPr marL="0" indent="0">
               <a:lnSpc>
                 <a:spcPct val="105000"/>
               </a:lnSpc>
@@ -5535,6 +5464,13 @@
           </a:solidFill>
           <a:ln/>
         </p:spPr>
+        <p:txBody>
+          <a:bodyPr/>
+          <a:lstStyle/>
+          <a:p>
+            <a:endParaRPr lang="en-US"/>
+          </a:p>
+        </p:txBody>
       </p:sp>
       <p:sp>
         <p:nvSpPr>
@@ -5557,6 +5493,13 @@
           </a:solidFill>
           <a:ln/>
         </p:spPr>
+        <p:txBody>
+          <a:bodyPr/>
+          <a:lstStyle/>
+          <a:p>
+            <a:endParaRPr lang="en-US"/>
+          </a:p>
+        </p:txBody>
       </p:sp>
       <p:sp>
         <p:nvSpPr>
@@ -5579,7 +5522,7 @@
           <a:bodyPr wrap="square" rtlCol="0" anchor="ctr"/>
           <a:lstStyle/>
           <a:p>
-            <a:pPr indent="0" marL="0">
+            <a:pPr marL="0" indent="0">
               <a:buNone/>
             </a:pPr>
             <a:r>
@@ -5618,7 +5561,7 @@
           <a:bodyPr wrap="square" rtlCol="0" anchor="t"/>
           <a:lstStyle/>
           <a:p>
-            <a:pPr indent="0" marL="0">
+            <a:pPr marL="0" indent="0">
               <a:lnSpc>
                 <a:spcPct val="105000"/>
               </a:lnSpc>
@@ -5638,7 +5581,7 @@
             <a:endParaRPr lang="en-US" sz="1150" dirty="0"/>
           </a:p>
           <a:p>
-            <a:pPr indent="0" marL="0">
+            <a:pPr marL="0" indent="0">
               <a:lnSpc>
                 <a:spcPct val="105000"/>
               </a:lnSpc>
@@ -5678,6 +5621,13 @@
           </a:solidFill>
           <a:ln/>
         </p:spPr>
+        <p:txBody>
+          <a:bodyPr/>
+          <a:lstStyle/>
+          <a:p>
+            <a:endParaRPr lang="en-US"/>
+          </a:p>
+        </p:txBody>
       </p:sp>
       <p:sp>
         <p:nvSpPr>
@@ -5700,6 +5650,13 @@
           </a:solidFill>
           <a:ln/>
         </p:spPr>
+        <p:txBody>
+          <a:bodyPr/>
+          <a:lstStyle/>
+          <a:p>
+            <a:endParaRPr lang="en-US"/>
+          </a:p>
+        </p:txBody>
       </p:sp>
       <p:sp>
         <p:nvSpPr>
@@ -5722,7 +5679,7 @@
           <a:bodyPr wrap="square" rtlCol="0" anchor="ctr"/>
           <a:lstStyle/>
           <a:p>
-            <a:pPr indent="0" marL="0">
+            <a:pPr marL="0" indent="0">
               <a:buNone/>
             </a:pPr>
             <a:r>
@@ -5761,7 +5718,7 @@
           <a:bodyPr wrap="square" rtlCol="0" anchor="t"/>
           <a:lstStyle/>
           <a:p>
-            <a:pPr indent="0" marL="0">
+            <a:pPr marL="0" indent="0">
               <a:lnSpc>
                 <a:spcPct val="105000"/>
               </a:lnSpc>
@@ -5781,7 +5738,7 @@
             <a:endParaRPr lang="en-US" sz="1150" dirty="0"/>
           </a:p>
           <a:p>
-            <a:pPr indent="0" marL="0">
+            <a:pPr marL="0" indent="0">
               <a:lnSpc>
                 <a:spcPct val="105000"/>
               </a:lnSpc>
@@ -5821,6 +5778,13 @@
           </a:solidFill>
           <a:ln/>
         </p:spPr>
+        <p:txBody>
+          <a:bodyPr/>
+          <a:lstStyle/>
+          <a:p>
+            <a:endParaRPr lang="en-US"/>
+          </a:p>
+        </p:txBody>
       </p:sp>
       <p:sp>
         <p:nvSpPr>
@@ -5843,6 +5807,13 @@
           </a:solidFill>
           <a:ln/>
         </p:spPr>
+        <p:txBody>
+          <a:bodyPr/>
+          <a:lstStyle/>
+          <a:p>
+            <a:endParaRPr lang="en-US"/>
+          </a:p>
+        </p:txBody>
       </p:sp>
       <p:sp>
         <p:nvSpPr>
@@ -5865,7 +5836,7 @@
           <a:bodyPr wrap="square" rtlCol="0" anchor="ctr"/>
           <a:lstStyle/>
           <a:p>
-            <a:pPr indent="0" marL="0">
+            <a:pPr marL="0" indent="0">
               <a:buNone/>
             </a:pPr>
             <a:r>
@@ -5904,7 +5875,7 @@
           <a:bodyPr wrap="square" rtlCol="0" anchor="t"/>
           <a:lstStyle/>
           <a:p>
-            <a:pPr indent="0" marL="0">
+            <a:pPr marL="0" indent="0">
               <a:lnSpc>
                 <a:spcPct val="105000"/>
               </a:lnSpc>
@@ -5924,7 +5895,7 @@
             <a:endParaRPr lang="en-US" sz="1150" dirty="0"/>
           </a:p>
           <a:p>
-            <a:pPr indent="0" marL="0">
+            <a:pPr marL="0" indent="0">
               <a:lnSpc>
                 <a:spcPct val="105000"/>
               </a:lnSpc>
@@ -5961,6 +5932,7 @@
         <a:solidFill>
           <a:srgbClr val="FFFFFF"/>
         </a:solidFill>
+        <a:effectLst/>
       </p:bgPr>
     </p:bg>
     <p:spTree>
@@ -5985,24 +5957,24 @@
         </p:nvSpPr>
         <p:spPr>
           <a:xfrm>
-            <a:off x="548640" y="384048"/>
-            <a:ext cx="7315200" cy="320040"/>
-          </a:xfrm>
-          <a:prstGeom prst="rect">
-            <a:avLst/>
-          </a:prstGeom>
-          <a:noFill/>
-          <a:ln/>
-        </p:spPr>
-        <p:txBody>
-          <a:bodyPr wrap="square" rtlCol="0" anchor="ctr"/>
-          <a:lstStyle/>
-          <a:p>
-            <a:pPr indent="0" marL="0">
-              <a:buNone/>
-            </a:pPr>
-            <a:r>
-              <a:rPr lang="en-US" sz="1250" b="1" spc="200" kern="0" dirty="0">
+            <a:off x="563880" y="147692"/>
+            <a:ext cx="7315200" cy="142780"/>
+          </a:xfrm>
+          <a:prstGeom prst="rect">
+            <a:avLst/>
+          </a:prstGeom>
+          <a:noFill/>
+          <a:ln/>
+        </p:spPr>
+        <p:txBody>
+          <a:bodyPr wrap="square" rtlCol="0" anchor="ctr"/>
+          <a:lstStyle/>
+          <a:p>
+            <a:pPr marL="0" indent="0">
+              <a:buNone/>
+            </a:pPr>
+            <a:r>
+              <a:rPr lang="en-US" sz="1250" b="1" kern="0" spc="200" dirty="0">
                 <a:solidFill>
                   <a:srgbClr val="1E2761"/>
                 </a:solidFill>
@@ -6024,20 +5996,20 @@
         </p:nvSpPr>
         <p:spPr>
           <a:xfrm>
-            <a:off x="548640" y="658368"/>
-            <a:ext cx="11064240" cy="640080"/>
-          </a:xfrm>
-          <a:prstGeom prst="rect">
-            <a:avLst/>
-          </a:prstGeom>
-          <a:noFill/>
-          <a:ln/>
-        </p:spPr>
-        <p:txBody>
-          <a:bodyPr wrap="square" rtlCol="0" anchor="ctr"/>
-          <a:lstStyle/>
-          <a:p>
-            <a:pPr indent="0" marL="0">
+            <a:off x="563880" y="422012"/>
+            <a:ext cx="11064240" cy="285561"/>
+          </a:xfrm>
+          <a:prstGeom prst="rect">
+            <a:avLst/>
+          </a:prstGeom>
+          <a:noFill/>
+          <a:ln/>
+        </p:spPr>
+        <p:txBody>
+          <a:bodyPr wrap="square" rtlCol="0" anchor="ctr"/>
+          <a:lstStyle/>
+          <a:p>
+            <a:pPr marL="0" indent="0">
               <a:buNone/>
             </a:pPr>
             <a:r>
@@ -6063,20 +6035,20 @@
         </p:nvSpPr>
         <p:spPr>
           <a:xfrm>
-            <a:off x="548640" y="6528816"/>
-            <a:ext cx="8686800" cy="274320"/>
-          </a:xfrm>
-          <a:prstGeom prst="rect">
-            <a:avLst/>
-          </a:prstGeom>
-          <a:noFill/>
-          <a:ln/>
-        </p:spPr>
-        <p:txBody>
-          <a:bodyPr wrap="square" rtlCol="0" anchor="ctr"/>
-          <a:lstStyle/>
-          <a:p>
-            <a:pPr indent="0" marL="0">
+            <a:off x="563880" y="6292460"/>
+            <a:ext cx="8686800" cy="122383"/>
+          </a:xfrm>
+          <a:prstGeom prst="rect">
+            <a:avLst/>
+          </a:prstGeom>
+          <a:noFill/>
+          <a:ln/>
+        </p:spPr>
+        <p:txBody>
+          <a:bodyPr wrap="square" rtlCol="0" anchor="ctr"/>
+          <a:lstStyle/>
+          <a:p>
+            <a:pPr marL="0" indent="0">
               <a:buNone/>
             </a:pPr>
             <a:r>
@@ -6102,20 +6074,20 @@
         </p:nvSpPr>
         <p:spPr>
           <a:xfrm>
-            <a:off x="11521440" y="6528816"/>
-            <a:ext cx="457200" cy="274320"/>
-          </a:xfrm>
-          <a:prstGeom prst="rect">
-            <a:avLst/>
-          </a:prstGeom>
-          <a:noFill/>
-          <a:ln/>
-        </p:spPr>
-        <p:txBody>
-          <a:bodyPr wrap="square" rtlCol="0" anchor="ctr"/>
-          <a:lstStyle/>
-          <a:p>
-            <a:pPr algn="r" indent="0" marL="0">
+            <a:off x="11536680" y="6292460"/>
+            <a:ext cx="457200" cy="122383"/>
+          </a:xfrm>
+          <a:prstGeom prst="rect">
+            <a:avLst/>
+          </a:prstGeom>
+          <a:noFill/>
+          <a:ln/>
+        </p:spPr>
+        <p:txBody>
+          <a:bodyPr wrap="square" rtlCol="0" anchor="ctr"/>
+          <a:lstStyle/>
+          <a:p>
+            <a:pPr marL="0" indent="0" algn="r">
               <a:buNone/>
             </a:pPr>
             <a:r>
@@ -6141,8 +6113,8 @@
         </p:nvSpPr>
         <p:spPr>
           <a:xfrm>
-            <a:off x="548640" y="1600200"/>
-            <a:ext cx="2423160" cy="1051560"/>
+            <a:off x="563880" y="1363844"/>
+            <a:ext cx="2423160" cy="469135"/>
           </a:xfrm>
           <a:prstGeom prst="roundRect">
             <a:avLst>
@@ -6154,6 +6126,13 @@
           </a:solidFill>
           <a:ln/>
         </p:spPr>
+        <p:txBody>
+          <a:bodyPr/>
+          <a:lstStyle/>
+          <a:p>
+            <a:endParaRPr lang="en-US"/>
+          </a:p>
+        </p:txBody>
       </p:sp>
       <p:sp>
         <p:nvSpPr>
@@ -6163,20 +6142,20 @@
         </p:nvSpPr>
         <p:spPr>
           <a:xfrm>
-            <a:off x="640080" y="1600200"/>
-            <a:ext cx="2240280" cy="1051560"/>
-          </a:xfrm>
-          <a:prstGeom prst="rect">
-            <a:avLst/>
-          </a:prstGeom>
-          <a:noFill/>
-          <a:ln/>
-        </p:spPr>
-        <p:txBody>
-          <a:bodyPr wrap="square" rtlCol="0" anchor="ctr"/>
-          <a:lstStyle/>
-          <a:p>
-            <a:pPr algn="ctr" indent="0" marL="0">
+            <a:off x="655320" y="1363844"/>
+            <a:ext cx="2240280" cy="469135"/>
+          </a:xfrm>
+          <a:prstGeom prst="rect">
+            <a:avLst/>
+          </a:prstGeom>
+          <a:noFill/>
+          <a:ln/>
+        </p:spPr>
+        <p:txBody>
+          <a:bodyPr wrap="square" rtlCol="0" anchor="ctr"/>
+          <a:lstStyle/>
+          <a:p>
+            <a:pPr marL="0" indent="0" algn="ctr">
               <a:lnSpc>
                 <a:spcPct val="105000"/>
               </a:lnSpc>
@@ -6196,7 +6175,7 @@
             <a:endParaRPr lang="en-US" sz="1200" dirty="0"/>
           </a:p>
           <a:p>
-            <a:pPr algn="ctr" indent="0" marL="0">
+            <a:pPr marL="0" indent="0" algn="ctr">
               <a:lnSpc>
                 <a:spcPct val="105000"/>
               </a:lnSpc>
@@ -6225,8 +6204,8 @@
         </p:nvSpPr>
         <p:spPr>
           <a:xfrm>
-            <a:off x="2999232" y="1965960"/>
-            <a:ext cx="329184" cy="320040"/>
+            <a:off x="3014472" y="1729604"/>
+            <a:ext cx="329184" cy="142780"/>
           </a:xfrm>
           <a:prstGeom prst="rightArrow">
             <a:avLst/>
@@ -6236,6 +6215,13 @@
           </a:solidFill>
           <a:ln/>
         </p:spPr>
+        <p:txBody>
+          <a:bodyPr/>
+          <a:lstStyle/>
+          <a:p>
+            <a:endParaRPr lang="en-US"/>
+          </a:p>
+        </p:txBody>
       </p:sp>
       <p:sp>
         <p:nvSpPr>
@@ -6245,8 +6231,8 @@
         </p:nvSpPr>
         <p:spPr>
           <a:xfrm>
-            <a:off x="3355848" y="1600200"/>
-            <a:ext cx="2423160" cy="1051560"/>
+            <a:off x="3371088" y="1363844"/>
+            <a:ext cx="2423160" cy="469135"/>
           </a:xfrm>
           <a:prstGeom prst="roundRect">
             <a:avLst>
@@ -6258,6 +6244,13 @@
           </a:solidFill>
           <a:ln/>
         </p:spPr>
+        <p:txBody>
+          <a:bodyPr/>
+          <a:lstStyle/>
+          <a:p>
+            <a:endParaRPr lang="en-US"/>
+          </a:p>
+        </p:txBody>
       </p:sp>
       <p:sp>
         <p:nvSpPr>
@@ -6267,20 +6260,20 @@
         </p:nvSpPr>
         <p:spPr>
           <a:xfrm>
-            <a:off x="3447288" y="1600200"/>
-            <a:ext cx="2240280" cy="1051560"/>
-          </a:xfrm>
-          <a:prstGeom prst="rect">
-            <a:avLst/>
-          </a:prstGeom>
-          <a:noFill/>
-          <a:ln/>
-        </p:spPr>
-        <p:txBody>
-          <a:bodyPr wrap="square" rtlCol="0" anchor="ctr"/>
-          <a:lstStyle/>
-          <a:p>
-            <a:pPr algn="ctr" indent="0" marL="0">
+            <a:off x="3462528" y="1363844"/>
+            <a:ext cx="2240280" cy="469135"/>
+          </a:xfrm>
+          <a:prstGeom prst="rect">
+            <a:avLst/>
+          </a:prstGeom>
+          <a:noFill/>
+          <a:ln/>
+        </p:spPr>
+        <p:txBody>
+          <a:bodyPr wrap="square" rtlCol="0" anchor="ctr"/>
+          <a:lstStyle/>
+          <a:p>
+            <a:pPr marL="0" indent="0" algn="ctr">
               <a:lnSpc>
                 <a:spcPct val="105000"/>
               </a:lnSpc>
@@ -6300,7 +6293,7 @@
             <a:endParaRPr lang="en-US" sz="1200" dirty="0"/>
           </a:p>
           <a:p>
-            <a:pPr algn="ctr" indent="0" marL="0">
+            <a:pPr marL="0" indent="0" algn="ctr">
               <a:lnSpc>
                 <a:spcPct val="105000"/>
               </a:lnSpc>
@@ -6329,8 +6322,8 @@
         </p:nvSpPr>
         <p:spPr>
           <a:xfrm>
-            <a:off x="5806440" y="1965960"/>
-            <a:ext cx="329184" cy="320040"/>
+            <a:off x="5821680" y="1729604"/>
+            <a:ext cx="329184" cy="142780"/>
           </a:xfrm>
           <a:prstGeom prst="rightArrow">
             <a:avLst/>
@@ -6340,6 +6333,13 @@
           </a:solidFill>
           <a:ln/>
         </p:spPr>
+        <p:txBody>
+          <a:bodyPr/>
+          <a:lstStyle/>
+          <a:p>
+            <a:endParaRPr lang="en-US"/>
+          </a:p>
+        </p:txBody>
       </p:sp>
       <p:sp>
         <p:nvSpPr>
@@ -6349,8 +6349,8 @@
         </p:nvSpPr>
         <p:spPr>
           <a:xfrm>
-            <a:off x="6163056" y="1600200"/>
-            <a:ext cx="2423160" cy="1051560"/>
+            <a:off x="6178296" y="1363844"/>
+            <a:ext cx="2423160" cy="469135"/>
           </a:xfrm>
           <a:prstGeom prst="roundRect">
             <a:avLst>
@@ -6362,6 +6362,13 @@
           </a:solidFill>
           <a:ln/>
         </p:spPr>
+        <p:txBody>
+          <a:bodyPr/>
+          <a:lstStyle/>
+          <a:p>
+            <a:endParaRPr lang="en-US"/>
+          </a:p>
+        </p:txBody>
       </p:sp>
       <p:sp>
         <p:nvSpPr>
@@ -6371,20 +6378,20 @@
         </p:nvSpPr>
         <p:spPr>
           <a:xfrm>
-            <a:off x="6254496" y="1600200"/>
-            <a:ext cx="2240280" cy="1051560"/>
-          </a:xfrm>
-          <a:prstGeom prst="rect">
-            <a:avLst/>
-          </a:prstGeom>
-          <a:noFill/>
-          <a:ln/>
-        </p:spPr>
-        <p:txBody>
-          <a:bodyPr wrap="square" rtlCol="0" anchor="ctr"/>
-          <a:lstStyle/>
-          <a:p>
-            <a:pPr algn="ctr" indent="0" marL="0">
+            <a:off x="6269736" y="1363844"/>
+            <a:ext cx="2240280" cy="469135"/>
+          </a:xfrm>
+          <a:prstGeom prst="rect">
+            <a:avLst/>
+          </a:prstGeom>
+          <a:noFill/>
+          <a:ln/>
+        </p:spPr>
+        <p:txBody>
+          <a:bodyPr wrap="square" rtlCol="0" anchor="ctr"/>
+          <a:lstStyle/>
+          <a:p>
+            <a:pPr marL="0" indent="0" algn="ctr">
               <a:lnSpc>
                 <a:spcPct val="105000"/>
               </a:lnSpc>
@@ -6404,7 +6411,7 @@
             <a:endParaRPr lang="en-US" sz="1200" dirty="0"/>
           </a:p>
           <a:p>
-            <a:pPr algn="ctr" indent="0" marL="0">
+            <a:pPr marL="0" indent="0" algn="ctr">
               <a:lnSpc>
                 <a:spcPct val="105000"/>
               </a:lnSpc>
@@ -6433,8 +6440,8 @@
         </p:nvSpPr>
         <p:spPr>
           <a:xfrm>
-            <a:off x="8613648" y="1965960"/>
-            <a:ext cx="329184" cy="320040"/>
+            <a:off x="8628888" y="1729604"/>
+            <a:ext cx="329184" cy="142780"/>
           </a:xfrm>
           <a:prstGeom prst="rightArrow">
             <a:avLst/>
@@ -6444,6 +6451,13 @@
           </a:solidFill>
           <a:ln/>
         </p:spPr>
+        <p:txBody>
+          <a:bodyPr/>
+          <a:lstStyle/>
+          <a:p>
+            <a:endParaRPr lang="en-US"/>
+          </a:p>
+        </p:txBody>
       </p:sp>
       <p:sp>
         <p:nvSpPr>
@@ -6453,8 +6467,8 @@
         </p:nvSpPr>
         <p:spPr>
           <a:xfrm>
-            <a:off x="8970264" y="1600200"/>
-            <a:ext cx="2423160" cy="1051560"/>
+            <a:off x="8985504" y="1363844"/>
+            <a:ext cx="2423160" cy="469135"/>
           </a:xfrm>
           <a:prstGeom prst="roundRect">
             <a:avLst>
@@ -6466,6 +6480,13 @@
           </a:solidFill>
           <a:ln/>
         </p:spPr>
+        <p:txBody>
+          <a:bodyPr/>
+          <a:lstStyle/>
+          <a:p>
+            <a:endParaRPr lang="en-US"/>
+          </a:p>
+        </p:txBody>
       </p:sp>
       <p:sp>
         <p:nvSpPr>
@@ -6475,20 +6496,20 @@
         </p:nvSpPr>
         <p:spPr>
           <a:xfrm>
-            <a:off x="9061704" y="1600200"/>
-            <a:ext cx="2240280" cy="1051560"/>
-          </a:xfrm>
-          <a:prstGeom prst="rect">
-            <a:avLst/>
-          </a:prstGeom>
-          <a:noFill/>
-          <a:ln/>
-        </p:spPr>
-        <p:txBody>
-          <a:bodyPr wrap="square" rtlCol="0" anchor="ctr"/>
-          <a:lstStyle/>
-          <a:p>
-            <a:pPr algn="ctr" indent="0" marL="0">
+            <a:off x="9076944" y="1363844"/>
+            <a:ext cx="2240280" cy="469135"/>
+          </a:xfrm>
+          <a:prstGeom prst="rect">
+            <a:avLst/>
+          </a:prstGeom>
+          <a:noFill/>
+          <a:ln/>
+        </p:spPr>
+        <p:txBody>
+          <a:bodyPr wrap="square" rtlCol="0" anchor="ctr"/>
+          <a:lstStyle/>
+          <a:p>
+            <a:pPr marL="0" indent="0" algn="ctr">
               <a:lnSpc>
                 <a:spcPct val="105000"/>
               </a:lnSpc>
@@ -6508,7 +6529,7 @@
             <a:endParaRPr lang="en-US" sz="1200" dirty="0"/>
           </a:p>
           <a:p>
-            <a:pPr algn="ctr" indent="0" marL="0">
+            <a:pPr marL="0" indent="0" algn="ctr">
               <a:lnSpc>
                 <a:spcPct val="105000"/>
               </a:lnSpc>
@@ -6537,20 +6558,20 @@
         </p:nvSpPr>
         <p:spPr>
           <a:xfrm>
-            <a:off x="548640" y="2761488"/>
-            <a:ext cx="10515600" cy="320040"/>
-          </a:xfrm>
-          <a:prstGeom prst="rect">
-            <a:avLst/>
-          </a:prstGeom>
-          <a:noFill/>
-          <a:ln/>
-        </p:spPr>
-        <p:txBody>
-          <a:bodyPr wrap="square" rtlCol="0" anchor="ctr"/>
-          <a:lstStyle/>
-          <a:p>
-            <a:pPr indent="0" marL="0">
+            <a:off x="563880" y="2525132"/>
+            <a:ext cx="10515600" cy="142780"/>
+          </a:xfrm>
+          <a:prstGeom prst="rect">
+            <a:avLst/>
+          </a:prstGeom>
+          <a:noFill/>
+          <a:ln/>
+        </p:spPr>
+        <p:txBody>
+          <a:bodyPr wrap="square" rtlCol="0" anchor="ctr"/>
+          <a:lstStyle/>
+          <a:p>
+            <a:pPr marL="0" indent="0">
               <a:buNone/>
             </a:pPr>
             <a:r>
@@ -6576,20 +6597,20 @@
         </p:nvSpPr>
         <p:spPr>
           <a:xfrm>
-            <a:off x="548640" y="3246120"/>
-            <a:ext cx="5486400" cy="320040"/>
-          </a:xfrm>
-          <a:prstGeom prst="rect">
-            <a:avLst/>
-          </a:prstGeom>
-          <a:noFill/>
-          <a:ln/>
-        </p:spPr>
-        <p:txBody>
-          <a:bodyPr wrap="square" rtlCol="0" anchor="ctr"/>
-          <a:lstStyle/>
-          <a:p>
-            <a:pPr indent="0" marL="0">
+            <a:off x="563880" y="3009764"/>
+            <a:ext cx="5486400" cy="142780"/>
+          </a:xfrm>
+          <a:prstGeom prst="rect">
+            <a:avLst/>
+          </a:prstGeom>
+          <a:noFill/>
+          <a:ln/>
+        </p:spPr>
+        <p:txBody>
+          <a:bodyPr wrap="square" rtlCol="0" anchor="ctr"/>
+          <a:lstStyle/>
+          <a:p>
+            <a:pPr marL="0" indent="0">
               <a:buNone/>
             </a:pPr>
             <a:r>
@@ -6615,8 +6636,8 @@
         </p:nvSpPr>
         <p:spPr>
           <a:xfrm>
-            <a:off x="548640" y="3639312"/>
-            <a:ext cx="5367528" cy="1234440"/>
+            <a:off x="563880" y="3402956"/>
+            <a:ext cx="5367528" cy="550724"/>
           </a:xfrm>
           <a:prstGeom prst="roundRect">
             <a:avLst>
@@ -6628,6 +6649,13 @@
           </a:solidFill>
           <a:ln/>
         </p:spPr>
+        <p:txBody>
+          <a:bodyPr/>
+          <a:lstStyle/>
+          <a:p>
+            <a:endParaRPr lang="en-US"/>
+          </a:p>
+        </p:txBody>
       </p:sp>
       <p:sp>
         <p:nvSpPr>
@@ -6637,8 +6665,8 @@
         </p:nvSpPr>
         <p:spPr>
           <a:xfrm>
-            <a:off x="713232" y="4055364"/>
-            <a:ext cx="402336" cy="402336"/>
+            <a:off x="728472" y="3819008"/>
+            <a:ext cx="402336" cy="179495"/>
           </a:xfrm>
           <a:prstGeom prst="ellipse">
             <a:avLst/>
@@ -6648,6 +6676,13 @@
           </a:solidFill>
           <a:ln/>
         </p:spPr>
+        <p:txBody>
+          <a:bodyPr/>
+          <a:lstStyle/>
+          <a:p>
+            <a:endParaRPr lang="en-US"/>
+          </a:p>
+        </p:txBody>
       </p:sp>
       <p:sp>
         <p:nvSpPr>
@@ -6657,20 +6692,20 @@
         </p:nvSpPr>
         <p:spPr>
           <a:xfrm>
-            <a:off x="713232" y="4055364"/>
-            <a:ext cx="402336" cy="402336"/>
-          </a:xfrm>
-          <a:prstGeom prst="rect">
-            <a:avLst/>
-          </a:prstGeom>
-          <a:noFill/>
-          <a:ln/>
-        </p:spPr>
-        <p:txBody>
-          <a:bodyPr wrap="square" rtlCol="0" anchor="ctr"/>
-          <a:lstStyle/>
-          <a:p>
-            <a:pPr algn="ctr" indent="0" marL="0">
+            <a:off x="728472" y="3819008"/>
+            <a:ext cx="402336" cy="179495"/>
+          </a:xfrm>
+          <a:prstGeom prst="rect">
+            <a:avLst/>
+          </a:prstGeom>
+          <a:noFill/>
+          <a:ln/>
+        </p:spPr>
+        <p:txBody>
+          <a:bodyPr wrap="square" rtlCol="0" anchor="ctr"/>
+          <a:lstStyle/>
+          <a:p>
+            <a:pPr marL="0" indent="0" algn="ctr">
               <a:buNone/>
             </a:pPr>
             <a:r>
@@ -6696,20 +6731,20 @@
         </p:nvSpPr>
         <p:spPr>
           <a:xfrm>
-            <a:off x="1234440" y="3639312"/>
-            <a:ext cx="4498848" cy="1234440"/>
-          </a:xfrm>
-          <a:prstGeom prst="rect">
-            <a:avLst/>
-          </a:prstGeom>
-          <a:noFill/>
-          <a:ln/>
-        </p:spPr>
-        <p:txBody>
-          <a:bodyPr wrap="square" rtlCol="0" anchor="ctr"/>
-          <a:lstStyle/>
-          <a:p>
-            <a:pPr indent="0" marL="0">
+            <a:off x="1249680" y="3402956"/>
+            <a:ext cx="4498848" cy="550724"/>
+          </a:xfrm>
+          <a:prstGeom prst="rect">
+            <a:avLst/>
+          </a:prstGeom>
+          <a:noFill/>
+          <a:ln/>
+        </p:spPr>
+        <p:txBody>
+          <a:bodyPr wrap="square" rtlCol="0" anchor="ctr"/>
+          <a:lstStyle/>
+          <a:p>
+            <a:pPr marL="0" indent="0">
               <a:lnSpc>
                 <a:spcPct val="105000"/>
               </a:lnSpc>
@@ -6738,8 +6773,8 @@
         </p:nvSpPr>
         <p:spPr>
           <a:xfrm>
-            <a:off x="6099048" y="3639312"/>
-            <a:ext cx="5367528" cy="1234440"/>
+            <a:off x="6114288" y="3402956"/>
+            <a:ext cx="5367528" cy="550724"/>
           </a:xfrm>
           <a:prstGeom prst="roundRect">
             <a:avLst>
@@ -6751,6 +6786,13 @@
           </a:solidFill>
           <a:ln/>
         </p:spPr>
+        <p:txBody>
+          <a:bodyPr/>
+          <a:lstStyle/>
+          <a:p>
+            <a:endParaRPr lang="en-US"/>
+          </a:p>
+        </p:txBody>
       </p:sp>
       <p:sp>
         <p:nvSpPr>
@@ -6760,8 +6802,8 @@
         </p:nvSpPr>
         <p:spPr>
           <a:xfrm>
-            <a:off x="6263640" y="4055364"/>
-            <a:ext cx="402336" cy="402336"/>
+            <a:off x="6278880" y="3819008"/>
+            <a:ext cx="402336" cy="179495"/>
           </a:xfrm>
           <a:prstGeom prst="ellipse">
             <a:avLst/>
@@ -6771,6 +6813,13 @@
           </a:solidFill>
           <a:ln/>
         </p:spPr>
+        <p:txBody>
+          <a:bodyPr/>
+          <a:lstStyle/>
+          <a:p>
+            <a:endParaRPr lang="en-US"/>
+          </a:p>
+        </p:txBody>
       </p:sp>
       <p:sp>
         <p:nvSpPr>
@@ -6780,20 +6829,20 @@
         </p:nvSpPr>
         <p:spPr>
           <a:xfrm>
-            <a:off x="6263640" y="4055364"/>
-            <a:ext cx="402336" cy="402336"/>
-          </a:xfrm>
-          <a:prstGeom prst="rect">
-            <a:avLst/>
-          </a:prstGeom>
-          <a:noFill/>
-          <a:ln/>
-        </p:spPr>
-        <p:txBody>
-          <a:bodyPr wrap="square" rtlCol="0" anchor="ctr"/>
-          <a:lstStyle/>
-          <a:p>
-            <a:pPr algn="ctr" indent="0" marL="0">
+            <a:off x="6278880" y="3819008"/>
+            <a:ext cx="402336" cy="179495"/>
+          </a:xfrm>
+          <a:prstGeom prst="rect">
+            <a:avLst/>
+          </a:prstGeom>
+          <a:noFill/>
+          <a:ln/>
+        </p:spPr>
+        <p:txBody>
+          <a:bodyPr wrap="square" rtlCol="0" anchor="ctr"/>
+          <a:lstStyle/>
+          <a:p>
+            <a:pPr marL="0" indent="0" algn="ctr">
               <a:buNone/>
             </a:pPr>
             <a:r>
@@ -6819,20 +6868,20 @@
         </p:nvSpPr>
         <p:spPr>
           <a:xfrm>
-            <a:off x="6784848" y="3639312"/>
-            <a:ext cx="4498848" cy="1234440"/>
-          </a:xfrm>
-          <a:prstGeom prst="rect">
-            <a:avLst/>
-          </a:prstGeom>
-          <a:noFill/>
-          <a:ln/>
-        </p:spPr>
-        <p:txBody>
-          <a:bodyPr wrap="square" rtlCol="0" anchor="ctr"/>
-          <a:lstStyle/>
-          <a:p>
-            <a:pPr indent="0" marL="0">
+            <a:off x="6800088" y="3402956"/>
+            <a:ext cx="4498848" cy="550724"/>
+          </a:xfrm>
+          <a:prstGeom prst="rect">
+            <a:avLst/>
+          </a:prstGeom>
+          <a:noFill/>
+          <a:ln/>
+        </p:spPr>
+        <p:txBody>
+          <a:bodyPr wrap="square" rtlCol="0" anchor="ctr"/>
+          <a:lstStyle/>
+          <a:p>
+            <a:pPr marL="0" indent="0">
               <a:lnSpc>
                 <a:spcPct val="105000"/>
               </a:lnSpc>
@@ -6861,8 +6910,8 @@
         </p:nvSpPr>
         <p:spPr>
           <a:xfrm>
-            <a:off x="548640" y="5010912"/>
-            <a:ext cx="5367528" cy="1234440"/>
+            <a:off x="563880" y="4774556"/>
+            <a:ext cx="5367528" cy="550724"/>
           </a:xfrm>
           <a:prstGeom prst="roundRect">
             <a:avLst>
@@ -6874,6 +6923,13 @@
           </a:solidFill>
           <a:ln/>
         </p:spPr>
+        <p:txBody>
+          <a:bodyPr/>
+          <a:lstStyle/>
+          <a:p>
+            <a:endParaRPr lang="en-US"/>
+          </a:p>
+        </p:txBody>
       </p:sp>
       <p:sp>
         <p:nvSpPr>
@@ -6883,8 +6939,8 @@
         </p:nvSpPr>
         <p:spPr>
           <a:xfrm>
-            <a:off x="713232" y="5426964"/>
-            <a:ext cx="402336" cy="402336"/>
+            <a:off x="728472" y="5190608"/>
+            <a:ext cx="402336" cy="179495"/>
           </a:xfrm>
           <a:prstGeom prst="ellipse">
             <a:avLst/>
@@ -6894,6 +6950,13 @@
           </a:solidFill>
           <a:ln/>
         </p:spPr>
+        <p:txBody>
+          <a:bodyPr/>
+          <a:lstStyle/>
+          <a:p>
+            <a:endParaRPr lang="en-US"/>
+          </a:p>
+        </p:txBody>
       </p:sp>
       <p:sp>
         <p:nvSpPr>
@@ -6903,20 +6966,20 @@
         </p:nvSpPr>
         <p:spPr>
           <a:xfrm>
-            <a:off x="713232" y="5426964"/>
-            <a:ext cx="402336" cy="402336"/>
-          </a:xfrm>
-          <a:prstGeom prst="rect">
-            <a:avLst/>
-          </a:prstGeom>
-          <a:noFill/>
-          <a:ln/>
-        </p:spPr>
-        <p:txBody>
-          <a:bodyPr wrap="square" rtlCol="0" anchor="ctr"/>
-          <a:lstStyle/>
-          <a:p>
-            <a:pPr algn="ctr" indent="0" marL="0">
+            <a:off x="728472" y="5190608"/>
+            <a:ext cx="402336" cy="179495"/>
+          </a:xfrm>
+          <a:prstGeom prst="rect">
+            <a:avLst/>
+          </a:prstGeom>
+          <a:noFill/>
+          <a:ln/>
+        </p:spPr>
+        <p:txBody>
+          <a:bodyPr wrap="square" rtlCol="0" anchor="ctr"/>
+          <a:lstStyle/>
+          <a:p>
+            <a:pPr marL="0" indent="0" algn="ctr">
               <a:buNone/>
             </a:pPr>
             <a:r>
@@ -6942,20 +7005,20 @@
         </p:nvSpPr>
         <p:spPr>
           <a:xfrm>
-            <a:off x="1234440" y="5010912"/>
-            <a:ext cx="4498848" cy="1234440"/>
-          </a:xfrm>
-          <a:prstGeom prst="rect">
-            <a:avLst/>
-          </a:prstGeom>
-          <a:noFill/>
-          <a:ln/>
-        </p:spPr>
-        <p:txBody>
-          <a:bodyPr wrap="square" rtlCol="0" anchor="ctr"/>
-          <a:lstStyle/>
-          <a:p>
-            <a:pPr indent="0" marL="0">
+            <a:off x="1249680" y="4774556"/>
+            <a:ext cx="4498848" cy="550724"/>
+          </a:xfrm>
+          <a:prstGeom prst="rect">
+            <a:avLst/>
+          </a:prstGeom>
+          <a:noFill/>
+          <a:ln/>
+        </p:spPr>
+        <p:txBody>
+          <a:bodyPr wrap="square" rtlCol="0" anchor="ctr"/>
+          <a:lstStyle/>
+          <a:p>
+            <a:pPr marL="0" indent="0">
               <a:lnSpc>
                 <a:spcPct val="105000"/>
               </a:lnSpc>
@@ -6984,8 +7047,8 @@
         </p:nvSpPr>
         <p:spPr>
           <a:xfrm>
-            <a:off x="6099048" y="5010912"/>
-            <a:ext cx="5367528" cy="1234440"/>
+            <a:off x="6114288" y="4774556"/>
+            <a:ext cx="5367528" cy="550724"/>
           </a:xfrm>
           <a:prstGeom prst="roundRect">
             <a:avLst>
@@ -6997,6 +7060,13 @@
           </a:solidFill>
           <a:ln/>
         </p:spPr>
+        <p:txBody>
+          <a:bodyPr/>
+          <a:lstStyle/>
+          <a:p>
+            <a:endParaRPr lang="en-US"/>
+          </a:p>
+        </p:txBody>
       </p:sp>
       <p:sp>
         <p:nvSpPr>
@@ -7006,8 +7076,8 @@
         </p:nvSpPr>
         <p:spPr>
           <a:xfrm>
-            <a:off x="6263640" y="5426964"/>
-            <a:ext cx="402336" cy="402336"/>
+            <a:off x="6278880" y="5190608"/>
+            <a:ext cx="402336" cy="179495"/>
           </a:xfrm>
           <a:prstGeom prst="ellipse">
             <a:avLst/>
@@ -7017,6 +7087,13 @@
           </a:solidFill>
           <a:ln/>
         </p:spPr>
+        <p:txBody>
+          <a:bodyPr/>
+          <a:lstStyle/>
+          <a:p>
+            <a:endParaRPr lang="en-US"/>
+          </a:p>
+        </p:txBody>
       </p:sp>
       <p:sp>
         <p:nvSpPr>
@@ -7026,20 +7103,20 @@
         </p:nvSpPr>
         <p:spPr>
           <a:xfrm>
-            <a:off x="6263640" y="5426964"/>
-            <a:ext cx="402336" cy="402336"/>
-          </a:xfrm>
-          <a:prstGeom prst="rect">
-            <a:avLst/>
-          </a:prstGeom>
-          <a:noFill/>
-          <a:ln/>
-        </p:spPr>
-        <p:txBody>
-          <a:bodyPr wrap="square" rtlCol="0" anchor="ctr"/>
-          <a:lstStyle/>
-          <a:p>
-            <a:pPr algn="ctr" indent="0" marL="0">
+            <a:off x="6278880" y="5190608"/>
+            <a:ext cx="402336" cy="179495"/>
+          </a:xfrm>
+          <a:prstGeom prst="rect">
+            <a:avLst/>
+          </a:prstGeom>
+          <a:noFill/>
+          <a:ln/>
+        </p:spPr>
+        <p:txBody>
+          <a:bodyPr wrap="square" rtlCol="0" anchor="ctr"/>
+          <a:lstStyle/>
+          <a:p>
+            <a:pPr marL="0" indent="0" algn="ctr">
               <a:buNone/>
             </a:pPr>
             <a:r>
@@ -7065,20 +7142,20 @@
         </p:nvSpPr>
         <p:spPr>
           <a:xfrm>
-            <a:off x="6784848" y="5010912"/>
-            <a:ext cx="4498848" cy="1234440"/>
-          </a:xfrm>
-          <a:prstGeom prst="rect">
-            <a:avLst/>
-          </a:prstGeom>
-          <a:noFill/>
-          <a:ln/>
-        </p:spPr>
-        <p:txBody>
-          <a:bodyPr wrap="square" rtlCol="0" anchor="ctr"/>
-          <a:lstStyle/>
-          <a:p>
-            <a:pPr indent="0" marL="0">
+            <a:off x="6800088" y="4774556"/>
+            <a:ext cx="4498848" cy="550724"/>
+          </a:xfrm>
+          <a:prstGeom prst="rect">
+            <a:avLst/>
+          </a:prstGeom>
+          <a:noFill/>
+          <a:ln/>
+        </p:spPr>
+        <p:txBody>
+          <a:bodyPr wrap="square" rtlCol="0" anchor="ctr"/>
+          <a:lstStyle/>
+          <a:p>
+            <a:pPr marL="0" indent="0">
               <a:lnSpc>
                 <a:spcPct val="105000"/>
               </a:lnSpc>
@@ -7107,8 +7184,8 @@
         </p:nvSpPr>
         <p:spPr>
           <a:xfrm>
-            <a:off x="548640" y="6382512"/>
-            <a:ext cx="5367528" cy="1234440"/>
+            <a:off x="563880" y="6146156"/>
+            <a:ext cx="5367528" cy="550724"/>
           </a:xfrm>
           <a:prstGeom prst="roundRect">
             <a:avLst>
@@ -7120,6 +7197,13 @@
           </a:solidFill>
           <a:ln/>
         </p:spPr>
+        <p:txBody>
+          <a:bodyPr/>
+          <a:lstStyle/>
+          <a:p>
+            <a:endParaRPr lang="en-US"/>
+          </a:p>
+        </p:txBody>
       </p:sp>
       <p:sp>
         <p:nvSpPr>
@@ -7129,8 +7213,8 @@
         </p:nvSpPr>
         <p:spPr>
           <a:xfrm>
-            <a:off x="713232" y="6798564"/>
-            <a:ext cx="402336" cy="402336"/>
+            <a:off x="728472" y="6562208"/>
+            <a:ext cx="402336" cy="179495"/>
           </a:xfrm>
           <a:prstGeom prst="ellipse">
             <a:avLst/>
@@ -7140,6 +7224,13 @@
           </a:solidFill>
           <a:ln/>
         </p:spPr>
+        <p:txBody>
+          <a:bodyPr/>
+          <a:lstStyle/>
+          <a:p>
+            <a:endParaRPr lang="en-US"/>
+          </a:p>
+        </p:txBody>
       </p:sp>
       <p:sp>
         <p:nvSpPr>
@@ -7149,20 +7240,20 @@
         </p:nvSpPr>
         <p:spPr>
           <a:xfrm>
-            <a:off x="713232" y="6798564"/>
-            <a:ext cx="402336" cy="402336"/>
-          </a:xfrm>
-          <a:prstGeom prst="rect">
-            <a:avLst/>
-          </a:prstGeom>
-          <a:noFill/>
-          <a:ln/>
-        </p:spPr>
-        <p:txBody>
-          <a:bodyPr wrap="square" rtlCol="0" anchor="ctr"/>
-          <a:lstStyle/>
-          <a:p>
-            <a:pPr algn="ctr" indent="0" marL="0">
+            <a:off x="728472" y="6562208"/>
+            <a:ext cx="402336" cy="179495"/>
+          </a:xfrm>
+          <a:prstGeom prst="rect">
+            <a:avLst/>
+          </a:prstGeom>
+          <a:noFill/>
+          <a:ln/>
+        </p:spPr>
+        <p:txBody>
+          <a:bodyPr wrap="square" rtlCol="0" anchor="ctr"/>
+          <a:lstStyle/>
+          <a:p>
+            <a:pPr marL="0" indent="0" algn="ctr">
               <a:buNone/>
             </a:pPr>
             <a:r>
@@ -7188,20 +7279,20 @@
         </p:nvSpPr>
         <p:spPr>
           <a:xfrm>
-            <a:off x="1234440" y="6382512"/>
-            <a:ext cx="4498848" cy="1234440"/>
-          </a:xfrm>
-          <a:prstGeom prst="rect">
-            <a:avLst/>
-          </a:prstGeom>
-          <a:noFill/>
-          <a:ln/>
-        </p:spPr>
-        <p:txBody>
-          <a:bodyPr wrap="square" rtlCol="0" anchor="ctr"/>
-          <a:lstStyle/>
-          <a:p>
-            <a:pPr indent="0" marL="0">
+            <a:off x="1249680" y="6146156"/>
+            <a:ext cx="4498848" cy="550724"/>
+          </a:xfrm>
+          <a:prstGeom prst="rect">
+            <a:avLst/>
+          </a:prstGeom>
+          <a:noFill/>
+          <a:ln/>
+        </p:spPr>
+        <p:txBody>
+          <a:bodyPr wrap="square" rtlCol="0" anchor="ctr"/>
+          <a:lstStyle/>
+          <a:p>
+            <a:pPr marL="0" indent="0">
               <a:lnSpc>
                 <a:spcPct val="105000"/>
               </a:lnSpc>
@@ -7230,8 +7321,8 @@
         </p:nvSpPr>
         <p:spPr>
           <a:xfrm>
-            <a:off x="6099048" y="6382512"/>
-            <a:ext cx="5367528" cy="1234440"/>
+            <a:off x="6114288" y="6146156"/>
+            <a:ext cx="5367528" cy="550724"/>
           </a:xfrm>
           <a:prstGeom prst="roundRect">
             <a:avLst>
@@ -7243,6 +7334,13 @@
           </a:solidFill>
           <a:ln/>
         </p:spPr>
+        <p:txBody>
+          <a:bodyPr/>
+          <a:lstStyle/>
+          <a:p>
+            <a:endParaRPr lang="en-US"/>
+          </a:p>
+        </p:txBody>
       </p:sp>
       <p:sp>
         <p:nvSpPr>
@@ -7252,8 +7350,8 @@
         </p:nvSpPr>
         <p:spPr>
           <a:xfrm>
-            <a:off x="6263640" y="6798564"/>
-            <a:ext cx="402336" cy="402336"/>
+            <a:off x="6278880" y="6562208"/>
+            <a:ext cx="402336" cy="179495"/>
           </a:xfrm>
           <a:prstGeom prst="ellipse">
             <a:avLst/>
@@ -7263,6 +7361,13 @@
           </a:solidFill>
           <a:ln/>
         </p:spPr>
+        <p:txBody>
+          <a:bodyPr/>
+          <a:lstStyle/>
+          <a:p>
+            <a:endParaRPr lang="en-US"/>
+          </a:p>
+        </p:txBody>
       </p:sp>
       <p:sp>
         <p:nvSpPr>
@@ -7272,20 +7377,20 @@
         </p:nvSpPr>
         <p:spPr>
           <a:xfrm>
-            <a:off x="6263640" y="6798564"/>
-            <a:ext cx="402336" cy="402336"/>
-          </a:xfrm>
-          <a:prstGeom prst="rect">
-            <a:avLst/>
-          </a:prstGeom>
-          <a:noFill/>
-          <a:ln/>
-        </p:spPr>
-        <p:txBody>
-          <a:bodyPr wrap="square" rtlCol="0" anchor="ctr"/>
-          <a:lstStyle/>
-          <a:p>
-            <a:pPr algn="ctr" indent="0" marL="0">
+            <a:off x="6278880" y="6562208"/>
+            <a:ext cx="402336" cy="179495"/>
+          </a:xfrm>
+          <a:prstGeom prst="rect">
+            <a:avLst/>
+          </a:prstGeom>
+          <a:noFill/>
+          <a:ln/>
+        </p:spPr>
+        <p:txBody>
+          <a:bodyPr wrap="square" rtlCol="0" anchor="ctr"/>
+          <a:lstStyle/>
+          <a:p>
+            <a:pPr marL="0" indent="0" algn="ctr">
               <a:buNone/>
             </a:pPr>
             <a:r>
@@ -7311,20 +7416,20 @@
         </p:nvSpPr>
         <p:spPr>
           <a:xfrm>
-            <a:off x="6784848" y="6382512"/>
-            <a:ext cx="4498848" cy="1234440"/>
-          </a:xfrm>
-          <a:prstGeom prst="rect">
-            <a:avLst/>
-          </a:prstGeom>
-          <a:noFill/>
-          <a:ln/>
-        </p:spPr>
-        <p:txBody>
-          <a:bodyPr wrap="square" rtlCol="0" anchor="ctr"/>
-          <a:lstStyle/>
-          <a:p>
-            <a:pPr indent="0" marL="0">
+            <a:off x="6800088" y="6146156"/>
+            <a:ext cx="4498848" cy="550724"/>
+          </a:xfrm>
+          <a:prstGeom prst="rect">
+            <a:avLst/>
+          </a:prstGeom>
+          <a:noFill/>
+          <a:ln/>
+        </p:spPr>
+        <p:txBody>
+          <a:bodyPr wrap="square" rtlCol="0" anchor="ctr"/>
+          <a:lstStyle/>
+          <a:p>
+            <a:pPr marL="0" indent="0">
               <a:lnSpc>
                 <a:spcPct val="105000"/>
               </a:lnSpc>
@@ -7361,6 +7466,7 @@
         <a:solidFill>
           <a:srgbClr val="FFFFFF"/>
         </a:solidFill>
+        <a:effectLst/>
       </p:bgPr>
     </p:bg>
     <p:spTree>
@@ -7398,11 +7504,11 @@
           <a:bodyPr wrap="square" rtlCol="0" anchor="ctr"/>
           <a:lstStyle/>
           <a:p>
-            <a:pPr indent="0" marL="0">
-              <a:buNone/>
-            </a:pPr>
-            <a:r>
-              <a:rPr lang="en-US" sz="1250" b="1" spc="200" kern="0" dirty="0">
+            <a:pPr marL="0" indent="0">
+              <a:buNone/>
+            </a:pPr>
+            <a:r>
+              <a:rPr lang="en-US" sz="1250" b="1" kern="0" spc="200" dirty="0">
                 <a:solidFill>
                   <a:srgbClr val="1E2761"/>
                 </a:solidFill>
@@ -7437,7 +7543,7 @@
           <a:bodyPr wrap="square" rtlCol="0" anchor="ctr"/>
           <a:lstStyle/>
           <a:p>
-            <a:pPr indent="0" marL="0">
+            <a:pPr marL="0" indent="0">
               <a:buNone/>
             </a:pPr>
             <a:r>
@@ -7476,7 +7582,7 @@
           <a:bodyPr wrap="square" rtlCol="0" anchor="ctr"/>
           <a:lstStyle/>
           <a:p>
-            <a:pPr indent="0" marL="0">
+            <a:pPr marL="0" indent="0">
               <a:buNone/>
             </a:pPr>
             <a:r>
@@ -7515,7 +7621,7 @@
           <a:bodyPr wrap="square" rtlCol="0" anchor="ctr"/>
           <a:lstStyle/>
           <a:p>
-            <a:pPr algn="r" indent="0" marL="0">
+            <a:pPr marL="0" indent="0" algn="r">
               <a:buNone/>
             </a:pPr>
             <a:r>
@@ -7554,6 +7660,13 @@
           </a:solidFill>
           <a:ln/>
         </p:spPr>
+        <p:txBody>
+          <a:bodyPr/>
+          <a:lstStyle/>
+          <a:p>
+            <a:endParaRPr lang="en-US"/>
+          </a:p>
+        </p:txBody>
       </p:sp>
       <p:sp>
         <p:nvSpPr>
@@ -7576,7 +7689,7 @@
           <a:bodyPr wrap="square" rtlCol="0" anchor="ctr"/>
           <a:lstStyle/>
           <a:p>
-            <a:pPr algn="ctr" indent="0" marL="0">
+            <a:pPr marL="0" indent="0" algn="ctr">
               <a:buNone/>
             </a:pPr>
             <a:r>
@@ -7615,7 +7728,7 @@
           <a:bodyPr wrap="square" rtlCol="0" anchor="ctr"/>
           <a:lstStyle/>
           <a:p>
-            <a:pPr algn="ctr" indent="0" marL="0">
+            <a:pPr marL="0" indent="0" algn="ctr">
               <a:lnSpc>
                 <a:spcPct val="100000"/>
               </a:lnSpc>
@@ -7635,7 +7748,7 @@
             <a:endParaRPr lang="en-US" sz="950" dirty="0"/>
           </a:p>
           <a:p>
-            <a:pPr algn="ctr" indent="0" marL="0">
+            <a:pPr marL="0" indent="0" algn="ctr">
               <a:lnSpc>
                 <a:spcPct val="100000"/>
               </a:lnSpc>
@@ -7677,6 +7790,13 @@
           </a:solidFill>
           <a:ln/>
         </p:spPr>
+        <p:txBody>
+          <a:bodyPr/>
+          <a:lstStyle/>
+          <a:p>
+            <a:endParaRPr lang="en-US"/>
+          </a:p>
+        </p:txBody>
       </p:sp>
       <p:sp>
         <p:nvSpPr>
@@ -7699,7 +7819,7 @@
           <a:bodyPr wrap="square" rtlCol="0" anchor="ctr"/>
           <a:lstStyle/>
           <a:p>
-            <a:pPr algn="ctr" indent="0" marL="0">
+            <a:pPr marL="0" indent="0" algn="ctr">
               <a:buNone/>
             </a:pPr>
             <a:r>
@@ -7738,7 +7858,7 @@
           <a:bodyPr wrap="square" rtlCol="0" anchor="ctr"/>
           <a:lstStyle/>
           <a:p>
-            <a:pPr algn="ctr" indent="0" marL="0">
+            <a:pPr marL="0" indent="0" algn="ctr">
               <a:lnSpc>
                 <a:spcPct val="100000"/>
               </a:lnSpc>
@@ -7758,7 +7878,7 @@
             <a:endParaRPr lang="en-US" sz="950" dirty="0"/>
           </a:p>
           <a:p>
-            <a:pPr algn="ctr" indent="0" marL="0">
+            <a:pPr marL="0" indent="0" algn="ctr">
               <a:lnSpc>
                 <a:spcPct val="100000"/>
               </a:lnSpc>
@@ -7800,6 +7920,13 @@
           </a:solidFill>
           <a:ln/>
         </p:spPr>
+        <p:txBody>
+          <a:bodyPr/>
+          <a:lstStyle/>
+          <a:p>
+            <a:endParaRPr lang="en-US"/>
+          </a:p>
+        </p:txBody>
       </p:sp>
       <p:sp>
         <p:nvSpPr>
@@ -7822,7 +7949,7 @@
           <a:bodyPr wrap="square" rtlCol="0" anchor="ctr"/>
           <a:lstStyle/>
           <a:p>
-            <a:pPr algn="ctr" indent="0" marL="0">
+            <a:pPr marL="0" indent="0" algn="ctr">
               <a:buNone/>
             </a:pPr>
             <a:r>
@@ -7861,7 +7988,7 @@
           <a:bodyPr wrap="square" rtlCol="0" anchor="ctr"/>
           <a:lstStyle/>
           <a:p>
-            <a:pPr algn="ctr" indent="0" marL="0">
+            <a:pPr marL="0" indent="0" algn="ctr">
               <a:lnSpc>
                 <a:spcPct val="100000"/>
               </a:lnSpc>
@@ -7881,7 +8008,7 @@
             <a:endParaRPr lang="en-US" sz="950" dirty="0"/>
           </a:p>
           <a:p>
-            <a:pPr algn="ctr" indent="0" marL="0">
+            <a:pPr marL="0" indent="0" algn="ctr">
               <a:lnSpc>
                 <a:spcPct val="100000"/>
               </a:lnSpc>
@@ -7923,7 +8050,7 @@
           <a:bodyPr wrap="square" rtlCol="0" anchor="ctr"/>
           <a:lstStyle/>
           <a:p>
-            <a:pPr indent="0" marL="0">
+            <a:pPr marL="0" indent="0">
               <a:buNone/>
             </a:pPr>
             <a:r>
@@ -7943,7 +8070,7 @@
       </p:sp>
       <p:graphicFrame>
         <p:nvGraphicFramePr>
-          <p:cNvPr id="6" name="Table 0"/>
+          <p:cNvPr id="16" name="Table 0"/>
           <p:cNvGraphicFramePr>
             <a:graphicFrameLocks noGrp="1"/>
           </p:cNvGraphicFramePr>
@@ -7964,11 +8091,41 @@
             <a:tbl>
               <a:tblPr/>
               <a:tblGrid>
-                <a:gridCol w="822960"/>
-                <a:gridCol w="2286000"/>
-                <a:gridCol w="5330952"/>
-                <a:gridCol w="914400"/>
-                <a:gridCol w="1737360"/>
+                <a:gridCol w="822960">
+                  <a:extLst>
+                    <a:ext uri="{9D8B030D-6E8A-4147-A177-3AD203B41FA5}">
+                      <a16:colId xmlns:a16="http://schemas.microsoft.com/office/drawing/2014/main" val="20000"/>
+                    </a:ext>
+                  </a:extLst>
+                </a:gridCol>
+                <a:gridCol w="2286000">
+                  <a:extLst>
+                    <a:ext uri="{9D8B030D-6E8A-4147-A177-3AD203B41FA5}">
+                      <a16:colId xmlns:a16="http://schemas.microsoft.com/office/drawing/2014/main" val="20001"/>
+                    </a:ext>
+                  </a:extLst>
+                </a:gridCol>
+                <a:gridCol w="5330952">
+                  <a:extLst>
+                    <a:ext uri="{9D8B030D-6E8A-4147-A177-3AD203B41FA5}">
+                      <a16:colId xmlns:a16="http://schemas.microsoft.com/office/drawing/2014/main" val="20002"/>
+                    </a:ext>
+                  </a:extLst>
+                </a:gridCol>
+                <a:gridCol w="914400">
+                  <a:extLst>
+                    <a:ext uri="{9D8B030D-6E8A-4147-A177-3AD203B41FA5}">
+                      <a16:colId xmlns:a16="http://schemas.microsoft.com/office/drawing/2014/main" val="20003"/>
+                    </a:ext>
+                  </a:extLst>
+                </a:gridCol>
+                <a:gridCol w="1737360">
+                  <a:extLst>
+                    <a:ext uri="{9D8B030D-6E8A-4147-A177-3AD203B41FA5}">
+                      <a16:colId xmlns:a16="http://schemas.microsoft.com/office/drawing/2014/main" val="20004"/>
+                    </a:ext>
+                  </a:extLst>
+                </a:gridCol>
               </a:tblGrid>
               <a:tr h="411480">
                 <a:tc>
@@ -7976,7 +8133,7 @@
                     <a:bodyPr/>
                     <a:lstStyle/>
                     <a:p>
-                      <a:pPr algn="l" indent="0" marL="0">
+                      <a:pPr marL="0" indent="0" algn="l">
                         <a:buNone/>
                       </a:pPr>
                       <a:r>
@@ -7997,7 +8154,7 @@
                       </a:endParaRPr>
                     </a:p>
                   </a:txBody>
-                  <a:tcPr marL="91440" marR="91440" marT="45720" marB="45720">
+                  <a:tcPr>
                     <a:lnL w="9525" cap="flat" cmpd="sng" algn="ctr">
                       <a:solidFill>
                         <a:srgbClr val="E2E6F0"/>
@@ -8044,7 +8201,7 @@
                     <a:bodyPr/>
                     <a:lstStyle/>
                     <a:p>
-                      <a:pPr algn="l" indent="0" marL="0">
+                      <a:pPr marL="0" indent="0" algn="l">
                         <a:buNone/>
                       </a:pPr>
                       <a:r>
@@ -8065,7 +8222,7 @@
                       </a:endParaRPr>
                     </a:p>
                   </a:txBody>
-                  <a:tcPr marL="91440" marR="91440" marT="45720" marB="45720">
+                  <a:tcPr>
                     <a:lnL w="9525" cap="flat" cmpd="sng" algn="ctr">
                       <a:solidFill>
                         <a:srgbClr val="E2E6F0"/>
@@ -8112,7 +8269,7 @@
                     <a:bodyPr/>
                     <a:lstStyle/>
                     <a:p>
-                      <a:pPr algn="l" indent="0" marL="0">
+                      <a:pPr marL="0" indent="0" algn="l">
                         <a:buNone/>
                       </a:pPr>
                       <a:r>
@@ -8133,7 +8290,7 @@
                       </a:endParaRPr>
                     </a:p>
                   </a:txBody>
-                  <a:tcPr marL="91440" marR="91440" marT="45720" marB="45720">
+                  <a:tcPr>
                     <a:lnL w="9525" cap="flat" cmpd="sng" algn="ctr">
                       <a:solidFill>
                         <a:srgbClr val="E2E6F0"/>
@@ -8180,7 +8337,7 @@
                     <a:bodyPr/>
                     <a:lstStyle/>
                     <a:p>
-                      <a:pPr algn="ctr" indent="0" marL="0">
+                      <a:pPr marL="0" indent="0" algn="ctr">
                         <a:buNone/>
                       </a:pPr>
                       <a:r>
@@ -8201,7 +8358,7 @@
                       </a:endParaRPr>
                     </a:p>
                   </a:txBody>
-                  <a:tcPr marL="91440" marR="91440" marT="45720" marB="45720">
+                  <a:tcPr>
                     <a:lnL w="9525" cap="flat" cmpd="sng" algn="ctr">
                       <a:solidFill>
                         <a:srgbClr val="E2E6F0"/>
@@ -8248,7 +8405,7 @@
                     <a:bodyPr/>
                     <a:lstStyle/>
                     <a:p>
-                      <a:pPr algn="ctr" indent="0" marL="0">
+                      <a:pPr marL="0" indent="0" algn="ctr">
                         <a:buNone/>
                       </a:pPr>
                       <a:r>
@@ -8269,7 +8426,7 @@
                       </a:endParaRPr>
                     </a:p>
                   </a:txBody>
-                  <a:tcPr marL="91440" marR="91440" marT="45720" marB="45720">
+                  <a:tcPr>
                     <a:lnL w="9525" cap="flat" cmpd="sng" algn="ctr">
                       <a:solidFill>
                         <a:srgbClr val="E2E6F0"/>
@@ -8311,6 +8468,11 @@
                     </a:solidFill>
                   </a:tcPr>
                 </a:tc>
+                <a:extLst>
+                  <a:ext uri="{0D108BD9-81ED-4DB2-BD59-A6C34878D82A}">
+                    <a16:rowId xmlns:a16="http://schemas.microsoft.com/office/drawing/2014/main" val="10000"/>
+                  </a:ext>
+                </a:extLst>
               </a:tr>
               <a:tr h="411480">
                 <a:tc>
@@ -8318,7 +8480,7 @@
                     <a:bodyPr/>
                     <a:lstStyle/>
                     <a:p>
-                      <a:pPr indent="0" marL="0">
+                      <a:pPr marL="0" indent="0">
                         <a:buNone/>
                       </a:pPr>
                       <a:r>
@@ -8339,7 +8501,7 @@
                       </a:endParaRPr>
                     </a:p>
                   </a:txBody>
-                  <a:tcPr marL="91440" marR="91440" marT="45720" marB="45720">
+                  <a:tcPr>
                     <a:lnL w="9525" cap="flat" cmpd="sng" algn="ctr">
                       <a:solidFill>
                         <a:srgbClr val="E2E6F0"/>
@@ -8383,7 +8545,7 @@
                     <a:bodyPr/>
                     <a:lstStyle/>
                     <a:p>
-                      <a:pPr indent="0" marL="0">
+                      <a:pPr marL="0" indent="0">
                         <a:buNone/>
                       </a:pPr>
                       <a:r>
@@ -8404,7 +8566,7 @@
                       </a:endParaRPr>
                     </a:p>
                   </a:txBody>
-                  <a:tcPr marL="91440" marR="91440" marT="45720" marB="45720">
+                  <a:tcPr>
                     <a:lnL w="9525" cap="flat" cmpd="sng" algn="ctr">
                       <a:solidFill>
                         <a:srgbClr val="E2E6F0"/>
@@ -8448,7 +8610,7 @@
                     <a:bodyPr/>
                     <a:lstStyle/>
                     <a:p>
-                      <a:pPr indent="0" marL="0">
+                      <a:pPr marL="0" indent="0">
                         <a:buNone/>
                       </a:pPr>
                       <a:r>
@@ -8469,7 +8631,7 @@
                       </a:endParaRPr>
                     </a:p>
                   </a:txBody>
-                  <a:tcPr marL="91440" marR="91440" marT="45720" marB="45720">
+                  <a:tcPr>
                     <a:lnL w="9525" cap="flat" cmpd="sng" algn="ctr">
                       <a:solidFill>
                         <a:srgbClr val="E2E6F0"/>
@@ -8513,7 +8675,7 @@
                     <a:bodyPr/>
                     <a:lstStyle/>
                     <a:p>
-                      <a:pPr algn="ctr" indent="0" marL="0">
+                      <a:pPr marL="0" indent="0" algn="ctr">
                         <a:buNone/>
                       </a:pPr>
                       <a:r>
@@ -8534,7 +8696,7 @@
                       </a:endParaRPr>
                     </a:p>
                   </a:txBody>
-                  <a:tcPr marL="91440" marR="91440" marT="45720" marB="45720">
+                  <a:tcPr>
                     <a:lnL w="9525" cap="flat" cmpd="sng" algn="ctr">
                       <a:solidFill>
                         <a:srgbClr val="E2E6F0"/>
@@ -8578,7 +8740,7 @@
                     <a:bodyPr/>
                     <a:lstStyle/>
                     <a:p>
-                      <a:pPr algn="ctr" indent="0" marL="0">
+                      <a:pPr marL="0" indent="0" algn="ctr">
                         <a:buNone/>
                       </a:pPr>
                       <a:r>
@@ -8599,7 +8761,7 @@
                       </a:endParaRPr>
                     </a:p>
                   </a:txBody>
-                  <a:tcPr marL="91440" marR="91440" marT="45720" marB="45720">
+                  <a:tcPr>
                     <a:lnL w="9525" cap="flat" cmpd="sng" algn="ctr">
                       <a:solidFill>
                         <a:srgbClr val="E2E6F0"/>
@@ -8641,6 +8803,11 @@
                     </a:solidFill>
                   </a:tcPr>
                 </a:tc>
+                <a:extLst>
+                  <a:ext uri="{0D108BD9-81ED-4DB2-BD59-A6C34878D82A}">
+                    <a16:rowId xmlns:a16="http://schemas.microsoft.com/office/drawing/2014/main" val="10001"/>
+                  </a:ext>
+                </a:extLst>
               </a:tr>
               <a:tr h="411480">
                 <a:tc>
@@ -8648,7 +8815,7 @@
                     <a:bodyPr/>
                     <a:lstStyle/>
                     <a:p>
-                      <a:pPr indent="0" marL="0">
+                      <a:pPr marL="0" indent="0">
                         <a:buNone/>
                       </a:pPr>
                       <a:r>
@@ -8669,7 +8836,7 @@
                       </a:endParaRPr>
                     </a:p>
                   </a:txBody>
-                  <a:tcPr marL="91440" marR="91440" marT="45720" marB="45720">
+                  <a:tcPr>
                     <a:lnL w="9525" cap="flat" cmpd="sng" algn="ctr">
                       <a:solidFill>
                         <a:srgbClr val="E2E6F0"/>
@@ -8713,7 +8880,7 @@
                     <a:bodyPr/>
                     <a:lstStyle/>
                     <a:p>
-                      <a:pPr indent="0" marL="0">
+                      <a:pPr marL="0" indent="0">
                         <a:buNone/>
                       </a:pPr>
                       <a:r>
@@ -8734,7 +8901,7 @@
                       </a:endParaRPr>
                     </a:p>
                   </a:txBody>
-                  <a:tcPr marL="91440" marR="91440" marT="45720" marB="45720">
+                  <a:tcPr>
                     <a:lnL w="9525" cap="flat" cmpd="sng" algn="ctr">
                       <a:solidFill>
                         <a:srgbClr val="E2E6F0"/>
@@ -8778,7 +8945,7 @@
                     <a:bodyPr/>
                     <a:lstStyle/>
                     <a:p>
-                      <a:pPr indent="0" marL="0">
+                      <a:pPr marL="0" indent="0">
                         <a:buNone/>
                       </a:pPr>
                       <a:r>
@@ -8799,7 +8966,7 @@
                       </a:endParaRPr>
                     </a:p>
                   </a:txBody>
-                  <a:tcPr marL="91440" marR="91440" marT="45720" marB="45720">
+                  <a:tcPr>
                     <a:lnL w="9525" cap="flat" cmpd="sng" algn="ctr">
                       <a:solidFill>
                         <a:srgbClr val="E2E6F0"/>
@@ -8843,7 +9010,7 @@
                     <a:bodyPr/>
                     <a:lstStyle/>
                     <a:p>
-                      <a:pPr algn="ctr" indent="0" marL="0">
+                      <a:pPr marL="0" indent="0" algn="ctr">
                         <a:buNone/>
                       </a:pPr>
                       <a:r>
@@ -8864,7 +9031,7 @@
                       </a:endParaRPr>
                     </a:p>
                   </a:txBody>
-                  <a:tcPr marL="91440" marR="91440" marT="45720" marB="45720">
+                  <a:tcPr>
                     <a:lnL w="9525" cap="flat" cmpd="sng" algn="ctr">
                       <a:solidFill>
                         <a:srgbClr val="E2E6F0"/>
@@ -8908,7 +9075,7 @@
                     <a:bodyPr/>
                     <a:lstStyle/>
                     <a:p>
-                      <a:pPr algn="ctr" indent="0" marL="0">
+                      <a:pPr marL="0" indent="0" algn="ctr">
                         <a:buNone/>
                       </a:pPr>
                       <a:r>
@@ -8929,7 +9096,7 @@
                       </a:endParaRPr>
                     </a:p>
                   </a:txBody>
-                  <a:tcPr marL="91440" marR="91440" marT="45720" marB="45720">
+                  <a:tcPr>
                     <a:lnL w="9525" cap="flat" cmpd="sng" algn="ctr">
                       <a:solidFill>
                         <a:srgbClr val="E2E6F0"/>
@@ -8971,6 +9138,11 @@
                     </a:solidFill>
                   </a:tcPr>
                 </a:tc>
+                <a:extLst>
+                  <a:ext uri="{0D108BD9-81ED-4DB2-BD59-A6C34878D82A}">
+                    <a16:rowId xmlns:a16="http://schemas.microsoft.com/office/drawing/2014/main" val="10002"/>
+                  </a:ext>
+                </a:extLst>
               </a:tr>
               <a:tr h="411480">
                 <a:tc>
@@ -8978,7 +9150,7 @@
                     <a:bodyPr/>
                     <a:lstStyle/>
                     <a:p>
-                      <a:pPr indent="0" marL="0">
+                      <a:pPr marL="0" indent="0">
                         <a:buNone/>
                       </a:pPr>
                       <a:r>
@@ -8999,7 +9171,7 @@
                       </a:endParaRPr>
                     </a:p>
                   </a:txBody>
-                  <a:tcPr marL="91440" marR="91440" marT="45720" marB="45720">
+                  <a:tcPr>
                     <a:lnL w="9525" cap="flat" cmpd="sng" algn="ctr">
                       <a:solidFill>
                         <a:srgbClr val="E2E6F0"/>
@@ -9043,7 +9215,7 @@
                     <a:bodyPr/>
                     <a:lstStyle/>
                     <a:p>
-                      <a:pPr indent="0" marL="0">
+                      <a:pPr marL="0" indent="0">
                         <a:buNone/>
                       </a:pPr>
                       <a:r>
@@ -9064,7 +9236,7 @@
                       </a:endParaRPr>
                     </a:p>
                   </a:txBody>
-                  <a:tcPr marL="91440" marR="91440" marT="45720" marB="45720">
+                  <a:tcPr>
                     <a:lnL w="9525" cap="flat" cmpd="sng" algn="ctr">
                       <a:solidFill>
                         <a:srgbClr val="E2E6F0"/>
@@ -9108,7 +9280,7 @@
                     <a:bodyPr/>
                     <a:lstStyle/>
                     <a:p>
-                      <a:pPr indent="0" marL="0">
+                      <a:pPr marL="0" indent="0">
                         <a:buNone/>
                       </a:pPr>
                       <a:r>
@@ -9129,7 +9301,7 @@
                       </a:endParaRPr>
                     </a:p>
                   </a:txBody>
-                  <a:tcPr marL="91440" marR="91440" marT="45720" marB="45720">
+                  <a:tcPr>
                     <a:lnL w="9525" cap="flat" cmpd="sng" algn="ctr">
                       <a:solidFill>
                         <a:srgbClr val="E2E6F0"/>
@@ -9173,7 +9345,7 @@
                     <a:bodyPr/>
                     <a:lstStyle/>
                     <a:p>
-                      <a:pPr algn="ctr" indent="0" marL="0">
+                      <a:pPr marL="0" indent="0" algn="ctr">
                         <a:buNone/>
                       </a:pPr>
                       <a:r>
@@ -9194,7 +9366,7 @@
                       </a:endParaRPr>
                     </a:p>
                   </a:txBody>
-                  <a:tcPr marL="91440" marR="91440" marT="45720" marB="45720">
+                  <a:tcPr>
                     <a:lnL w="9525" cap="flat" cmpd="sng" algn="ctr">
                       <a:solidFill>
                         <a:srgbClr val="E2E6F0"/>
@@ -9238,7 +9410,7 @@
                     <a:bodyPr/>
                     <a:lstStyle/>
                     <a:p>
-                      <a:pPr algn="ctr" indent="0" marL="0">
+                      <a:pPr marL="0" indent="0" algn="ctr">
                         <a:buNone/>
                       </a:pPr>
                       <a:r>
@@ -9259,7 +9431,7 @@
                       </a:endParaRPr>
                     </a:p>
                   </a:txBody>
-                  <a:tcPr marL="91440" marR="91440" marT="45720" marB="45720">
+                  <a:tcPr>
                     <a:lnL w="9525" cap="flat" cmpd="sng" algn="ctr">
                       <a:solidFill>
                         <a:srgbClr val="E2E6F0"/>
@@ -9301,6 +9473,11 @@
                     </a:solidFill>
                   </a:tcPr>
                 </a:tc>
+                <a:extLst>
+                  <a:ext uri="{0D108BD9-81ED-4DB2-BD59-A6C34878D82A}">
+                    <a16:rowId xmlns:a16="http://schemas.microsoft.com/office/drawing/2014/main" val="10003"/>
+                  </a:ext>
+                </a:extLst>
               </a:tr>
               <a:tr h="411480">
                 <a:tc>
@@ -9308,7 +9485,7 @@
                     <a:bodyPr/>
                     <a:lstStyle/>
                     <a:p>
-                      <a:pPr indent="0" marL="0">
+                      <a:pPr marL="0" indent="0">
                         <a:buNone/>
                       </a:pPr>
                       <a:r>
@@ -9329,7 +9506,7 @@
                       </a:endParaRPr>
                     </a:p>
                   </a:txBody>
-                  <a:tcPr marL="91440" marR="91440" marT="45720" marB="45720">
+                  <a:tcPr>
                     <a:lnL w="9525" cap="flat" cmpd="sng" algn="ctr">
                       <a:solidFill>
                         <a:srgbClr val="E2E6F0"/>
@@ -9373,7 +9550,7 @@
                     <a:bodyPr/>
                     <a:lstStyle/>
                     <a:p>
-                      <a:pPr indent="0" marL="0">
+                      <a:pPr marL="0" indent="0">
                         <a:buNone/>
                       </a:pPr>
                       <a:r>
@@ -9394,7 +9571,7 @@
                       </a:endParaRPr>
                     </a:p>
                   </a:txBody>
-                  <a:tcPr marL="91440" marR="91440" marT="45720" marB="45720">
+                  <a:tcPr>
                     <a:lnL w="9525" cap="flat" cmpd="sng" algn="ctr">
                       <a:solidFill>
                         <a:srgbClr val="E2E6F0"/>
@@ -9438,7 +9615,7 @@
                     <a:bodyPr/>
                     <a:lstStyle/>
                     <a:p>
-                      <a:pPr indent="0" marL="0">
+                      <a:pPr marL="0" indent="0">
                         <a:buNone/>
                       </a:pPr>
                       <a:r>
@@ -9459,7 +9636,7 @@
                       </a:endParaRPr>
                     </a:p>
                   </a:txBody>
-                  <a:tcPr marL="91440" marR="91440" marT="45720" marB="45720">
+                  <a:tcPr>
                     <a:lnL w="9525" cap="flat" cmpd="sng" algn="ctr">
                       <a:solidFill>
                         <a:srgbClr val="E2E6F0"/>
@@ -9503,7 +9680,7 @@
                     <a:bodyPr/>
                     <a:lstStyle/>
                     <a:p>
-                      <a:pPr algn="ctr" indent="0" marL="0">
+                      <a:pPr marL="0" indent="0" algn="ctr">
                         <a:buNone/>
                       </a:pPr>
                       <a:r>
@@ -9524,7 +9701,7 @@
                       </a:endParaRPr>
                     </a:p>
                   </a:txBody>
-                  <a:tcPr marL="91440" marR="91440" marT="45720" marB="45720">
+                  <a:tcPr>
                     <a:lnL w="9525" cap="flat" cmpd="sng" algn="ctr">
                       <a:solidFill>
                         <a:srgbClr val="E2E6F0"/>
@@ -9568,7 +9745,7 @@
                     <a:bodyPr/>
                     <a:lstStyle/>
                     <a:p>
-                      <a:pPr algn="ctr" indent="0" marL="0">
+                      <a:pPr marL="0" indent="0" algn="ctr">
                         <a:buNone/>
                       </a:pPr>
                       <a:r>
@@ -9589,7 +9766,7 @@
                       </a:endParaRPr>
                     </a:p>
                   </a:txBody>
-                  <a:tcPr marL="91440" marR="91440" marT="45720" marB="45720">
+                  <a:tcPr>
                     <a:lnL w="9525" cap="flat" cmpd="sng" algn="ctr">
                       <a:solidFill>
                         <a:srgbClr val="E2E6F0"/>
@@ -9631,6 +9808,11 @@
                     </a:solidFill>
                   </a:tcPr>
                 </a:tc>
+                <a:extLst>
+                  <a:ext uri="{0D108BD9-81ED-4DB2-BD59-A6C34878D82A}">
+                    <a16:rowId xmlns:a16="http://schemas.microsoft.com/office/drawing/2014/main" val="10004"/>
+                  </a:ext>
+                </a:extLst>
               </a:tr>
               <a:tr h="411480">
                 <a:tc>
@@ -9638,7 +9820,7 @@
                     <a:bodyPr/>
                     <a:lstStyle/>
                     <a:p>
-                      <a:pPr indent="0" marL="0">
+                      <a:pPr marL="0" indent="0">
                         <a:buNone/>
                       </a:pPr>
                       <a:r>
@@ -9659,7 +9841,7 @@
                       </a:endParaRPr>
                     </a:p>
                   </a:txBody>
-                  <a:tcPr marL="91440" marR="91440" marT="45720" marB="45720">
+                  <a:tcPr>
                     <a:lnL w="9525" cap="flat" cmpd="sng" algn="ctr">
                       <a:solidFill>
                         <a:srgbClr val="E2E6F0"/>
@@ -9703,7 +9885,7 @@
                     <a:bodyPr/>
                     <a:lstStyle/>
                     <a:p>
-                      <a:pPr indent="0" marL="0">
+                      <a:pPr marL="0" indent="0">
                         <a:buNone/>
                       </a:pPr>
                       <a:r>
@@ -9724,7 +9906,7 @@
                       </a:endParaRPr>
                     </a:p>
                   </a:txBody>
-                  <a:tcPr marL="91440" marR="91440" marT="45720" marB="45720">
+                  <a:tcPr>
                     <a:lnL w="9525" cap="flat" cmpd="sng" algn="ctr">
                       <a:solidFill>
                         <a:srgbClr val="E2E6F0"/>
@@ -9768,7 +9950,7 @@
                     <a:bodyPr/>
                     <a:lstStyle/>
                     <a:p>
-                      <a:pPr indent="0" marL="0">
+                      <a:pPr marL="0" indent="0">
                         <a:buNone/>
                       </a:pPr>
                       <a:r>
@@ -9789,7 +9971,7 @@
                       </a:endParaRPr>
                     </a:p>
                   </a:txBody>
-                  <a:tcPr marL="91440" marR="91440" marT="45720" marB="45720">
+                  <a:tcPr>
                     <a:lnL w="9525" cap="flat" cmpd="sng" algn="ctr">
                       <a:solidFill>
                         <a:srgbClr val="E2E6F0"/>
@@ -9833,7 +10015,7 @@
                     <a:bodyPr/>
                     <a:lstStyle/>
                     <a:p>
-                      <a:pPr algn="ctr" indent="0" marL="0">
+                      <a:pPr marL="0" indent="0" algn="ctr">
                         <a:buNone/>
                       </a:pPr>
                       <a:r>
@@ -9854,7 +10036,7 @@
                       </a:endParaRPr>
                     </a:p>
                   </a:txBody>
-                  <a:tcPr marL="91440" marR="91440" marT="45720" marB="45720">
+                  <a:tcPr>
                     <a:lnL w="9525" cap="flat" cmpd="sng" algn="ctr">
                       <a:solidFill>
                         <a:srgbClr val="E2E6F0"/>
@@ -9898,7 +10080,7 @@
                     <a:bodyPr/>
                     <a:lstStyle/>
                     <a:p>
-                      <a:pPr algn="ctr" indent="0" marL="0">
+                      <a:pPr marL="0" indent="0" algn="ctr">
                         <a:buNone/>
                       </a:pPr>
                       <a:r>
@@ -9919,7 +10101,7 @@
                       </a:endParaRPr>
                     </a:p>
                   </a:txBody>
-                  <a:tcPr marL="91440" marR="91440" marT="45720" marB="45720">
+                  <a:tcPr>
                     <a:lnL w="9525" cap="flat" cmpd="sng" algn="ctr">
                       <a:solidFill>
                         <a:srgbClr val="E2E6F0"/>
@@ -9961,6 +10143,11 @@
                     </a:solidFill>
                   </a:tcPr>
                 </a:tc>
+                <a:extLst>
+                  <a:ext uri="{0D108BD9-81ED-4DB2-BD59-A6C34878D82A}">
+                    <a16:rowId xmlns:a16="http://schemas.microsoft.com/office/drawing/2014/main" val="10005"/>
+                  </a:ext>
+                </a:extLst>
               </a:tr>
               <a:tr h="411480">
                 <a:tc>
@@ -9968,7 +10155,7 @@
                     <a:bodyPr/>
                     <a:lstStyle/>
                     <a:p>
-                      <a:pPr indent="0" marL="0">
+                      <a:pPr marL="0" indent="0">
                         <a:buNone/>
                       </a:pPr>
                       <a:r>
@@ -9989,7 +10176,7 @@
                       </a:endParaRPr>
                     </a:p>
                   </a:txBody>
-                  <a:tcPr marL="91440" marR="91440" marT="45720" marB="45720">
+                  <a:tcPr>
                     <a:lnL w="9525" cap="flat" cmpd="sng" algn="ctr">
                       <a:solidFill>
                         <a:srgbClr val="E2E6F0"/>
@@ -10033,7 +10220,7 @@
                     <a:bodyPr/>
                     <a:lstStyle/>
                     <a:p>
-                      <a:pPr indent="0" marL="0">
+                      <a:pPr marL="0" indent="0">
                         <a:buNone/>
                       </a:pPr>
                       <a:r>
@@ -10054,7 +10241,7 @@
                       </a:endParaRPr>
                     </a:p>
                   </a:txBody>
-                  <a:tcPr marL="91440" marR="91440" marT="45720" marB="45720">
+                  <a:tcPr>
                     <a:lnL w="9525" cap="flat" cmpd="sng" algn="ctr">
                       <a:solidFill>
                         <a:srgbClr val="E2E6F0"/>
@@ -10098,7 +10285,7 @@
                     <a:bodyPr/>
                     <a:lstStyle/>
                     <a:p>
-                      <a:pPr indent="0" marL="0">
+                      <a:pPr marL="0" indent="0">
                         <a:buNone/>
                       </a:pPr>
                       <a:r>
@@ -10119,7 +10306,7 @@
                       </a:endParaRPr>
                     </a:p>
                   </a:txBody>
-                  <a:tcPr marL="91440" marR="91440" marT="45720" marB="45720">
+                  <a:tcPr>
                     <a:lnL w="9525" cap="flat" cmpd="sng" algn="ctr">
                       <a:solidFill>
                         <a:srgbClr val="E2E6F0"/>
@@ -10163,7 +10350,7 @@
                     <a:bodyPr/>
                     <a:lstStyle/>
                     <a:p>
-                      <a:pPr algn="ctr" indent="0" marL="0">
+                      <a:pPr marL="0" indent="0" algn="ctr">
                         <a:buNone/>
                       </a:pPr>
                       <a:r>
@@ -10184,7 +10371,7 @@
                       </a:endParaRPr>
                     </a:p>
                   </a:txBody>
-                  <a:tcPr marL="91440" marR="91440" marT="45720" marB="45720">
+                  <a:tcPr>
                     <a:lnL w="9525" cap="flat" cmpd="sng" algn="ctr">
                       <a:solidFill>
                         <a:srgbClr val="E2E6F0"/>
@@ -10228,7 +10415,7 @@
                     <a:bodyPr/>
                     <a:lstStyle/>
                     <a:p>
-                      <a:pPr algn="ctr" indent="0" marL="0">
+                      <a:pPr marL="0" indent="0" algn="ctr">
                         <a:buNone/>
                       </a:pPr>
                       <a:r>
@@ -10249,7 +10436,7 @@
                       </a:endParaRPr>
                     </a:p>
                   </a:txBody>
-                  <a:tcPr marL="91440" marR="91440" marT="45720" marB="45720">
+                  <a:tcPr>
                     <a:lnL w="9525" cap="flat" cmpd="sng" algn="ctr">
                       <a:solidFill>
                         <a:srgbClr val="E2E6F0"/>
@@ -10291,6 +10478,11 @@
                     </a:solidFill>
                   </a:tcPr>
                 </a:tc>
+                <a:extLst>
+                  <a:ext uri="{0D108BD9-81ED-4DB2-BD59-A6C34878D82A}">
+                    <a16:rowId xmlns:a16="http://schemas.microsoft.com/office/drawing/2014/main" val="10006"/>
+                  </a:ext>
+                </a:extLst>
               </a:tr>
             </a:tbl>
           </a:graphicData>
@@ -10312,6 +10504,7 @@
         <a:solidFill>
           <a:srgbClr val="FFFFFF"/>
         </a:solidFill>
+        <a:effectLst/>
       </p:bgPr>
     </p:bg>
     <p:spTree>
@@ -10349,11 +10542,11 @@
           <a:bodyPr wrap="square" rtlCol="0" anchor="ctr"/>
           <a:lstStyle/>
           <a:p>
-            <a:pPr indent="0" marL="0">
-              <a:buNone/>
-            </a:pPr>
-            <a:r>
-              <a:rPr lang="en-US" sz="1250" b="1" spc="200" kern="0" dirty="0">
+            <a:pPr marL="0" indent="0">
+              <a:buNone/>
+            </a:pPr>
+            <a:r>
+              <a:rPr lang="en-US" sz="1250" b="1" kern="0" spc="200" dirty="0">
                 <a:solidFill>
                   <a:srgbClr val="1E2761"/>
                 </a:solidFill>
@@ -10388,7 +10581,7 @@
           <a:bodyPr wrap="square" rtlCol="0" anchor="ctr"/>
           <a:lstStyle/>
           <a:p>
-            <a:pPr indent="0" marL="0">
+            <a:pPr marL="0" indent="0">
               <a:buNone/>
             </a:pPr>
             <a:r>
@@ -10427,7 +10620,7 @@
           <a:bodyPr wrap="square" rtlCol="0" anchor="ctr"/>
           <a:lstStyle/>
           <a:p>
-            <a:pPr indent="0" marL="0">
+            <a:pPr marL="0" indent="0">
               <a:buNone/>
             </a:pPr>
             <a:r>
@@ -10466,7 +10659,7 @@
           <a:bodyPr wrap="square" rtlCol="0" anchor="ctr"/>
           <a:lstStyle/>
           <a:p>
-            <a:pPr algn="r" indent="0" marL="0">
+            <a:pPr marL="0" indent="0" algn="r">
               <a:buNone/>
             </a:pPr>
             <a:r>
@@ -10505,7 +10698,7 @@
           <a:bodyPr wrap="square" rtlCol="0" anchor="ctr"/>
           <a:lstStyle/>
           <a:p>
-            <a:pPr algn="ctr" indent="0" marL="0">
+            <a:pPr marL="0" indent="0" algn="ctr">
               <a:buNone/>
             </a:pPr>
             <a:r>
@@ -10544,7 +10737,7 @@
           <a:bodyPr wrap="square" rtlCol="0" anchor="ctr"/>
           <a:lstStyle/>
           <a:p>
-            <a:pPr algn="ctr" indent="0" marL="0">
+            <a:pPr marL="0" indent="0" algn="ctr">
               <a:buNone/>
             </a:pPr>
             <a:r>
@@ -10583,7 +10776,7 @@
           <a:bodyPr wrap="square" rtlCol="0" anchor="ctr"/>
           <a:lstStyle/>
           <a:p>
-            <a:pPr algn="ctr" indent="0" marL="0">
+            <a:pPr marL="0" indent="0" algn="ctr">
               <a:buNone/>
             </a:pPr>
             <a:r>
@@ -10622,7 +10815,7 @@
           <a:bodyPr wrap="square" rtlCol="0" anchor="ctr"/>
           <a:lstStyle/>
           <a:p>
-            <a:pPr algn="ctr" indent="0" marL="0">
+            <a:pPr marL="0" indent="0" algn="ctr">
               <a:buNone/>
             </a:pPr>
             <a:r>
@@ -10661,7 +10854,7 @@
           <a:bodyPr wrap="square" rtlCol="0" anchor="ctr"/>
           <a:lstStyle/>
           <a:p>
-            <a:pPr algn="ctr" indent="0" marL="0">
+            <a:pPr marL="0" indent="0" algn="ctr">
               <a:buNone/>
             </a:pPr>
             <a:r>
@@ -10703,6 +10896,13 @@
             <a:prstDash val="solid"/>
           </a:ln>
         </p:spPr>
+        <p:txBody>
+          <a:bodyPr/>
+          <a:lstStyle/>
+          <a:p>
+            <a:endParaRPr lang="en-US"/>
+          </a:p>
+        </p:txBody>
       </p:sp>
       <p:sp>
         <p:nvSpPr>
@@ -10725,7 +10925,7 @@
           <a:bodyPr wrap="square" rtlCol="0" anchor="ctr"/>
           <a:lstStyle/>
           <a:p>
-            <a:pPr algn="ctr" indent="0" marL="0">
+            <a:pPr marL="0" indent="0" algn="ctr">
               <a:lnSpc>
                 <a:spcPct val="95000"/>
               </a:lnSpc>
@@ -10770,6 +10970,13 @@
             <a:prstDash val="solid"/>
           </a:ln>
         </p:spPr>
+        <p:txBody>
+          <a:bodyPr/>
+          <a:lstStyle/>
+          <a:p>
+            <a:endParaRPr lang="en-US"/>
+          </a:p>
+        </p:txBody>
       </p:sp>
       <p:sp>
         <p:nvSpPr>
@@ -10792,7 +10999,7 @@
           <a:bodyPr wrap="square" rtlCol="0" anchor="ctr"/>
           <a:lstStyle/>
           <a:p>
-            <a:pPr algn="ctr" indent="0" marL="0">
+            <a:pPr marL="0" indent="0" algn="ctr">
               <a:lnSpc>
                 <a:spcPct val="95000"/>
               </a:lnSpc>
@@ -10837,6 +11044,13 @@
             <a:prstDash val="solid"/>
           </a:ln>
         </p:spPr>
+        <p:txBody>
+          <a:bodyPr/>
+          <a:lstStyle/>
+          <a:p>
+            <a:endParaRPr lang="en-US"/>
+          </a:p>
+        </p:txBody>
       </p:sp>
       <p:sp>
         <p:nvSpPr>
@@ -10859,7 +11073,7 @@
           <a:bodyPr wrap="square" rtlCol="0" anchor="ctr"/>
           <a:lstStyle/>
           <a:p>
-            <a:pPr algn="ctr" indent="0" marL="0">
+            <a:pPr marL="0" indent="0" algn="ctr">
               <a:lnSpc>
                 <a:spcPct val="95000"/>
               </a:lnSpc>
@@ -10904,6 +11118,13 @@
             <a:prstDash val="solid"/>
           </a:ln>
         </p:spPr>
+        <p:txBody>
+          <a:bodyPr/>
+          <a:lstStyle/>
+          <a:p>
+            <a:endParaRPr lang="en-US"/>
+          </a:p>
+        </p:txBody>
       </p:sp>
       <p:sp>
         <p:nvSpPr>
@@ -10926,7 +11147,7 @@
           <a:bodyPr wrap="square" rtlCol="0" anchor="ctr"/>
           <a:lstStyle/>
           <a:p>
-            <a:pPr algn="ctr" indent="0" marL="0">
+            <a:pPr marL="0" indent="0" algn="ctr">
               <a:lnSpc>
                 <a:spcPct val="95000"/>
               </a:lnSpc>
@@ -10971,6 +11192,13 @@
             <a:prstDash val="solid"/>
           </a:ln>
         </p:spPr>
+        <p:txBody>
+          <a:bodyPr/>
+          <a:lstStyle/>
+          <a:p>
+            <a:endParaRPr lang="en-US"/>
+          </a:p>
+        </p:txBody>
       </p:sp>
       <p:sp>
         <p:nvSpPr>
@@ -10993,7 +11221,7 @@
           <a:bodyPr wrap="square" rtlCol="0" anchor="ctr"/>
           <a:lstStyle/>
           <a:p>
-            <a:pPr algn="ctr" indent="0" marL="0">
+            <a:pPr marL="0" indent="0" algn="ctr">
               <a:lnSpc>
                 <a:spcPct val="95000"/>
               </a:lnSpc>
@@ -11038,6 +11266,13 @@
             <a:prstDash val="solid"/>
           </a:ln>
         </p:spPr>
+        <p:txBody>
+          <a:bodyPr/>
+          <a:lstStyle/>
+          <a:p>
+            <a:endParaRPr lang="en-US"/>
+          </a:p>
+        </p:txBody>
       </p:sp>
       <p:sp>
         <p:nvSpPr>
@@ -11060,7 +11295,7 @@
           <a:bodyPr wrap="square" rtlCol="0" anchor="ctr"/>
           <a:lstStyle/>
           <a:p>
-            <a:pPr algn="ctr" indent="0" marL="0">
+            <a:pPr marL="0" indent="0" algn="ctr">
               <a:lnSpc>
                 <a:spcPct val="95000"/>
               </a:lnSpc>
@@ -11105,6 +11340,13 @@
             <a:prstDash val="solid"/>
           </a:ln>
         </p:spPr>
+        <p:txBody>
+          <a:bodyPr/>
+          <a:lstStyle/>
+          <a:p>
+            <a:endParaRPr lang="en-US"/>
+          </a:p>
+        </p:txBody>
       </p:sp>
       <p:sp>
         <p:nvSpPr>
@@ -11127,7 +11369,7 @@
           <a:bodyPr wrap="square" rtlCol="0" anchor="ctr"/>
           <a:lstStyle/>
           <a:p>
-            <a:pPr algn="ctr" indent="0" marL="0">
+            <a:pPr marL="0" indent="0" algn="ctr">
               <a:lnSpc>
                 <a:spcPct val="95000"/>
               </a:lnSpc>
@@ -11172,6 +11414,13 @@
             <a:prstDash val="solid"/>
           </a:ln>
         </p:spPr>
+        <p:txBody>
+          <a:bodyPr/>
+          <a:lstStyle/>
+          <a:p>
+            <a:endParaRPr lang="en-US"/>
+          </a:p>
+        </p:txBody>
       </p:sp>
       <p:sp>
         <p:nvSpPr>
@@ -11194,7 +11443,7 @@
           <a:bodyPr wrap="square" rtlCol="0" anchor="ctr"/>
           <a:lstStyle/>
           <a:p>
-            <a:pPr algn="ctr" indent="0" marL="0">
+            <a:pPr marL="0" indent="0" algn="ctr">
               <a:lnSpc>
                 <a:spcPct val="95000"/>
               </a:lnSpc>
@@ -11239,6 +11488,13 @@
             <a:prstDash val="solid"/>
           </a:ln>
         </p:spPr>
+        <p:txBody>
+          <a:bodyPr/>
+          <a:lstStyle/>
+          <a:p>
+            <a:endParaRPr lang="en-US"/>
+          </a:p>
+        </p:txBody>
       </p:sp>
       <p:sp>
         <p:nvSpPr>
@@ -11261,7 +11517,7 @@
           <a:bodyPr wrap="square" rtlCol="0" anchor="ctr"/>
           <a:lstStyle/>
           <a:p>
-            <a:pPr algn="ctr" indent="0" marL="0">
+            <a:pPr marL="0" indent="0" algn="ctr">
               <a:lnSpc>
                 <a:spcPct val="95000"/>
               </a:lnSpc>
@@ -11306,6 +11562,13 @@
             <a:prstDash val="solid"/>
           </a:ln>
         </p:spPr>
+        <p:txBody>
+          <a:bodyPr/>
+          <a:lstStyle/>
+          <a:p>
+            <a:endParaRPr lang="en-US"/>
+          </a:p>
+        </p:txBody>
       </p:sp>
       <p:sp>
         <p:nvSpPr>
@@ -11328,7 +11591,7 @@
           <a:bodyPr wrap="square" rtlCol="0" anchor="ctr"/>
           <a:lstStyle/>
           <a:p>
-            <a:pPr algn="ctr" indent="0" marL="0">
+            <a:pPr marL="0" indent="0" algn="ctr">
               <a:lnSpc>
                 <a:spcPct val="95000"/>
               </a:lnSpc>
@@ -11373,6 +11636,13 @@
             <a:prstDash val="solid"/>
           </a:ln>
         </p:spPr>
+        <p:txBody>
+          <a:bodyPr/>
+          <a:lstStyle/>
+          <a:p>
+            <a:endParaRPr lang="en-US"/>
+          </a:p>
+        </p:txBody>
       </p:sp>
       <p:sp>
         <p:nvSpPr>
@@ -11395,7 +11665,7 @@
           <a:bodyPr wrap="square" rtlCol="0" anchor="ctr"/>
           <a:lstStyle/>
           <a:p>
-            <a:pPr algn="ctr" indent="0" marL="0">
+            <a:pPr marL="0" indent="0" algn="ctr">
               <a:lnSpc>
                 <a:spcPct val="95000"/>
               </a:lnSpc>
@@ -11440,6 +11710,13 @@
             <a:prstDash val="solid"/>
           </a:ln>
         </p:spPr>
+        <p:txBody>
+          <a:bodyPr/>
+          <a:lstStyle/>
+          <a:p>
+            <a:endParaRPr lang="en-US"/>
+          </a:p>
+        </p:txBody>
       </p:sp>
       <p:sp>
         <p:nvSpPr>
@@ -11462,7 +11739,7 @@
           <a:bodyPr wrap="square" rtlCol="0" anchor="ctr"/>
           <a:lstStyle/>
           <a:p>
-            <a:pPr algn="ctr" indent="0" marL="0">
+            <a:pPr marL="0" indent="0" algn="ctr">
               <a:lnSpc>
                 <a:spcPct val="95000"/>
               </a:lnSpc>
@@ -11482,7 +11759,7 @@
             <a:endParaRPr lang="en-US" sz="950" dirty="0"/>
           </a:p>
           <a:p>
-            <a:pPr algn="ctr" indent="0" marL="0">
+            <a:pPr marL="0" indent="0" algn="ctr">
               <a:lnSpc>
                 <a:spcPct val="95000"/>
               </a:lnSpc>
@@ -11527,6 +11804,13 @@
             <a:prstDash val="solid"/>
           </a:ln>
         </p:spPr>
+        <p:txBody>
+          <a:bodyPr/>
+          <a:lstStyle/>
+          <a:p>
+            <a:endParaRPr lang="en-US"/>
+          </a:p>
+        </p:txBody>
       </p:sp>
       <p:sp>
         <p:nvSpPr>
@@ -11549,7 +11833,7 @@
           <a:bodyPr wrap="square" rtlCol="0" anchor="ctr"/>
           <a:lstStyle/>
           <a:p>
-            <a:pPr algn="ctr" indent="0" marL="0">
+            <a:pPr marL="0" indent="0" algn="ctr">
               <a:lnSpc>
                 <a:spcPct val="95000"/>
               </a:lnSpc>
@@ -11569,7 +11853,7 @@
             <a:endParaRPr lang="en-US" sz="950" dirty="0"/>
           </a:p>
           <a:p>
-            <a:pPr algn="ctr" indent="0" marL="0">
+            <a:pPr marL="0" indent="0" algn="ctr">
               <a:lnSpc>
                 <a:spcPct val="95000"/>
               </a:lnSpc>
@@ -11614,6 +11898,13 @@
             <a:prstDash val="solid"/>
           </a:ln>
         </p:spPr>
+        <p:txBody>
+          <a:bodyPr/>
+          <a:lstStyle/>
+          <a:p>
+            <a:endParaRPr lang="en-US"/>
+          </a:p>
+        </p:txBody>
       </p:sp>
       <p:sp>
         <p:nvSpPr>
@@ -11636,7 +11927,7 @@
           <a:bodyPr wrap="square" rtlCol="0" anchor="ctr"/>
           <a:lstStyle/>
           <a:p>
-            <a:pPr algn="ctr" indent="0" marL="0">
+            <a:pPr marL="0" indent="0" algn="ctr">
               <a:lnSpc>
                 <a:spcPct val="95000"/>
               </a:lnSpc>
@@ -11656,7 +11947,7 @@
             <a:endParaRPr lang="en-US" sz="950" dirty="0"/>
           </a:p>
           <a:p>
-            <a:pPr algn="ctr" indent="0" marL="0">
+            <a:pPr marL="0" indent="0" algn="ctr">
               <a:lnSpc>
                 <a:spcPct val="95000"/>
               </a:lnSpc>
@@ -11701,6 +11992,13 @@
             <a:prstDash val="solid"/>
           </a:ln>
         </p:spPr>
+        <p:txBody>
+          <a:bodyPr/>
+          <a:lstStyle/>
+          <a:p>
+            <a:endParaRPr lang="en-US"/>
+          </a:p>
+        </p:txBody>
       </p:sp>
       <p:sp>
         <p:nvSpPr>
@@ -11723,7 +12021,7 @@
           <a:bodyPr wrap="square" rtlCol="0" anchor="ctr"/>
           <a:lstStyle/>
           <a:p>
-            <a:pPr algn="ctr" indent="0" marL="0">
+            <a:pPr marL="0" indent="0" algn="ctr">
               <a:lnSpc>
                 <a:spcPct val="95000"/>
               </a:lnSpc>
@@ -11768,6 +12066,13 @@
             <a:prstDash val="solid"/>
           </a:ln>
         </p:spPr>
+        <p:txBody>
+          <a:bodyPr/>
+          <a:lstStyle/>
+          <a:p>
+            <a:endParaRPr lang="en-US"/>
+          </a:p>
+        </p:txBody>
       </p:sp>
       <p:sp>
         <p:nvSpPr>
@@ -11790,7 +12095,7 @@
           <a:bodyPr wrap="square" rtlCol="0" anchor="ctr"/>
           <a:lstStyle/>
           <a:p>
-            <a:pPr algn="ctr" indent="0" marL="0">
+            <a:pPr marL="0" indent="0" algn="ctr">
               <a:lnSpc>
                 <a:spcPct val="95000"/>
               </a:lnSpc>
@@ -11810,7 +12115,7 @@
             <a:endParaRPr lang="en-US" sz="950" dirty="0"/>
           </a:p>
           <a:p>
-            <a:pPr algn="ctr" indent="0" marL="0">
+            <a:pPr marL="0" indent="0" algn="ctr">
               <a:lnSpc>
                 <a:spcPct val="95000"/>
               </a:lnSpc>
@@ -11855,6 +12160,13 @@
             <a:prstDash val="solid"/>
           </a:ln>
         </p:spPr>
+        <p:txBody>
+          <a:bodyPr/>
+          <a:lstStyle/>
+          <a:p>
+            <a:endParaRPr lang="en-US"/>
+          </a:p>
+        </p:txBody>
       </p:sp>
       <p:sp>
         <p:nvSpPr>
@@ -11877,7 +12189,7 @@
           <a:bodyPr wrap="square" rtlCol="0" anchor="ctr"/>
           <a:lstStyle/>
           <a:p>
-            <a:pPr algn="ctr" indent="0" marL="0">
+            <a:pPr marL="0" indent="0" algn="ctr">
               <a:lnSpc>
                 <a:spcPct val="95000"/>
               </a:lnSpc>
@@ -11897,7 +12209,7 @@
             <a:endParaRPr lang="en-US" sz="950" dirty="0"/>
           </a:p>
           <a:p>
-            <a:pPr algn="ctr" indent="0" marL="0">
+            <a:pPr marL="0" indent="0" algn="ctr">
               <a:lnSpc>
                 <a:spcPct val="95000"/>
               </a:lnSpc>
@@ -11942,6 +12254,13 @@
             <a:prstDash val="solid"/>
           </a:ln>
         </p:spPr>
+        <p:txBody>
+          <a:bodyPr/>
+          <a:lstStyle/>
+          <a:p>
+            <a:endParaRPr lang="en-US"/>
+          </a:p>
+        </p:txBody>
       </p:sp>
       <p:sp>
         <p:nvSpPr>
@@ -11964,7 +12283,7 @@
           <a:bodyPr wrap="square" rtlCol="0" anchor="ctr"/>
           <a:lstStyle/>
           <a:p>
-            <a:pPr algn="ctr" indent="0" marL="0">
+            <a:pPr marL="0" indent="0" algn="ctr">
               <a:lnSpc>
                 <a:spcPct val="95000"/>
               </a:lnSpc>
@@ -11984,7 +12303,7 @@
             <a:endParaRPr lang="en-US" sz="950" dirty="0"/>
           </a:p>
           <a:p>
-            <a:pPr algn="ctr" indent="0" marL="0">
+            <a:pPr marL="0" indent="0" algn="ctr">
               <a:lnSpc>
                 <a:spcPct val="95000"/>
               </a:lnSpc>
@@ -12029,6 +12348,13 @@
             <a:prstDash val="solid"/>
           </a:ln>
         </p:spPr>
+        <p:txBody>
+          <a:bodyPr/>
+          <a:lstStyle/>
+          <a:p>
+            <a:endParaRPr lang="en-US"/>
+          </a:p>
+        </p:txBody>
       </p:sp>
       <p:sp>
         <p:nvSpPr>
@@ -12051,7 +12377,7 @@
           <a:bodyPr wrap="square" rtlCol="0" anchor="ctr"/>
           <a:lstStyle/>
           <a:p>
-            <a:pPr algn="ctr" indent="0" marL="0">
+            <a:pPr marL="0" indent="0" algn="ctr">
               <a:lnSpc>
                 <a:spcPct val="95000"/>
               </a:lnSpc>
@@ -12071,7 +12397,7 @@
             <a:endParaRPr lang="en-US" sz="950" dirty="0"/>
           </a:p>
           <a:p>
-            <a:pPr algn="ctr" indent="0" marL="0">
+            <a:pPr marL="0" indent="0" algn="ctr">
               <a:lnSpc>
                 <a:spcPct val="95000"/>
               </a:lnSpc>
@@ -12116,6 +12442,13 @@
             <a:prstDash val="solid"/>
           </a:ln>
         </p:spPr>
+        <p:txBody>
+          <a:bodyPr/>
+          <a:lstStyle/>
+          <a:p>
+            <a:endParaRPr lang="en-US"/>
+          </a:p>
+        </p:txBody>
       </p:sp>
       <p:sp>
         <p:nvSpPr>
@@ -12138,7 +12471,7 @@
           <a:bodyPr wrap="square" rtlCol="0" anchor="ctr"/>
           <a:lstStyle/>
           <a:p>
-            <a:pPr algn="ctr" indent="0" marL="0">
+            <a:pPr marL="0" indent="0" algn="ctr">
               <a:lnSpc>
                 <a:spcPct val="95000"/>
               </a:lnSpc>
@@ -12183,6 +12516,13 @@
             <a:prstDash val="solid"/>
           </a:ln>
         </p:spPr>
+        <p:txBody>
+          <a:bodyPr/>
+          <a:lstStyle/>
+          <a:p>
+            <a:endParaRPr lang="en-US"/>
+          </a:p>
+        </p:txBody>
       </p:sp>
       <p:sp>
         <p:nvSpPr>
@@ -12205,7 +12545,7 @@
           <a:bodyPr wrap="square" rtlCol="0" anchor="ctr"/>
           <a:lstStyle/>
           <a:p>
-            <a:pPr algn="ctr" indent="0" marL="0">
+            <a:pPr marL="0" indent="0" algn="ctr">
               <a:lnSpc>
                 <a:spcPct val="95000"/>
               </a:lnSpc>
@@ -12250,6 +12590,13 @@
             <a:prstDash val="solid"/>
           </a:ln>
         </p:spPr>
+        <p:txBody>
+          <a:bodyPr/>
+          <a:lstStyle/>
+          <a:p>
+            <a:endParaRPr lang="en-US"/>
+          </a:p>
+        </p:txBody>
       </p:sp>
       <p:sp>
         <p:nvSpPr>
@@ -12272,7 +12619,7 @@
           <a:bodyPr wrap="square" rtlCol="0" anchor="ctr"/>
           <a:lstStyle/>
           <a:p>
-            <a:pPr algn="ctr" indent="0" marL="0">
+            <a:pPr marL="0" indent="0" algn="ctr">
               <a:lnSpc>
                 <a:spcPct val="95000"/>
               </a:lnSpc>
@@ -12292,7 +12639,7 @@
             <a:endParaRPr lang="en-US" sz="950" dirty="0"/>
           </a:p>
           <a:p>
-            <a:pPr algn="ctr" indent="0" marL="0">
+            <a:pPr marL="0" indent="0" algn="ctr">
               <a:lnSpc>
                 <a:spcPct val="95000"/>
               </a:lnSpc>
@@ -12337,6 +12684,13 @@
             <a:prstDash val="solid"/>
           </a:ln>
         </p:spPr>
+        <p:txBody>
+          <a:bodyPr/>
+          <a:lstStyle/>
+          <a:p>
+            <a:endParaRPr lang="en-US"/>
+          </a:p>
+        </p:txBody>
       </p:sp>
       <p:sp>
         <p:nvSpPr>
@@ -12359,7 +12713,7 @@
           <a:bodyPr wrap="square" rtlCol="0" anchor="ctr"/>
           <a:lstStyle/>
           <a:p>
-            <a:pPr algn="ctr" indent="0" marL="0">
+            <a:pPr marL="0" indent="0" algn="ctr">
               <a:lnSpc>
                 <a:spcPct val="95000"/>
               </a:lnSpc>
@@ -12379,7 +12733,7 @@
             <a:endParaRPr lang="en-US" sz="950" dirty="0"/>
           </a:p>
           <a:p>
-            <a:pPr algn="ctr" indent="0" marL="0">
+            <a:pPr marL="0" indent="0" algn="ctr">
               <a:lnSpc>
                 <a:spcPct val="95000"/>
               </a:lnSpc>
@@ -12424,6 +12778,13 @@
             <a:prstDash val="solid"/>
           </a:ln>
         </p:spPr>
+        <p:txBody>
+          <a:bodyPr/>
+          <a:lstStyle/>
+          <a:p>
+            <a:endParaRPr lang="en-US"/>
+          </a:p>
+        </p:txBody>
       </p:sp>
       <p:sp>
         <p:nvSpPr>
@@ -12446,7 +12807,7 @@
           <a:bodyPr wrap="square" rtlCol="0" anchor="ctr"/>
           <a:lstStyle/>
           <a:p>
-            <a:pPr algn="ctr" indent="0" marL="0">
+            <a:pPr marL="0" indent="0" algn="ctr">
               <a:lnSpc>
                 <a:spcPct val="95000"/>
               </a:lnSpc>
@@ -12491,6 +12852,13 @@
             <a:prstDash val="solid"/>
           </a:ln>
         </p:spPr>
+        <p:txBody>
+          <a:bodyPr/>
+          <a:lstStyle/>
+          <a:p>
+            <a:endParaRPr lang="en-US"/>
+          </a:p>
+        </p:txBody>
       </p:sp>
       <p:sp>
         <p:nvSpPr>
@@ -12513,7 +12881,7 @@
           <a:bodyPr wrap="square" rtlCol="0" anchor="ctr"/>
           <a:lstStyle/>
           <a:p>
-            <a:pPr algn="ctr" indent="0" marL="0">
+            <a:pPr marL="0" indent="0" algn="ctr">
               <a:lnSpc>
                 <a:spcPct val="95000"/>
               </a:lnSpc>
@@ -12555,7 +12923,7 @@
           <a:bodyPr wrap="square" rtlCol="0" anchor="ctr"/>
           <a:lstStyle/>
           <a:p>
-            <a:pPr algn="ctr" indent="0" marL="0">
+            <a:pPr marL="0" indent="0" algn="ctr">
               <a:buNone/>
             </a:pPr>
             <a:r>
@@ -12594,7 +12962,7 @@
           <a:bodyPr wrap="square" rtlCol="0" anchor="ctr"/>
           <a:lstStyle/>
           <a:p>
-            <a:pPr algn="ctr" indent="0" marL="0">
+            <a:pPr marL="0" indent="0" algn="ctr">
               <a:buNone/>
             </a:pPr>
             <a:r>
@@ -12633,7 +13001,7 @@
           <a:bodyPr wrap="square" rtlCol="0" anchor="ctr"/>
           <a:lstStyle/>
           <a:p>
-            <a:pPr algn="ctr" indent="0" marL="0">
+            <a:pPr marL="0" indent="0" algn="ctr">
               <a:buNone/>
             </a:pPr>
             <a:r>
@@ -12672,7 +13040,7 @@
           <a:bodyPr wrap="square" rtlCol="0" anchor="ctr"/>
           <a:lstStyle/>
           <a:p>
-            <a:pPr algn="ctr" indent="0" marL="0">
+            <a:pPr marL="0" indent="0" algn="ctr">
               <a:buNone/>
             </a:pPr>
             <a:r>
@@ -12711,7 +13079,7 @@
           <a:bodyPr wrap="square" rtlCol="0" anchor="ctr"/>
           <a:lstStyle/>
           <a:p>
-            <a:pPr algn="ctr" indent="0" marL="0">
+            <a:pPr marL="0" indent="0" algn="ctr">
               <a:buNone/>
             </a:pPr>
             <a:r>
@@ -12750,7 +13118,7 @@
           <a:bodyPr wrap="square" rtlCol="0" anchor="ctr"/>
           <a:lstStyle/>
           <a:p>
-            <a:pPr algn="ctr" indent="0" marL="0">
+            <a:pPr marL="0" indent="0" algn="ctr">
               <a:lnSpc>
                 <a:spcPct val="100000"/>
               </a:lnSpc>
@@ -12770,7 +13138,7 @@
             <a:endParaRPr lang="en-US" sz="1050" dirty="0"/>
           </a:p>
           <a:p>
-            <a:pPr algn="ctr" indent="0" marL="0">
+            <a:pPr marL="0" indent="0" algn="ctr">
               <a:lnSpc>
                 <a:spcPct val="100000"/>
               </a:lnSpc>
@@ -12812,7 +13180,7 @@
           <a:bodyPr wrap="square" rtlCol="0" anchor="ctr"/>
           <a:lstStyle/>
           <a:p>
-            <a:pPr algn="ctr" indent="0" marL="0">
+            <a:pPr marL="0" indent="0" algn="ctr">
               <a:buNone/>
             </a:pPr>
             <a:r>
@@ -12849,6 +13217,13 @@
           </a:solidFill>
           <a:ln/>
         </p:spPr>
+        <p:txBody>
+          <a:bodyPr/>
+          <a:lstStyle/>
+          <a:p>
+            <a:endParaRPr lang="en-US"/>
+          </a:p>
+        </p:txBody>
       </p:sp>
       <p:sp>
         <p:nvSpPr>
@@ -12871,7 +13246,7 @@
           <a:bodyPr wrap="square" rtlCol="0" anchor="ctr"/>
           <a:lstStyle/>
           <a:p>
-            <a:pPr indent="0" marL="0">
+            <a:pPr marL="0" indent="0">
               <a:buNone/>
             </a:pPr>
             <a:r>
@@ -12908,6 +13283,13 @@
           </a:solidFill>
           <a:ln/>
         </p:spPr>
+        <p:txBody>
+          <a:bodyPr/>
+          <a:lstStyle/>
+          <a:p>
+            <a:endParaRPr lang="en-US"/>
+          </a:p>
+        </p:txBody>
       </p:sp>
       <p:sp>
         <p:nvSpPr>
@@ -12930,7 +13312,7 @@
           <a:bodyPr wrap="square" rtlCol="0" anchor="ctr"/>
           <a:lstStyle/>
           <a:p>
-            <a:pPr indent="0" marL="0">
+            <a:pPr marL="0" indent="0">
               <a:buNone/>
             </a:pPr>
             <a:r>
@@ -12967,6 +13349,13 @@
           </a:solidFill>
           <a:ln/>
         </p:spPr>
+        <p:txBody>
+          <a:bodyPr/>
+          <a:lstStyle/>
+          <a:p>
+            <a:endParaRPr lang="en-US"/>
+          </a:p>
+        </p:txBody>
       </p:sp>
       <p:sp>
         <p:nvSpPr>
@@ -12989,7 +13378,7 @@
           <a:bodyPr wrap="square" rtlCol="0" anchor="ctr"/>
           <a:lstStyle/>
           <a:p>
-            <a:pPr indent="0" marL="0">
+            <a:pPr marL="0" indent="0">
               <a:buNone/>
             </a:pPr>
             <a:r>
@@ -13026,6 +13415,13 @@
           </a:solidFill>
           <a:ln/>
         </p:spPr>
+        <p:txBody>
+          <a:bodyPr/>
+          <a:lstStyle/>
+          <a:p>
+            <a:endParaRPr lang="en-US"/>
+          </a:p>
+        </p:txBody>
       </p:sp>
       <p:sp>
         <p:nvSpPr>
@@ -13048,7 +13444,7 @@
           <a:bodyPr wrap="square" rtlCol="0" anchor="ctr"/>
           <a:lstStyle/>
           <a:p>
-            <a:pPr indent="0" marL="0">
+            <a:pPr marL="0" indent="0">
               <a:buNone/>
             </a:pPr>
             <a:r>
@@ -13085,6 +13481,13 @@
           </a:solidFill>
           <a:ln/>
         </p:spPr>
+        <p:txBody>
+          <a:bodyPr/>
+          <a:lstStyle/>
+          <a:p>
+            <a:endParaRPr lang="en-US"/>
+          </a:p>
+        </p:txBody>
       </p:sp>
       <p:sp>
         <p:nvSpPr>
@@ -13107,7 +13510,7 @@
           <a:bodyPr wrap="square" rtlCol="0" anchor="ctr"/>
           <a:lstStyle/>
           <a:p>
-            <a:pPr indent="0" marL="0">
+            <a:pPr marL="0" indent="0">
               <a:buNone/>
             </a:pPr>
             <a:r>
@@ -13146,6 +13549,13 @@
           </a:solidFill>
           <a:ln/>
         </p:spPr>
+        <p:txBody>
+          <a:bodyPr/>
+          <a:lstStyle/>
+          <a:p>
+            <a:endParaRPr lang="en-US"/>
+          </a:p>
+        </p:txBody>
       </p:sp>
       <p:sp>
         <p:nvSpPr>
@@ -13168,7 +13578,7 @@
           <a:bodyPr wrap="square" rtlCol="0" anchor="t"/>
           <a:lstStyle/>
           <a:p>
-            <a:pPr indent="0" marL="0">
+            <a:pPr marL="0" indent="0">
               <a:lnSpc>
                 <a:spcPct val="115000"/>
               </a:lnSpc>
@@ -13185,12 +13595,6 @@
               </a:rPr>
               <a:t>Nhận xét:  </a:t>
             </a:r>
-            <a:pPr indent="0" marL="0">
-              <a:lnSpc>
-                <a:spcPct val="115000"/>
-              </a:lnSpc>
-              <a:buNone/>
-            </a:pPr>
             <a:r>
               <a:rPr lang="en-US" sz="1200" dirty="0">
                 <a:solidFill>
@@ -13222,6 +13626,7 @@
         <a:solidFill>
           <a:srgbClr val="FFFFFF"/>
         </a:solidFill>
+        <a:effectLst/>
       </p:bgPr>
     </p:bg>
     <p:spTree>
@@ -13259,11 +13664,11 @@
           <a:bodyPr wrap="square" rtlCol="0" anchor="ctr"/>
           <a:lstStyle/>
           <a:p>
-            <a:pPr indent="0" marL="0">
-              <a:buNone/>
-            </a:pPr>
-            <a:r>
-              <a:rPr lang="en-US" sz="1250" b="1" spc="200" kern="0" dirty="0">
+            <a:pPr marL="0" indent="0">
+              <a:buNone/>
+            </a:pPr>
+            <a:r>
+              <a:rPr lang="en-US" sz="1250" b="1" kern="0" spc="200" dirty="0">
                 <a:solidFill>
                   <a:srgbClr val="1E2761"/>
                 </a:solidFill>
@@ -13298,7 +13703,7 @@
           <a:bodyPr wrap="square" rtlCol="0" anchor="ctr"/>
           <a:lstStyle/>
           <a:p>
-            <a:pPr indent="0" marL="0">
+            <a:pPr marL="0" indent="0">
               <a:buNone/>
             </a:pPr>
             <a:r>
@@ -13337,7 +13742,7 @@
           <a:bodyPr wrap="square" rtlCol="0" anchor="ctr"/>
           <a:lstStyle/>
           <a:p>
-            <a:pPr indent="0" marL="0">
+            <a:pPr marL="0" indent="0">
               <a:buNone/>
             </a:pPr>
             <a:r>
@@ -13376,7 +13781,7 @@
           <a:bodyPr wrap="square" rtlCol="0" anchor="ctr"/>
           <a:lstStyle/>
           <a:p>
-            <a:pPr algn="r" indent="0" marL="0">
+            <a:pPr marL="0" indent="0" algn="r">
               <a:buNone/>
             </a:pPr>
             <a:r>
@@ -13415,6 +13820,13 @@
           </a:solidFill>
           <a:ln/>
         </p:spPr>
+        <p:txBody>
+          <a:bodyPr/>
+          <a:lstStyle/>
+          <a:p>
+            <a:endParaRPr lang="en-US"/>
+          </a:p>
+        </p:txBody>
       </p:sp>
       <p:sp>
         <p:nvSpPr>
@@ -13435,6 +13847,13 @@
           </a:solidFill>
           <a:ln/>
         </p:spPr>
+        <p:txBody>
+          <a:bodyPr/>
+          <a:lstStyle/>
+          <a:p>
+            <a:endParaRPr lang="en-US"/>
+          </a:p>
+        </p:txBody>
       </p:sp>
       <p:sp>
         <p:nvSpPr>
@@ -13457,7 +13876,7 @@
           <a:bodyPr wrap="square" rtlCol="0" anchor="ctr"/>
           <a:lstStyle/>
           <a:p>
-            <a:pPr algn="ctr" indent="0" marL="0">
+            <a:pPr marL="0" indent="0" algn="ctr">
               <a:buNone/>
             </a:pPr>
             <a:r>
@@ -13496,7 +13915,7 @@
           <a:bodyPr wrap="square" rtlCol="0" anchor="ctr"/>
           <a:lstStyle/>
           <a:p>
-            <a:pPr indent="0" marL="0">
+            <a:pPr marL="0" indent="0">
               <a:buNone/>
             </a:pPr>
             <a:r>
@@ -13535,7 +13954,7 @@
           <a:bodyPr wrap="square" rtlCol="0" anchor="t"/>
           <a:lstStyle/>
           <a:p>
-            <a:pPr indent="0" marL="0">
+            <a:pPr marL="0" indent="0">
               <a:lnSpc>
                 <a:spcPct val="100000"/>
               </a:lnSpc>
@@ -13577,6 +13996,13 @@
           </a:solidFill>
           <a:ln/>
         </p:spPr>
+        <p:txBody>
+          <a:bodyPr/>
+          <a:lstStyle/>
+          <a:p>
+            <a:endParaRPr lang="en-US"/>
+          </a:p>
+        </p:txBody>
       </p:sp>
       <p:sp>
         <p:nvSpPr>
@@ -13599,7 +14025,7 @@
           <a:bodyPr wrap="square" rtlCol="0" anchor="ctr"/>
           <a:lstStyle/>
           <a:p>
-            <a:pPr algn="ctr" indent="0" marL="0">
+            <a:pPr marL="0" indent="0" algn="ctr">
               <a:buNone/>
             </a:pPr>
             <a:r>
@@ -13636,6 +14062,13 @@
           </a:solidFill>
           <a:ln/>
         </p:spPr>
+        <p:txBody>
+          <a:bodyPr/>
+          <a:lstStyle/>
+          <a:p>
+            <a:endParaRPr lang="en-US"/>
+          </a:p>
+        </p:txBody>
       </p:sp>
       <p:sp>
         <p:nvSpPr>
@@ -13658,6 +14091,13 @@
           </a:solidFill>
           <a:ln/>
         </p:spPr>
+        <p:txBody>
+          <a:bodyPr/>
+          <a:lstStyle/>
+          <a:p>
+            <a:endParaRPr lang="en-US"/>
+          </a:p>
+        </p:txBody>
       </p:sp>
       <p:sp>
         <p:nvSpPr>
@@ -13680,7 +14120,7 @@
           <a:bodyPr wrap="square" rtlCol="0" anchor="ctr"/>
           <a:lstStyle/>
           <a:p>
-            <a:pPr algn="ctr" indent="0" marL="0">
+            <a:pPr marL="0" indent="0" algn="ctr">
               <a:buNone/>
             </a:pPr>
             <a:r>
@@ -13719,7 +14159,7 @@
           <a:bodyPr wrap="square" rtlCol="0" anchor="ctr"/>
           <a:lstStyle/>
           <a:p>
-            <a:pPr algn="ctr" indent="0" marL="0">
+            <a:pPr marL="0" indent="0" algn="ctr">
               <a:buNone/>
             </a:pPr>
             <a:r>
@@ -13758,6 +14198,13 @@
           </a:solidFill>
           <a:ln/>
         </p:spPr>
+        <p:txBody>
+          <a:bodyPr/>
+          <a:lstStyle/>
+          <a:p>
+            <a:endParaRPr lang="en-US"/>
+          </a:p>
+        </p:txBody>
       </p:sp>
       <p:sp>
         <p:nvSpPr>
@@ -13778,6 +14225,13 @@
           </a:solidFill>
           <a:ln/>
         </p:spPr>
+        <p:txBody>
+          <a:bodyPr/>
+          <a:lstStyle/>
+          <a:p>
+            <a:endParaRPr lang="en-US"/>
+          </a:p>
+        </p:txBody>
       </p:sp>
       <p:sp>
         <p:nvSpPr>
@@ -13800,7 +14254,7 @@
           <a:bodyPr wrap="square" rtlCol="0" anchor="ctr"/>
           <a:lstStyle/>
           <a:p>
-            <a:pPr algn="ctr" indent="0" marL="0">
+            <a:pPr marL="0" indent="0" algn="ctr">
               <a:buNone/>
             </a:pPr>
             <a:r>
@@ -13839,7 +14293,7 @@
           <a:bodyPr wrap="square" rtlCol="0" anchor="ctr"/>
           <a:lstStyle/>
           <a:p>
-            <a:pPr indent="0" marL="0">
+            <a:pPr marL="0" indent="0">
               <a:buNone/>
             </a:pPr>
             <a:r>
@@ -13878,7 +14332,7 @@
           <a:bodyPr wrap="square" rtlCol="0" anchor="t"/>
           <a:lstStyle/>
           <a:p>
-            <a:pPr indent="0" marL="0">
+            <a:pPr marL="0" indent="0">
               <a:lnSpc>
                 <a:spcPct val="100000"/>
               </a:lnSpc>
@@ -13920,6 +14374,13 @@
           </a:solidFill>
           <a:ln/>
         </p:spPr>
+        <p:txBody>
+          <a:bodyPr/>
+          <a:lstStyle/>
+          <a:p>
+            <a:endParaRPr lang="en-US"/>
+          </a:p>
+        </p:txBody>
       </p:sp>
       <p:sp>
         <p:nvSpPr>
@@ -13942,7 +14403,7 @@
           <a:bodyPr wrap="square" rtlCol="0" anchor="ctr"/>
           <a:lstStyle/>
           <a:p>
-            <a:pPr algn="ctr" indent="0" marL="0">
+            <a:pPr marL="0" indent="0" algn="ctr">
               <a:buNone/>
             </a:pPr>
             <a:r>
@@ -13979,6 +14440,13 @@
           </a:solidFill>
           <a:ln/>
         </p:spPr>
+        <p:txBody>
+          <a:bodyPr/>
+          <a:lstStyle/>
+          <a:p>
+            <a:endParaRPr lang="en-US"/>
+          </a:p>
+        </p:txBody>
       </p:sp>
       <p:sp>
         <p:nvSpPr>
@@ -14001,6 +14469,13 @@
           </a:solidFill>
           <a:ln/>
         </p:spPr>
+        <p:txBody>
+          <a:bodyPr/>
+          <a:lstStyle/>
+          <a:p>
+            <a:endParaRPr lang="en-US"/>
+          </a:p>
+        </p:txBody>
       </p:sp>
       <p:sp>
         <p:nvSpPr>
@@ -14023,7 +14498,7 @@
           <a:bodyPr wrap="square" rtlCol="0" anchor="ctr"/>
           <a:lstStyle/>
           <a:p>
-            <a:pPr algn="ctr" indent="0" marL="0">
+            <a:pPr marL="0" indent="0" algn="ctr">
               <a:buNone/>
             </a:pPr>
             <a:r>
@@ -14062,7 +14537,7 @@
           <a:bodyPr wrap="square" rtlCol="0" anchor="ctr"/>
           <a:lstStyle/>
           <a:p>
-            <a:pPr algn="ctr" indent="0" marL="0">
+            <a:pPr marL="0" indent="0" algn="ctr">
               <a:buNone/>
             </a:pPr>
             <a:r>
@@ -14101,6 +14576,13 @@
           </a:solidFill>
           <a:ln/>
         </p:spPr>
+        <p:txBody>
+          <a:bodyPr/>
+          <a:lstStyle/>
+          <a:p>
+            <a:endParaRPr lang="en-US"/>
+          </a:p>
+        </p:txBody>
       </p:sp>
       <p:sp>
         <p:nvSpPr>
@@ -14121,6 +14603,13 @@
           </a:solidFill>
           <a:ln/>
         </p:spPr>
+        <p:txBody>
+          <a:bodyPr/>
+          <a:lstStyle/>
+          <a:p>
+            <a:endParaRPr lang="en-US"/>
+          </a:p>
+        </p:txBody>
       </p:sp>
       <p:sp>
         <p:nvSpPr>
@@ -14143,7 +14632,7 @@
           <a:bodyPr wrap="square" rtlCol="0" anchor="ctr"/>
           <a:lstStyle/>
           <a:p>
-            <a:pPr algn="ctr" indent="0" marL="0">
+            <a:pPr marL="0" indent="0" algn="ctr">
               <a:buNone/>
             </a:pPr>
             <a:r>
@@ -14182,7 +14671,7 @@
           <a:bodyPr wrap="square" rtlCol="0" anchor="ctr"/>
           <a:lstStyle/>
           <a:p>
-            <a:pPr indent="0" marL="0">
+            <a:pPr marL="0" indent="0">
               <a:buNone/>
             </a:pPr>
             <a:r>
@@ -14221,7 +14710,7 @@
           <a:bodyPr wrap="square" rtlCol="0" anchor="t"/>
           <a:lstStyle/>
           <a:p>
-            <a:pPr indent="0" marL="0">
+            <a:pPr marL="0" indent="0">
               <a:lnSpc>
                 <a:spcPct val="100000"/>
               </a:lnSpc>
@@ -14263,6 +14752,13 @@
           </a:solidFill>
           <a:ln/>
         </p:spPr>
+        <p:txBody>
+          <a:bodyPr/>
+          <a:lstStyle/>
+          <a:p>
+            <a:endParaRPr lang="en-US"/>
+          </a:p>
+        </p:txBody>
       </p:sp>
       <p:sp>
         <p:nvSpPr>
@@ -14285,7 +14781,7 @@
           <a:bodyPr wrap="square" rtlCol="0" anchor="ctr"/>
           <a:lstStyle/>
           <a:p>
-            <a:pPr algn="ctr" indent="0" marL="0">
+            <a:pPr marL="0" indent="0" algn="ctr">
               <a:buNone/>
             </a:pPr>
             <a:r>
@@ -14322,6 +14818,13 @@
           </a:solidFill>
           <a:ln/>
         </p:spPr>
+        <p:txBody>
+          <a:bodyPr/>
+          <a:lstStyle/>
+          <a:p>
+            <a:endParaRPr lang="en-US"/>
+          </a:p>
+        </p:txBody>
       </p:sp>
       <p:sp>
         <p:nvSpPr>
@@ -14344,6 +14847,13 @@
           </a:solidFill>
           <a:ln/>
         </p:spPr>
+        <p:txBody>
+          <a:bodyPr/>
+          <a:lstStyle/>
+          <a:p>
+            <a:endParaRPr lang="en-US"/>
+          </a:p>
+        </p:txBody>
       </p:sp>
       <p:sp>
         <p:nvSpPr>
@@ -14366,7 +14876,7 @@
           <a:bodyPr wrap="square" rtlCol="0" anchor="ctr"/>
           <a:lstStyle/>
           <a:p>
-            <a:pPr algn="ctr" indent="0" marL="0">
+            <a:pPr marL="0" indent="0" algn="ctr">
               <a:buNone/>
             </a:pPr>
             <a:r>
@@ -14405,7 +14915,7 @@
           <a:bodyPr wrap="square" rtlCol="0" anchor="ctr"/>
           <a:lstStyle/>
           <a:p>
-            <a:pPr algn="ctr" indent="0" marL="0">
+            <a:pPr marL="0" indent="0" algn="ctr">
               <a:buNone/>
             </a:pPr>
             <a:r>
@@ -14444,6 +14954,13 @@
           </a:solidFill>
           <a:ln/>
         </p:spPr>
+        <p:txBody>
+          <a:bodyPr/>
+          <a:lstStyle/>
+          <a:p>
+            <a:endParaRPr lang="en-US"/>
+          </a:p>
+        </p:txBody>
       </p:sp>
       <p:sp>
         <p:nvSpPr>
@@ -14464,6 +14981,13 @@
           </a:solidFill>
           <a:ln/>
         </p:spPr>
+        <p:txBody>
+          <a:bodyPr/>
+          <a:lstStyle/>
+          <a:p>
+            <a:endParaRPr lang="en-US"/>
+          </a:p>
+        </p:txBody>
       </p:sp>
       <p:sp>
         <p:nvSpPr>
@@ -14486,7 +15010,7 @@
           <a:bodyPr wrap="square" rtlCol="0" anchor="ctr"/>
           <a:lstStyle/>
           <a:p>
-            <a:pPr algn="ctr" indent="0" marL="0">
+            <a:pPr marL="0" indent="0" algn="ctr">
               <a:buNone/>
             </a:pPr>
             <a:r>
@@ -14525,7 +15049,7 @@
           <a:bodyPr wrap="square" rtlCol="0" anchor="ctr"/>
           <a:lstStyle/>
           <a:p>
-            <a:pPr indent="0" marL="0">
+            <a:pPr marL="0" indent="0">
               <a:buNone/>
             </a:pPr>
             <a:r>
@@ -14564,7 +15088,7 @@
           <a:bodyPr wrap="square" rtlCol="0" anchor="t"/>
           <a:lstStyle/>
           <a:p>
-            <a:pPr indent="0" marL="0">
+            <a:pPr marL="0" indent="0">
               <a:lnSpc>
                 <a:spcPct val="100000"/>
               </a:lnSpc>
@@ -14606,6 +15130,13 @@
           </a:solidFill>
           <a:ln/>
         </p:spPr>
+        <p:txBody>
+          <a:bodyPr/>
+          <a:lstStyle/>
+          <a:p>
+            <a:endParaRPr lang="en-US"/>
+          </a:p>
+        </p:txBody>
       </p:sp>
       <p:sp>
         <p:nvSpPr>
@@ -14628,7 +15159,7 @@
           <a:bodyPr wrap="square" rtlCol="0" anchor="ctr"/>
           <a:lstStyle/>
           <a:p>
-            <a:pPr algn="ctr" indent="0" marL="0">
+            <a:pPr marL="0" indent="0" algn="ctr">
               <a:buNone/>
             </a:pPr>
             <a:r>
@@ -14665,6 +15196,13 @@
           </a:solidFill>
           <a:ln/>
         </p:spPr>
+        <p:txBody>
+          <a:bodyPr/>
+          <a:lstStyle/>
+          <a:p>
+            <a:endParaRPr lang="en-US"/>
+          </a:p>
+        </p:txBody>
       </p:sp>
       <p:sp>
         <p:nvSpPr>
@@ -14687,6 +15225,13 @@
           </a:solidFill>
           <a:ln/>
         </p:spPr>
+        <p:txBody>
+          <a:bodyPr/>
+          <a:lstStyle/>
+          <a:p>
+            <a:endParaRPr lang="en-US"/>
+          </a:p>
+        </p:txBody>
       </p:sp>
       <p:sp>
         <p:nvSpPr>
@@ -14709,7 +15254,7 @@
           <a:bodyPr wrap="square" rtlCol="0" anchor="ctr"/>
           <a:lstStyle/>
           <a:p>
-            <a:pPr algn="ctr" indent="0" marL="0">
+            <a:pPr marL="0" indent="0" algn="ctr">
               <a:buNone/>
             </a:pPr>
             <a:r>
@@ -14748,7 +15293,7 @@
           <a:bodyPr wrap="square" rtlCol="0" anchor="ctr"/>
           <a:lstStyle/>
           <a:p>
-            <a:pPr algn="ctr" indent="0" marL="0">
+            <a:pPr marL="0" indent="0" algn="ctr">
               <a:buNone/>
             </a:pPr>
             <a:r>
@@ -14787,6 +15332,13 @@
           </a:solidFill>
           <a:ln/>
         </p:spPr>
+        <p:txBody>
+          <a:bodyPr/>
+          <a:lstStyle/>
+          <a:p>
+            <a:endParaRPr lang="en-US"/>
+          </a:p>
+        </p:txBody>
       </p:sp>
       <p:sp>
         <p:nvSpPr>
@@ -14807,6 +15359,13 @@
           </a:solidFill>
           <a:ln/>
         </p:spPr>
+        <p:txBody>
+          <a:bodyPr/>
+          <a:lstStyle/>
+          <a:p>
+            <a:endParaRPr lang="en-US"/>
+          </a:p>
+        </p:txBody>
       </p:sp>
       <p:sp>
         <p:nvSpPr>
@@ -14829,7 +15388,7 @@
           <a:bodyPr wrap="square" rtlCol="0" anchor="ctr"/>
           <a:lstStyle/>
           <a:p>
-            <a:pPr algn="ctr" indent="0" marL="0">
+            <a:pPr marL="0" indent="0" algn="ctr">
               <a:buNone/>
             </a:pPr>
             <a:r>
@@ -14868,7 +15427,7 @@
           <a:bodyPr wrap="square" rtlCol="0" anchor="ctr"/>
           <a:lstStyle/>
           <a:p>
-            <a:pPr indent="0" marL="0">
+            <a:pPr marL="0" indent="0">
               <a:buNone/>
             </a:pPr>
             <a:r>
@@ -14907,7 +15466,7 @@
           <a:bodyPr wrap="square" rtlCol="0" anchor="t"/>
           <a:lstStyle/>
           <a:p>
-            <a:pPr indent="0" marL="0">
+            <a:pPr marL="0" indent="0">
               <a:lnSpc>
                 <a:spcPct val="100000"/>
               </a:lnSpc>
@@ -14949,6 +15508,13 @@
           </a:solidFill>
           <a:ln/>
         </p:spPr>
+        <p:txBody>
+          <a:bodyPr/>
+          <a:lstStyle/>
+          <a:p>
+            <a:endParaRPr lang="en-US"/>
+          </a:p>
+        </p:txBody>
       </p:sp>
       <p:sp>
         <p:nvSpPr>
@@ -14971,7 +15537,7 @@
           <a:bodyPr wrap="square" rtlCol="0" anchor="ctr"/>
           <a:lstStyle/>
           <a:p>
-            <a:pPr algn="ctr" indent="0" marL="0">
+            <a:pPr marL="0" indent="0" algn="ctr">
               <a:buNone/>
             </a:pPr>
             <a:r>
@@ -15008,6 +15574,13 @@
           </a:solidFill>
           <a:ln/>
         </p:spPr>
+        <p:txBody>
+          <a:bodyPr/>
+          <a:lstStyle/>
+          <a:p>
+            <a:endParaRPr lang="en-US"/>
+          </a:p>
+        </p:txBody>
       </p:sp>
       <p:sp>
         <p:nvSpPr>
@@ -15030,6 +15603,13 @@
           </a:solidFill>
           <a:ln/>
         </p:spPr>
+        <p:txBody>
+          <a:bodyPr/>
+          <a:lstStyle/>
+          <a:p>
+            <a:endParaRPr lang="en-US"/>
+          </a:p>
+        </p:txBody>
       </p:sp>
       <p:sp>
         <p:nvSpPr>
@@ -15052,7 +15632,7 @@
           <a:bodyPr wrap="square" rtlCol="0" anchor="ctr"/>
           <a:lstStyle/>
           <a:p>
-            <a:pPr algn="ctr" indent="0" marL="0">
+            <a:pPr marL="0" indent="0" algn="ctr">
               <a:buNone/>
             </a:pPr>
             <a:r>
@@ -15091,7 +15671,7 @@
           <a:bodyPr wrap="square" rtlCol="0" anchor="ctr"/>
           <a:lstStyle/>
           <a:p>
-            <a:pPr algn="ctr" indent="0" marL="0">
+            <a:pPr marL="0" indent="0" algn="ctr">
               <a:buNone/>
             </a:pPr>
             <a:r>
@@ -15125,6 +15705,7 @@
         <a:solidFill>
           <a:srgbClr val="FFFFFF"/>
         </a:solidFill>
+        <a:effectLst/>
       </p:bgPr>
     </p:bg>
     <p:spTree>
@@ -15162,11 +15743,11 @@
           <a:bodyPr wrap="square" rtlCol="0" anchor="ctr"/>
           <a:lstStyle/>
           <a:p>
-            <a:pPr indent="0" marL="0">
-              <a:buNone/>
-            </a:pPr>
-            <a:r>
-              <a:rPr lang="en-US" sz="1250" b="1" spc="200" kern="0" dirty="0">
+            <a:pPr marL="0" indent="0">
+              <a:buNone/>
+            </a:pPr>
+            <a:r>
+              <a:rPr lang="en-US" sz="1250" b="1" kern="0" spc="200" dirty="0">
                 <a:solidFill>
                   <a:srgbClr val="1E2761"/>
                 </a:solidFill>
@@ -15201,7 +15782,7 @@
           <a:bodyPr wrap="square" rtlCol="0" anchor="ctr"/>
           <a:lstStyle/>
           <a:p>
-            <a:pPr indent="0" marL="0">
+            <a:pPr marL="0" indent="0">
               <a:buNone/>
             </a:pPr>
             <a:r>
@@ -15240,7 +15821,7 @@
           <a:bodyPr wrap="square" rtlCol="0" anchor="ctr"/>
           <a:lstStyle/>
           <a:p>
-            <a:pPr indent="0" marL="0">
+            <a:pPr marL="0" indent="0">
               <a:buNone/>
             </a:pPr>
             <a:r>
@@ -15279,7 +15860,7 @@
           <a:bodyPr wrap="square" rtlCol="0" anchor="ctr"/>
           <a:lstStyle/>
           <a:p>
-            <a:pPr algn="r" indent="0" marL="0">
+            <a:pPr marL="0" indent="0" algn="r">
               <a:buNone/>
             </a:pPr>
             <a:r>
@@ -15318,6 +15899,13 @@
           </a:solidFill>
           <a:ln/>
         </p:spPr>
+        <p:txBody>
+          <a:bodyPr/>
+          <a:lstStyle/>
+          <a:p>
+            <a:endParaRPr lang="en-US"/>
+          </a:p>
+        </p:txBody>
       </p:sp>
       <p:sp>
         <p:nvSpPr>
@@ -15340,7 +15928,7 @@
           <a:bodyPr wrap="square" rtlCol="0" anchor="ctr"/>
           <a:lstStyle/>
           <a:p>
-            <a:pPr indent="0" marL="0">
+            <a:pPr marL="0" indent="0">
               <a:buNone/>
             </a:pPr>
             <a:r>
@@ -15379,6 +15967,13 @@
           </a:solidFill>
           <a:ln/>
         </p:spPr>
+        <p:txBody>
+          <a:bodyPr/>
+          <a:lstStyle/>
+          <a:p>
+            <a:endParaRPr lang="en-US"/>
+          </a:p>
+        </p:txBody>
       </p:sp>
       <p:sp>
         <p:nvSpPr>
@@ -15401,7 +15996,7 @@
           <a:bodyPr wrap="square" rtlCol="0" anchor="ctr"/>
           <a:lstStyle/>
           <a:p>
-            <a:pPr algn="ctr" indent="0" marL="0">
+            <a:pPr marL="0" indent="0" algn="ctr">
               <a:buNone/>
             </a:pPr>
             <a:r>
@@ -15440,7 +16035,7 @@
           <a:bodyPr wrap="square" rtlCol="0" anchor="t"/>
           <a:lstStyle/>
           <a:p>
-            <a:pPr indent="0" marL="0">
+            <a:pPr marL="0" indent="0">
               <a:lnSpc>
                 <a:spcPct val="100000"/>
               </a:lnSpc>
@@ -15482,7 +16077,7 @@
           <a:bodyPr wrap="square" rtlCol="0" anchor="t"/>
           <a:lstStyle/>
           <a:p>
-            <a:pPr indent="0" marL="0">
+            <a:pPr marL="0" indent="0">
               <a:lnSpc>
                 <a:spcPct val="100000"/>
               </a:lnSpc>
@@ -15524,6 +16119,13 @@
           </a:solidFill>
           <a:ln/>
         </p:spPr>
+        <p:txBody>
+          <a:bodyPr/>
+          <a:lstStyle/>
+          <a:p>
+            <a:endParaRPr lang="en-US"/>
+          </a:p>
+        </p:txBody>
       </p:sp>
       <p:sp>
         <p:nvSpPr>
@@ -15546,7 +16148,7 @@
           <a:bodyPr wrap="square" rtlCol="0" anchor="ctr"/>
           <a:lstStyle/>
           <a:p>
-            <a:pPr indent="0" marL="0">
+            <a:pPr marL="0" indent="0">
               <a:buNone/>
             </a:pPr>
             <a:r>
@@ -15585,6 +16187,13 @@
           </a:solidFill>
           <a:ln/>
         </p:spPr>
+        <p:txBody>
+          <a:bodyPr/>
+          <a:lstStyle/>
+          <a:p>
+            <a:endParaRPr lang="en-US"/>
+          </a:p>
+        </p:txBody>
       </p:sp>
       <p:sp>
         <p:nvSpPr>
@@ -15607,7 +16216,7 @@
           <a:bodyPr wrap="square" rtlCol="0" anchor="ctr"/>
           <a:lstStyle/>
           <a:p>
-            <a:pPr algn="ctr" indent="0" marL="0">
+            <a:pPr marL="0" indent="0" algn="ctr">
               <a:buNone/>
             </a:pPr>
             <a:r>
@@ -15646,7 +16255,7 @@
           <a:bodyPr wrap="square" rtlCol="0" anchor="t"/>
           <a:lstStyle/>
           <a:p>
-            <a:pPr indent="0" marL="0">
+            <a:pPr marL="0" indent="0">
               <a:lnSpc>
                 <a:spcPct val="100000"/>
               </a:lnSpc>
@@ -15688,7 +16297,7 @@
           <a:bodyPr wrap="square" rtlCol="0" anchor="t"/>
           <a:lstStyle/>
           <a:p>
-            <a:pPr indent="0" marL="0">
+            <a:pPr marL="0" indent="0">
               <a:lnSpc>
                 <a:spcPct val="100000"/>
               </a:lnSpc>
@@ -15730,6 +16339,13 @@
           </a:solidFill>
           <a:ln/>
         </p:spPr>
+        <p:txBody>
+          <a:bodyPr/>
+          <a:lstStyle/>
+          <a:p>
+            <a:endParaRPr lang="en-US"/>
+          </a:p>
+        </p:txBody>
       </p:sp>
       <p:sp>
         <p:nvSpPr>
@@ -15752,7 +16368,7 @@
           <a:bodyPr wrap="square" rtlCol="0" anchor="ctr"/>
           <a:lstStyle/>
           <a:p>
-            <a:pPr indent="0" marL="0">
+            <a:pPr marL="0" indent="0">
               <a:buNone/>
             </a:pPr>
             <a:r>
@@ -15791,6 +16407,13 @@
           </a:solidFill>
           <a:ln/>
         </p:spPr>
+        <p:txBody>
+          <a:bodyPr/>
+          <a:lstStyle/>
+          <a:p>
+            <a:endParaRPr lang="en-US"/>
+          </a:p>
+        </p:txBody>
       </p:sp>
       <p:sp>
         <p:nvSpPr>
@@ -15813,7 +16436,7 @@
           <a:bodyPr wrap="square" rtlCol="0" anchor="ctr"/>
           <a:lstStyle/>
           <a:p>
-            <a:pPr algn="ctr" indent="0" marL="0">
+            <a:pPr marL="0" indent="0" algn="ctr">
               <a:buNone/>
             </a:pPr>
             <a:r>
@@ -15852,7 +16475,7 @@
           <a:bodyPr wrap="square" rtlCol="0" anchor="t"/>
           <a:lstStyle/>
           <a:p>
-            <a:pPr indent="0" marL="0">
+            <a:pPr marL="0" indent="0">
               <a:lnSpc>
                 <a:spcPct val="100000"/>
               </a:lnSpc>
@@ -15894,7 +16517,7 @@
           <a:bodyPr wrap="square" rtlCol="0" anchor="t"/>
           <a:lstStyle/>
           <a:p>
-            <a:pPr indent="0" marL="0">
+            <a:pPr marL="0" indent="0">
               <a:lnSpc>
                 <a:spcPct val="100000"/>
               </a:lnSpc>
@@ -15936,6 +16559,13 @@
           </a:solidFill>
           <a:ln/>
         </p:spPr>
+        <p:txBody>
+          <a:bodyPr/>
+          <a:lstStyle/>
+          <a:p>
+            <a:endParaRPr lang="en-US"/>
+          </a:p>
+        </p:txBody>
       </p:sp>
       <p:sp>
         <p:nvSpPr>
@@ -15958,7 +16588,7 @@
           <a:bodyPr wrap="square" rtlCol="0" anchor="ctr"/>
           <a:lstStyle/>
           <a:p>
-            <a:pPr indent="0" marL="0">
+            <a:pPr marL="0" indent="0">
               <a:buNone/>
             </a:pPr>
             <a:r>
@@ -15997,6 +16627,13 @@
           </a:solidFill>
           <a:ln/>
         </p:spPr>
+        <p:txBody>
+          <a:bodyPr/>
+          <a:lstStyle/>
+          <a:p>
+            <a:endParaRPr lang="en-US"/>
+          </a:p>
+        </p:txBody>
       </p:sp>
       <p:sp>
         <p:nvSpPr>
@@ -16019,7 +16656,7 @@
           <a:bodyPr wrap="square" rtlCol="0" anchor="ctr"/>
           <a:lstStyle/>
           <a:p>
-            <a:pPr algn="ctr" indent="0" marL="0">
+            <a:pPr marL="0" indent="0" algn="ctr">
               <a:buNone/>
             </a:pPr>
             <a:r>
@@ -16058,7 +16695,7 @@
           <a:bodyPr wrap="square" rtlCol="0" anchor="t"/>
           <a:lstStyle/>
           <a:p>
-            <a:pPr indent="0" marL="0">
+            <a:pPr marL="0" indent="0">
               <a:lnSpc>
                 <a:spcPct val="100000"/>
               </a:lnSpc>
@@ -16100,7 +16737,7 @@
           <a:bodyPr wrap="square" rtlCol="0" anchor="t"/>
           <a:lstStyle/>
           <a:p>
-            <a:pPr indent="0" marL="0">
+            <a:pPr marL="0" indent="0">
               <a:lnSpc>
                 <a:spcPct val="100000"/>
               </a:lnSpc>
@@ -16142,6 +16779,13 @@
           </a:solidFill>
           <a:ln/>
         </p:spPr>
+        <p:txBody>
+          <a:bodyPr/>
+          <a:lstStyle/>
+          <a:p>
+            <a:endParaRPr lang="en-US"/>
+          </a:p>
+        </p:txBody>
       </p:sp>
       <p:sp>
         <p:nvSpPr>
@@ -16164,7 +16808,7 @@
           <a:bodyPr wrap="square" rtlCol="0" anchor="ctr"/>
           <a:lstStyle/>
           <a:p>
-            <a:pPr indent="0" marL="0">
+            <a:pPr marL="0" indent="0">
               <a:buNone/>
             </a:pPr>
             <a:r>
@@ -16203,6 +16847,13 @@
           </a:solidFill>
           <a:ln/>
         </p:spPr>
+        <p:txBody>
+          <a:bodyPr/>
+          <a:lstStyle/>
+          <a:p>
+            <a:endParaRPr lang="en-US"/>
+          </a:p>
+        </p:txBody>
       </p:sp>
       <p:sp>
         <p:nvSpPr>
@@ -16225,7 +16876,7 @@
           <a:bodyPr wrap="square" rtlCol="0" anchor="ctr"/>
           <a:lstStyle/>
           <a:p>
-            <a:pPr algn="ctr" indent="0" marL="0">
+            <a:pPr marL="0" indent="0" algn="ctr">
               <a:buNone/>
             </a:pPr>
             <a:r>
@@ -16264,7 +16915,7 @@
           <a:bodyPr wrap="square" rtlCol="0" anchor="t"/>
           <a:lstStyle/>
           <a:p>
-            <a:pPr indent="0" marL="0">
+            <a:pPr marL="0" indent="0">
               <a:lnSpc>
                 <a:spcPct val="100000"/>
               </a:lnSpc>
@@ -16306,7 +16957,7 @@
           <a:bodyPr wrap="square" rtlCol="0" anchor="t"/>
           <a:lstStyle/>
           <a:p>
-            <a:pPr indent="0" marL="0">
+            <a:pPr marL="0" indent="0">
               <a:lnSpc>
                 <a:spcPct val="100000"/>
               </a:lnSpc>
@@ -16348,6 +16999,13 @@
           </a:solidFill>
           <a:ln/>
         </p:spPr>
+        <p:txBody>
+          <a:bodyPr/>
+          <a:lstStyle/>
+          <a:p>
+            <a:endParaRPr lang="en-US"/>
+          </a:p>
+        </p:txBody>
       </p:sp>
       <p:sp>
         <p:nvSpPr>
@@ -16370,7 +17028,7 @@
           <a:bodyPr wrap="square" rtlCol="0" anchor="ctr"/>
           <a:lstStyle/>
           <a:p>
-            <a:pPr indent="0" marL="0">
+            <a:pPr marL="0" indent="0">
               <a:buNone/>
             </a:pPr>
             <a:r>
@@ -16409,6 +17067,13 @@
           </a:solidFill>
           <a:ln/>
         </p:spPr>
+        <p:txBody>
+          <a:bodyPr/>
+          <a:lstStyle/>
+          <a:p>
+            <a:endParaRPr lang="en-US"/>
+          </a:p>
+        </p:txBody>
       </p:sp>
       <p:sp>
         <p:nvSpPr>
@@ -16431,7 +17096,7 @@
           <a:bodyPr wrap="square" rtlCol="0" anchor="ctr"/>
           <a:lstStyle/>
           <a:p>
-            <a:pPr algn="ctr" indent="0" marL="0">
+            <a:pPr marL="0" indent="0" algn="ctr">
               <a:buNone/>
             </a:pPr>
             <a:r>
@@ -16470,7 +17135,7 @@
           <a:bodyPr wrap="square" rtlCol="0" anchor="t"/>
           <a:lstStyle/>
           <a:p>
-            <a:pPr indent="0" marL="0">
+            <a:pPr marL="0" indent="0">
               <a:lnSpc>
                 <a:spcPct val="100000"/>
               </a:lnSpc>
@@ -16507,6 +17172,7 @@
         <a:solidFill>
           <a:srgbClr val="FFFFFF"/>
         </a:solidFill>
+        <a:effectLst/>
       </p:bgPr>
     </p:bg>
     <p:spTree>
@@ -16544,11 +17210,11 @@
           <a:bodyPr wrap="square" rtlCol="0" anchor="ctr"/>
           <a:lstStyle/>
           <a:p>
-            <a:pPr indent="0" marL="0">
-              <a:buNone/>
-            </a:pPr>
-            <a:r>
-              <a:rPr lang="en-US" sz="1250" b="1" spc="200" kern="0" dirty="0">
+            <a:pPr marL="0" indent="0">
+              <a:buNone/>
+            </a:pPr>
+            <a:r>
+              <a:rPr lang="en-US" sz="1250" b="1" kern="0" spc="200" dirty="0">
                 <a:solidFill>
                   <a:srgbClr val="1E2761"/>
                 </a:solidFill>
@@ -16583,7 +17249,7 @@
           <a:bodyPr wrap="square" rtlCol="0" anchor="ctr"/>
           <a:lstStyle/>
           <a:p>
-            <a:pPr indent="0" marL="0">
+            <a:pPr marL="0" indent="0">
               <a:buNone/>
             </a:pPr>
             <a:r>
@@ -16622,7 +17288,7 @@
           <a:bodyPr wrap="square" rtlCol="0" anchor="ctr"/>
           <a:lstStyle/>
           <a:p>
-            <a:pPr indent="0" marL="0">
+            <a:pPr marL="0" indent="0">
               <a:buNone/>
             </a:pPr>
             <a:r>
@@ -16661,7 +17327,7 @@
           <a:bodyPr wrap="square" rtlCol="0" anchor="ctr"/>
           <a:lstStyle/>
           <a:p>
-            <a:pPr algn="r" indent="0" marL="0">
+            <a:pPr marL="0" indent="0" algn="r">
               <a:buNone/>
             </a:pPr>
             <a:r>
@@ -16700,6 +17366,13 @@
           </a:solidFill>
           <a:ln/>
         </p:spPr>
+        <p:txBody>
+          <a:bodyPr/>
+          <a:lstStyle/>
+          <a:p>
+            <a:endParaRPr lang="en-US"/>
+          </a:p>
+        </p:txBody>
       </p:sp>
       <p:sp>
         <p:nvSpPr>
@@ -16722,7 +17395,7 @@
           <a:bodyPr wrap="square" rtlCol="0" anchor="ctr"/>
           <a:lstStyle/>
           <a:p>
-            <a:pPr indent="0" marL="0">
+            <a:pPr marL="0" indent="0">
               <a:buNone/>
             </a:pPr>
             <a:r>
@@ -16761,7 +17434,7 @@
           <a:bodyPr wrap="square" rtlCol="0" anchor="t"/>
           <a:lstStyle/>
           <a:p>
-            <a:pPr indent="0" marL="0">
+            <a:pPr marL="0" indent="0">
               <a:lnSpc>
                 <a:spcPct val="120000"/>
               </a:lnSpc>
@@ -16778,12 +17451,6 @@
               </a:rPr>
               <a:t>Camera IP &amp; tài khoản quản trị</a:t>
             </a:r>
-            <a:pPr indent="0" marL="0">
-              <a:lnSpc>
-                <a:spcPct val="120000"/>
-              </a:lnSpc>
-              <a:buNone/>
-            </a:pPr>
             <a:r>
               <a:rPr lang="en-US" sz="1200" dirty="0">
                 <a:solidFill>
@@ -16796,12 +17463,6 @@
               <a:t> là 2 tài sản nguy cơ cao nhất — thường bị bỏ quên mật khẩu mặc định hoặc thiếu xác thực đa yếu tố (lỗi phổ biến nhất theo OWASP IoT Top 10).
 </a:t>
             </a:r>
-            <a:pPr indent="0" marL="0">
-              <a:lnSpc>
-                <a:spcPct val="120000"/>
-              </a:lnSpc>
-              <a:buNone/>
-            </a:pPr>
             <a:r>
               <a:rPr lang="en-US" sz="1200" b="1" dirty="0">
                 <a:solidFill>
@@ -16813,12 +17474,6 @@
               </a:rPr>
               <a:t>Router mở cổng ra Internet</a:t>
             </a:r>
-            <a:pPr indent="0" marL="0">
-              <a:lnSpc>
-                <a:spcPct val="120000"/>
-              </a:lnSpc>
-              <a:buNone/>
-            </a:pPr>
             <a:r>
               <a:rPr lang="en-US" sz="1200" dirty="0">
                 <a:solidFill>
@@ -16829,16 +17484,10 @@
                 <a:cs typeface="Calibri" pitchFamily="34" charset="-120"/>
               </a:rPr>
               <a:t> để tiện truy cập từ xa là nguyên nhân gốc khiến thiết bị dễ bị quét/tấn công bởi botnet.
-</a:t>
-            </a:r>
-            <a:pPr indent="0" marL="0">
-              <a:lnSpc>
-                <a:spcPct val="120000"/>
-              </a:lnSpc>
-              <a:buNone/>
-            </a:pPr>
-            <a:r>
-              <a:rPr lang="en-US" sz="1200" dirty="0">
+Phần lớn lỗ hổng </a:t>
+            </a:r>
+            <a:r>
+              <a:rPr lang="en-US" sz="1200" b="1" dirty="0">
                 <a:solidFill>
                   <a:srgbClr val="24272E"/>
                 </a:solidFill>
@@ -16846,31 +17495,8 @@
                 <a:ea typeface="Calibri" pitchFamily="34" charset="-122"/>
                 <a:cs typeface="Calibri" pitchFamily="34" charset="-120"/>
               </a:rPr>
-              <a:t>Phần lớn lỗ hổng </a:t>
-            </a:r>
-            <a:pPr indent="0" marL="0">
-              <a:lnSpc>
-                <a:spcPct val="120000"/>
-              </a:lnSpc>
-              <a:buNone/>
-            </a:pPr>
-            <a:r>
-              <a:rPr lang="en-US" sz="1200" b="1" dirty="0">
-                <a:solidFill>
-                  <a:srgbClr val="24272E"/>
-                </a:solidFill>
-                <a:latin typeface="Calibri" pitchFamily="34" charset="0"/>
-                <a:ea typeface="Calibri" pitchFamily="34" charset="-122"/>
-                <a:cs typeface="Calibri" pitchFamily="34" charset="-120"/>
-              </a:rPr>
               <a:t>không đến từ công nghệ phức tạp mà từ thói quen cấu hình</a:t>
             </a:r>
-            <a:pPr indent="0" marL="0">
-              <a:lnSpc>
-                <a:spcPct val="120000"/>
-              </a:lnSpc>
-              <a:buNone/>
-            </a:pPr>
             <a:r>
               <a:rPr lang="en-US" sz="1200" dirty="0">
                 <a:solidFill>
@@ -16907,6 +17533,13 @@
           </a:solidFill>
           <a:ln/>
         </p:spPr>
+        <p:txBody>
+          <a:bodyPr/>
+          <a:lstStyle/>
+          <a:p>
+            <a:endParaRPr lang="en-US"/>
+          </a:p>
+        </p:txBody>
       </p:sp>
       <p:sp>
         <p:nvSpPr>
@@ -16929,7 +17562,7 @@
           <a:bodyPr wrap="square" rtlCol="0" anchor="ctr"/>
           <a:lstStyle/>
           <a:p>
-            <a:pPr indent="0" marL="0">
+            <a:pPr marL="0" indent="0">
               <a:buNone/>
             </a:pPr>
             <a:r>
@@ -16968,7 +17601,7 @@
           <a:bodyPr wrap="square" rtlCol="0" anchor="t"/>
           <a:lstStyle/>
           <a:p>
-            <a:pPr indent="0" marL="0">
+            <a:pPr marL="0" indent="0">
               <a:lnSpc>
                 <a:spcPct val="115000"/>
               </a:lnSpc>
@@ -17010,6 +17643,13 @@
           </a:solidFill>
           <a:ln/>
         </p:spPr>
+        <p:txBody>
+          <a:bodyPr/>
+          <a:lstStyle/>
+          <a:p>
+            <a:endParaRPr lang="en-US"/>
+          </a:p>
+        </p:txBody>
       </p:sp>
       <p:sp>
         <p:nvSpPr>
@@ -17032,7 +17672,7 @@
           <a:bodyPr wrap="square" rtlCol="0" anchor="ctr"/>
           <a:lstStyle/>
           <a:p>
-            <a:pPr indent="0" marL="0">
+            <a:pPr marL="0" indent="0">
               <a:buNone/>
             </a:pPr>
             <a:r>
@@ -17071,7 +17711,7 @@
           <a:bodyPr wrap="square" rtlCol="0" anchor="t"/>
           <a:lstStyle/>
           <a:p>
-            <a:pPr indent="0" marL="0">
+            <a:pPr marL="0" indent="0">
               <a:lnSpc>
                 <a:spcPct val="120000"/>
               </a:lnSpc>
@@ -17091,7 +17731,7 @@
             <a:endParaRPr lang="en-US" sz="1150" dirty="0"/>
           </a:p>
           <a:p>
-            <a:pPr indent="0" marL="0">
+            <a:pPr marL="0" indent="0">
               <a:lnSpc>
                 <a:spcPct val="120000"/>
               </a:lnSpc>
@@ -17111,7 +17751,7 @@
             <a:endParaRPr lang="en-US" sz="1150" dirty="0"/>
           </a:p>
           <a:p>
-            <a:pPr indent="0" marL="0">
+            <a:pPr marL="0" indent="0">
               <a:lnSpc>
                 <a:spcPct val="120000"/>
               </a:lnSpc>
@@ -17433,4 +18073,319 @@
     </a:ext>
   </a:extLst>
 </a:theme>
+</file>
+
+<file path=ppt/theme/theme2.xml><?xml version="1.0" encoding="utf-8"?>
+<a:theme xmlns:a="http://schemas.openxmlformats.org/drawingml/2006/main" name="Office Theme">
+  <a:themeElements>
+    <a:clrScheme name="Office">
+      <a:dk1>
+        <a:sysClr val="windowText" lastClr="000000"/>
+      </a:dk1>
+      <a:lt1>
+        <a:sysClr val="window" lastClr="FFFFFF"/>
+      </a:lt1>
+      <a:dk2>
+        <a:srgbClr val="0E2841"/>
+      </a:dk2>
+      <a:lt2>
+        <a:srgbClr val="E8E8E8"/>
+      </a:lt2>
+      <a:accent1>
+        <a:srgbClr val="156082"/>
+      </a:accent1>
+      <a:accent2>
+        <a:srgbClr val="E97132"/>
+      </a:accent2>
+      <a:accent3>
+        <a:srgbClr val="196B24"/>
+      </a:accent3>
+      <a:accent4>
+        <a:srgbClr val="0F9ED5"/>
+      </a:accent4>
+      <a:accent5>
+        <a:srgbClr val="A02B93"/>
+      </a:accent5>
+      <a:accent6>
+        <a:srgbClr val="4EA72E"/>
+      </a:accent6>
+      <a:hlink>
+        <a:srgbClr val="467886"/>
+      </a:hlink>
+      <a:folHlink>
+        <a:srgbClr val="96607D"/>
+      </a:folHlink>
+    </a:clrScheme>
+    <a:fontScheme name="Office">
+      <a:majorFont>
+        <a:latin typeface="Aptos Display" panose="02110004020202020204"/>
+        <a:ea typeface=""/>
+        <a:cs typeface=""/>
+        <a:font script="Jpan" typeface="游ゴシック Light"/>
+        <a:font script="Hang" typeface="맑은 고딕"/>
+        <a:font script="Hans" typeface="等线 Light"/>
+        <a:font script="Hant" typeface="新細明體"/>
+        <a:font script="Arab" typeface="Times New Roman"/>
+        <a:font script="Hebr" typeface="Times New Roman"/>
+        <a:font script="Thai" typeface="Angsana New"/>
+        <a:font script="Ethi" typeface="Nyala"/>
+        <a:font script="Beng" typeface="Vrinda"/>
+        <a:font script="Gujr" typeface="Shruti"/>
+        <a:font script="Khmr" typeface="MoolBoran"/>
+        <a:font script="Knda" typeface="Tunga"/>
+        <a:font script="Guru" typeface="Raavi"/>
+        <a:font script="Cans" typeface="Euphemia"/>
+        <a:font script="Cher" typeface="Plantagenet Cherokee"/>
+        <a:font script="Yiii" typeface="Microsoft Yi Baiti"/>
+        <a:font script="Tibt" typeface="Microsoft Himalaya"/>
+        <a:font script="Thaa" typeface="MV Boli"/>
+        <a:font script="Deva" typeface="Mangal"/>
+        <a:font script="Telu" typeface="Gautami"/>
+        <a:font script="Taml" typeface="Latha"/>
+        <a:font script="Syrc" typeface="Estrangelo Edessa"/>
+        <a:font script="Orya" typeface="Kalinga"/>
+        <a:font script="Mlym" typeface="Kartika"/>
+        <a:font script="Laoo" typeface="DokChampa"/>
+        <a:font script="Sinh" typeface="Iskoola Pota"/>
+        <a:font script="Mong" typeface="Mongolian Baiti"/>
+        <a:font script="Viet" typeface="Times New Roman"/>
+        <a:font script="Uigh" typeface="Microsoft Uighur"/>
+        <a:font script="Geor" typeface="Sylfaen"/>
+        <a:font script="Armn" typeface="Arial"/>
+        <a:font script="Bugi" typeface="Leelawadee UI"/>
+        <a:font script="Bopo" typeface="Microsoft JhengHei"/>
+        <a:font script="Java" typeface="Javanese Text"/>
+        <a:font script="Lisu" typeface="Segoe UI"/>
+        <a:font script="Mymr" typeface="Myanmar Text"/>
+        <a:font script="Nkoo" typeface="Ebrima"/>
+        <a:font script="Olck" typeface="Nirmala UI"/>
+        <a:font script="Osma" typeface="Ebrima"/>
+        <a:font script="Phag" typeface="Phagspa"/>
+        <a:font script="Syrn" typeface="Estrangelo Edessa"/>
+        <a:font script="Syrj" typeface="Estrangelo Edessa"/>
+        <a:font script="Syre" typeface="Estrangelo Edessa"/>
+        <a:font script="Sora" typeface="Nirmala UI"/>
+        <a:font script="Tale" typeface="Microsoft Tai Le"/>
+        <a:font script="Talu" typeface="Microsoft New Tai Lue"/>
+        <a:font script="Tfng" typeface="Ebrima"/>
+      </a:majorFont>
+      <a:minorFont>
+        <a:latin typeface="Aptos" panose="02110004020202020204"/>
+        <a:ea typeface=""/>
+        <a:cs typeface=""/>
+        <a:font script="Jpan" typeface="游ゴシック"/>
+        <a:font script="Hang" typeface="맑은 고딕"/>
+        <a:font script="Hans" typeface="等线"/>
+        <a:font script="Hant" typeface="新細明體"/>
+        <a:font script="Arab" typeface="Arial"/>
+        <a:font script="Hebr" typeface="Arial"/>
+        <a:font script="Thai" typeface="Cordia New"/>
+        <a:font script="Ethi" typeface="Nyala"/>
+        <a:font script="Beng" typeface="Vrinda"/>
+        <a:font script="Gujr" typeface="Shruti"/>
+        <a:font script="Khmr" typeface="DaunPenh"/>
+        <a:font script="Knda" typeface="Tunga"/>
+        <a:font script="Guru" typeface="Raavi"/>
+        <a:font script="Cans" typeface="Euphemia"/>
+        <a:font script="Cher" typeface="Plantagenet Cherokee"/>
+        <a:font script="Yiii" typeface="Microsoft Yi Baiti"/>
+        <a:font script="Tibt" typeface="Microsoft Himalaya"/>
+        <a:font script="Thaa" typeface="MV Boli"/>
+        <a:font script="Deva" typeface="Mangal"/>
+        <a:font script="Telu" typeface="Gautami"/>
+        <a:font script="Taml" typeface="Latha"/>
+        <a:font script="Syrc" typeface="Estrangelo Edessa"/>
+        <a:font script="Orya" typeface="Kalinga"/>
+        <a:font script="Mlym" typeface="Kartika"/>
+        <a:font script="Laoo" typeface="DokChampa"/>
+        <a:font script="Sinh" typeface="Iskoola Pota"/>
+        <a:font script="Mong" typeface="Mongolian Baiti"/>
+        <a:font script="Viet" typeface="Arial"/>
+        <a:font script="Uigh" typeface="Microsoft Uighur"/>
+        <a:font script="Geor" typeface="Sylfaen"/>
+        <a:font script="Armn" typeface="Arial"/>
+        <a:font script="Bugi" typeface="Leelawadee UI"/>
+        <a:font script="Bopo" typeface="Microsoft JhengHei"/>
+        <a:font script="Java" typeface="Javanese Text"/>
+        <a:font script="Lisu" typeface="Segoe UI"/>
+        <a:font script="Mymr" typeface="Myanmar Text"/>
+        <a:font script="Nkoo" typeface="Ebrima"/>
+        <a:font script="Olck" typeface="Nirmala UI"/>
+        <a:font script="Osma" typeface="Ebrima"/>
+        <a:font script="Phag" typeface="Phagspa"/>
+        <a:font script="Syrn" typeface="Estrangelo Edessa"/>
+        <a:font script="Syrj" typeface="Estrangelo Edessa"/>
+        <a:font script="Syre" typeface="Estrangelo Edessa"/>
+        <a:font script="Sora" typeface="Nirmala UI"/>
+        <a:font script="Tale" typeface="Microsoft Tai Le"/>
+        <a:font script="Talu" typeface="Microsoft New Tai Lue"/>
+        <a:font script="Tfng" typeface="Ebrima"/>
+      </a:minorFont>
+    </a:fontScheme>
+    <a:fmtScheme name="Office">
+      <a:fillStyleLst>
+        <a:solidFill>
+          <a:schemeClr val="phClr"/>
+        </a:solidFill>
+        <a:gradFill rotWithShape="1">
+          <a:gsLst>
+            <a:gs pos="0">
+              <a:schemeClr val="phClr">
+                <a:lumMod val="110000"/>
+                <a:satMod val="105000"/>
+                <a:tint val="67000"/>
+              </a:schemeClr>
+            </a:gs>
+            <a:gs pos="50000">
+              <a:schemeClr val="phClr">
+                <a:lumMod val="105000"/>
+                <a:satMod val="103000"/>
+                <a:tint val="73000"/>
+              </a:schemeClr>
+            </a:gs>
+            <a:gs pos="100000">
+              <a:schemeClr val="phClr">
+                <a:lumMod val="105000"/>
+                <a:satMod val="109000"/>
+                <a:tint val="81000"/>
+              </a:schemeClr>
+            </a:gs>
+          </a:gsLst>
+          <a:lin ang="5400000" scaled="0"/>
+        </a:gradFill>
+        <a:gradFill rotWithShape="1">
+          <a:gsLst>
+            <a:gs pos="0">
+              <a:schemeClr val="phClr">
+                <a:satMod val="103000"/>
+                <a:lumMod val="102000"/>
+                <a:tint val="94000"/>
+              </a:schemeClr>
+            </a:gs>
+            <a:gs pos="50000">
+              <a:schemeClr val="phClr">
+                <a:satMod val="110000"/>
+                <a:lumMod val="100000"/>
+                <a:shade val="100000"/>
+              </a:schemeClr>
+            </a:gs>
+            <a:gs pos="100000">
+              <a:schemeClr val="phClr">
+                <a:lumMod val="99000"/>
+                <a:satMod val="120000"/>
+                <a:shade val="78000"/>
+              </a:schemeClr>
+            </a:gs>
+          </a:gsLst>
+          <a:lin ang="5400000" scaled="0"/>
+        </a:gradFill>
+      </a:fillStyleLst>
+      <a:lnStyleLst>
+        <a:ln w="12700" cap="flat" cmpd="sng" algn="ctr">
+          <a:solidFill>
+            <a:schemeClr val="phClr"/>
+          </a:solidFill>
+          <a:prstDash val="solid"/>
+          <a:miter lim="800000"/>
+        </a:ln>
+        <a:ln w="19050" cap="flat" cmpd="sng" algn="ctr">
+          <a:solidFill>
+            <a:schemeClr val="phClr"/>
+          </a:solidFill>
+          <a:prstDash val="solid"/>
+          <a:miter lim="800000"/>
+        </a:ln>
+        <a:ln w="25400" cap="flat" cmpd="sng" algn="ctr">
+          <a:solidFill>
+            <a:schemeClr val="phClr"/>
+          </a:solidFill>
+          <a:prstDash val="solid"/>
+          <a:miter lim="800000"/>
+        </a:ln>
+      </a:lnStyleLst>
+      <a:effectStyleLst>
+        <a:effectStyle>
+          <a:effectLst/>
+        </a:effectStyle>
+        <a:effectStyle>
+          <a:effectLst/>
+        </a:effectStyle>
+        <a:effectStyle>
+          <a:effectLst>
+            <a:outerShdw blurRad="57150" dist="19050" dir="5400000" algn="ctr" rotWithShape="0">
+              <a:srgbClr val="000000">
+                <a:alpha val="63000"/>
+              </a:srgbClr>
+            </a:outerShdw>
+          </a:effectLst>
+        </a:effectStyle>
+      </a:effectStyleLst>
+      <a:bgFillStyleLst>
+        <a:solidFill>
+          <a:schemeClr val="phClr"/>
+        </a:solidFill>
+        <a:solidFill>
+          <a:schemeClr val="phClr">
+            <a:tint val="95000"/>
+            <a:satMod val="170000"/>
+          </a:schemeClr>
+        </a:solidFill>
+        <a:gradFill rotWithShape="1">
+          <a:gsLst>
+            <a:gs pos="0">
+              <a:schemeClr val="phClr">
+                <a:tint val="93000"/>
+                <a:satMod val="150000"/>
+                <a:shade val="98000"/>
+                <a:lumMod val="102000"/>
+              </a:schemeClr>
+            </a:gs>
+            <a:gs pos="50000">
+              <a:schemeClr val="phClr">
+                <a:tint val="98000"/>
+                <a:satMod val="130000"/>
+                <a:shade val="90000"/>
+                <a:lumMod val="103000"/>
+              </a:schemeClr>
+            </a:gs>
+            <a:gs pos="100000">
+              <a:schemeClr val="phClr">
+                <a:shade val="63000"/>
+                <a:satMod val="120000"/>
+              </a:schemeClr>
+            </a:gs>
+          </a:gsLst>
+          <a:lin ang="5400000" scaled="0"/>
+        </a:gradFill>
+      </a:bgFillStyleLst>
+    </a:fmtScheme>
+  </a:themeElements>
+  <a:objectDefaults>
+    <a:lnDef>
+      <a:spPr/>
+      <a:bodyPr/>
+      <a:lstStyle/>
+      <a:style>
+        <a:lnRef idx="2">
+          <a:schemeClr val="accent1"/>
+        </a:lnRef>
+        <a:fillRef idx="0">
+          <a:schemeClr val="accent1"/>
+        </a:fillRef>
+        <a:effectRef idx="1">
+          <a:schemeClr val="accent1"/>
+        </a:effectRef>
+        <a:fontRef idx="minor">
+          <a:schemeClr val="tx1"/>
+        </a:fontRef>
+      </a:style>
+    </a:lnDef>
+  </a:objectDefaults>
+  <a:extraClrSchemeLst/>
+  <a:extLst>
+    <a:ext uri="{05A4C25C-085E-4340-85A3-A5531E510DB2}">
+      <thm15:themeFamily xmlns:thm15="http://schemas.microsoft.com/office/thememl/2012/main" name="Office Theme" id="{2E142A2C-CD16-42D6-873A-C26D2A0506FA}" vid="{1BDDFF52-6CD6-40A5-AB3C-68EB2F1E4D0A}"/>
+    </a:ext>
+  </a:extLst>
+</a:theme>
 </file>